--- a/lecons/F2/03_F2_M1_L02_The_Uneven_Distribution_of_the_World_s_Population.pptx
+++ b/lecons/F2/03_F2_M1_L02_The_Uneven_Distribution_of_the_World_s_Population.pptx
@@ -56,9 +56,14 @@
     <p:sldId id="304" r:id="rId50"/>
     <p:sldId id="305" r:id="rId51"/>
     <p:sldId id="306" r:id="rId52"/>
+    <p:sldId id="307" r:id="rId53"/>
+    <p:sldId id="308" r:id="rId54"/>
+    <p:sldId id="309" r:id="rId55"/>
+    <p:sldId id="310" r:id="rId56"/>
+    <p:sldId id="311" r:id="rId57"/>
   </p:sldIdLst>
   <p:notesMasterIdLst>
-    <p:notesMasterId r:id="rId53"/>
+    <p:notesMasterId r:id="rId58"/>
   </p:notesMasterIdLst>
   <p:sldSz cx="12192000" cy="6858000"/>
   <p:notesSz cx="6858000" cy="12192000"/>
@@ -640,7 +645,7 @@
           <a:p>
             <a:r>
               <a:rPr lang="en-US" dirty="0"/>
-              <a:t>Listen carefully to this situation from real life. On a world map of population, Ali sees that many dots cover Asia and Europe, but very few cover the Sahara and the Amazon forest. He asks why people do not live everywhere. Think about it, because I am going to ask you some questions.</a:t>
+              <a:t>Listen carefully to this situation from real life. On a world map of population, Ali sees many dots in Asia and Europe, but very few in the Sahara and the Amazon forest. He asks his teacher: "Why do people not live everywhere on the Earth?" Think about it, because I am going to ask you some questions.</a:t>
             </a:r>
             <a:endParaRPr lang="en-US" dirty="0"/>
           </a:p>
@@ -816,7 +821,7 @@
           <a:p>
             <a:r>
               <a:rPr lang="en-US" dirty="0"/>
-              <a:t>Good. Ali wants to know why the population is unevenly distributed.</a:t>
+              <a:t>Good. Ali does not know why people are not spread evenly over the Earth.</a:t>
             </a:r>
             <a:endParaRPr lang="en-US" dirty="0"/>
           </a:p>
@@ -1432,7 +1437,7 @@
           <a:p>
             <a:r>
               <a:rPr lang="en-US" dirty="0"/>
-              <a:t>Activity 1. Look carefully at this diagram: population density. Observe every detail before I ask the question.</a:t>
+              <a:t>Activity 1. Look carefully at this diagram: people and area. Observe every detail before I ask the question.</a:t>
             </a:r>
             <a:endParaRPr lang="en-US" dirty="0"/>
           </a:p>
@@ -1608,7 +1613,7 @@
           <a:p>
             <a:r>
               <a:rPr lang="en-US" dirty="0"/>
-              <a:t>Here is the question for Activity 1: How do we calculate population density? Take one minute to think and write your answer in your rough notebook.</a:t>
+              <a:t>Here is the question for Activity 1: How can we measure how crowded a place is? Take one minute to think and write your answer in your rough notebook.</a:t>
             </a:r>
             <a:endParaRPr lang="en-US" dirty="0"/>
           </a:p>
@@ -1696,7 +1701,7 @@
           <a:p>
             <a:r>
               <a:rPr lang="en-US" dirty="0"/>
-              <a:t>Let us check the answer together. Population ÷ area, in people per km².</a:t>
+              <a:t>Let us check the answer together. By dividing the population by the area: this is the population density, in people per km².</a:t>
             </a:r>
             <a:endParaRPr lang="en-US" dirty="0"/>
           </a:p>
@@ -1784,7 +1789,7 @@
           <a:p>
             <a:r>
               <a:rPr lang="en-US" dirty="0"/>
-              <a:t>Activity 2. Look carefully at this diagram: dense and sparse areas of the world. Observe every detail before I ask the question.</a:t>
+              <a:t>Activity 2. Look carefully at this diagram: where people live in the world. Observe every detail before I ask the question.</a:t>
             </a:r>
             <a:endParaRPr lang="en-US" dirty="0"/>
           </a:p>
@@ -1872,7 +1877,7 @@
           <a:p>
             <a:r>
               <a:rPr lang="en-US" dirty="0"/>
-              <a:t>Here is the question for Activity 2: Name three densely populated areas of the world. Take one minute to think and write your answer in your rough notebook.</a:t>
+              <a:t>Here is the question for Activity 2: Name three crowded areas of the world. Take one minute to think and write your answer in your rough notebook.</a:t>
             </a:r>
             <a:endParaRPr lang="en-US" dirty="0"/>
           </a:p>
@@ -1960,7 +1965,7 @@
           <a:p>
             <a:r>
               <a:rPr lang="en-US" dirty="0"/>
-              <a:t>Let us check the answer together. East Asia, South Asia and Europe (also West Africa, NE USA).</a:t>
+              <a:t>Let us check the answer together. East Asia, South Asia and Europe (also West Africa and the north-east of the USA).</a:t>
             </a:r>
             <a:endParaRPr lang="en-US" dirty="0"/>
           </a:p>
@@ -2136,7 +2141,7 @@
           <a:p>
             <a:r>
               <a:rPr lang="en-US" dirty="0"/>
-              <a:t>Here is the question for Activity 3: Why are deserts sparsely populated? Take one minute to think and write your answer in your rough notebook.</a:t>
+              <a:t>Here is the question for Activity 3: Why do very few people live here? Take one minute to think and write your answer in your rough notebook.</a:t>
             </a:r>
             <a:endParaRPr lang="en-US" dirty="0"/>
           </a:p>
@@ -2224,7 +2229,7 @@
           <a:p>
             <a:r>
               <a:rPr lang="en-US" dirty="0"/>
-              <a:t>Let us check the answer together. They are too dry and too hot for farming.</a:t>
+              <a:t>Let us check the answer together. It is too dry and too hot for farming.</a:t>
             </a:r>
             <a:endParaRPr lang="en-US" dirty="0"/>
           </a:p>
@@ -2312,7 +2317,7 @@
           <a:p>
             <a:r>
               <a:rPr lang="en-US" dirty="0"/>
-              <a:t>Activity 4. Look carefully at this picture: rice fields on a fertile plain. Observe every detail before I ask the question.</a:t>
+              <a:t>Activity 4. Look carefully at this picture: rice fields on a plain. Observe every detail before I ask the question.</a:t>
             </a:r>
             <a:endParaRPr lang="en-US" dirty="0"/>
           </a:p>
@@ -2488,7 +2493,7 @@
           <a:p>
             <a:r>
               <a:rPr lang="en-US" dirty="0"/>
-              <a:t>Our topic is Man in his Environment, and the sub-topic is The World's Population. The key notions we shall use today are: population density, population distribution, dense, sparse. At the end, you should be able to do this: learners are able to identify densely and sparsely populated areas and explain the reasons.</a:t>
+              <a:t>Our topic is Man in his Environment, and the sub-topic is The World's Population. The key notions we shall use today are: population density, population distribution. At the end, you should be able to do this: learners are able to identify densely and sparsely populated areas and explain the reasons.</a:t>
             </a:r>
             <a:endParaRPr lang="en-US" dirty="0"/>
           </a:p>
@@ -2576,7 +2581,7 @@
           <a:p>
             <a:r>
               <a:rPr lang="en-US" dirty="0"/>
-              <a:t>Let us check the answer together. The soil is good for farming and there is water.</a:t>
+              <a:t>Let us check the answer together. The soil is good for farming, and there is water.</a:t>
             </a:r>
             <a:endParaRPr lang="en-US" dirty="0"/>
           </a:p>
@@ -2752,7 +2757,7 @@
           <a:p>
             <a:r>
               <a:rPr lang="en-US" dirty="0"/>
-              <a:t>Here is the question for Activity 5: Give two human factors that attract people to towns like Douala. Take one minute to think and write your answer in your rough notebook.</a:t>
+              <a:t>Here is the question for Activity 5: Why do many people move to towns like Douala? Take one minute to think and write your answer in your rough notebook.</a:t>
             </a:r>
             <a:endParaRPr lang="en-US" dirty="0"/>
           </a:p>
@@ -2840,7 +2845,7 @@
           <a:p>
             <a:r>
               <a:rPr lang="en-US" dirty="0"/>
-              <a:t>Let us check the answer together. Jobs and industries, and services such as schools and hospitals (also the port).</a:t>
+              <a:t>Let us check the answer together. To find jobs in industries and the port, and services such as schools and hospitals.</a:t>
             </a:r>
             <a:endParaRPr lang="en-US" dirty="0"/>
           </a:p>
@@ -3104,7 +3109,7 @@
           <a:p>
             <a:r>
               <a:rPr lang="en-US" dirty="0"/>
-              <a:t>Let us copy Spatial Distribution. The world population is distributed as follows. On this slide we have Dense areas and Sparse areas. Write each point on a new line, with the key term first, and explain it in your own words when we revise.</a:t>
+              <a:t>Let us copy Concept of Population Density. Population density is understood as follows. Copy the point on Formula on the left, then draw the diagram on the right: population density. Give it a title and label it clearly.</a:t>
             </a:r>
             <a:endParaRPr lang="en-US" dirty="0"/>
           </a:p>
@@ -3192,7 +3197,7 @@
           <a:p>
             <a:r>
               <a:rPr lang="en-US" dirty="0"/>
-              <a:t>Now draw this illustration in your notebook: dense and sparse areas of the world. Give it a title and label it clearly.</a:t>
+              <a:t>We continue with Concept of Population Density. On this slide we have Example and Levels. Write each point on a new line, with the key term first, and explain it in your own words when we revise.</a:t>
             </a:r>
             <a:endParaRPr lang="en-US" dirty="0"/>
           </a:p>
@@ -3280,7 +3285,7 @@
           <a:p>
             <a:r>
               <a:rPr lang="en-US" dirty="0"/>
-              <a:t>Let us copy Factors of Uneven Distribution. The distribution depends on the following factors. On this slide we have Physical factors and Unfavourable conditions. Write each point on a new line, with the key term first, and explain it in your own words when we revise. When you finish, we go to the next slide.</a:t>
+              <a:t>Let us copy Spatial Distribution. The world population is distributed as follows. Copy the point on Densely populated areas on the left, then draw the diagram on the right: dense and sparse areas of the world. Give it a title and label it clearly.</a:t>
             </a:r>
             <a:endParaRPr lang="en-US" dirty="0"/>
           </a:p>
@@ -3368,7 +3373,7 @@
           <a:p>
             <a:r>
               <a:rPr lang="en-US" dirty="0"/>
-              <a:t>We continue with Factors of Uneven Distribution. On this slide we have Human factors. Write each point on a new line, with the key term first, and explain it in your own words when we revise.</a:t>
+              <a:t>Copy the point on Sparsely populated areas on the left, then draw the diagram on the right: a desert. Give it a title and label it clearly.</a:t>
             </a:r>
             <a:endParaRPr lang="en-US" dirty="0"/>
           </a:p>
@@ -3544,7 +3549,7 @@
           <a:p>
             <a:r>
               <a:rPr lang="en-US" dirty="0"/>
-              <a:t>Now let us check what you have understood. Question 1: A region has 300,000 people and 1,000 km². Find its density. Answer in your exercise book.</a:t>
+              <a:t>Let us copy Factors of Uneven Distribution. The distribution depends on the following factors. On this slide we have Climate. Write each point on a new line, with the key term first, and explain it in your own words when we revise.</a:t>
             </a:r>
             <a:endParaRPr lang="en-US" dirty="0"/>
           </a:p>
@@ -3632,7 +3637,7 @@
           <a:p>
             <a:r>
               <a:rPr lang="en-US" dirty="0"/>
-              <a:t>The expected answer is: 300,000 ÷ 1,000 = 300 people per km². If you got it right, well done.</a:t>
+              <a:t>Copy the point on Relief and soils on the left, then draw the diagram on the right: a fertile plain. Give it a title and label it clearly.</a:t>
             </a:r>
             <a:endParaRPr lang="en-US" dirty="0"/>
           </a:p>
@@ -3720,7 +3725,7 @@
           <a:p>
             <a:r>
               <a:rPr lang="en-US" dirty="0"/>
-              <a:t>Now let us check what you have understood. Question 2: Give two reasons why deserts are sparsely populated. Answer in your exercise book.</a:t>
+              <a:t>We continue with Factors of Uneven Distribution. On this slide we have Water. Write each point on a new line, with the key term first, and explain it in your own words when we revise.</a:t>
             </a:r>
             <a:endParaRPr lang="en-US" dirty="0"/>
           </a:p>
@@ -3808,7 +3813,7 @@
           <a:p>
             <a:r>
               <a:rPr lang="en-US" dirty="0"/>
-              <a:t>The expected answer is: lack of water and very hot temperatures. If you got it right, well done.</a:t>
+              <a:t>Copy the point on Economic factors on the left, then draw the diagram on the right: douala, a port and industrial town. Give it a title and label it clearly.</a:t>
             </a:r>
             <a:endParaRPr lang="en-US" dirty="0"/>
           </a:p>
@@ -3896,7 +3901,7 @@
           <a:p>
             <a:r>
               <a:rPr lang="en-US" dirty="0"/>
-              <a:t>For those who need more practice, fill in the blanks in your exercise book. The answers are: number 1, density; number 2, sparsely; number 3, attract.</a:t>
+              <a:t>We continue with Factors of Uneven Distribution. On this slide we have Social and political factors. Write each point on a new line, with the key term first, and explain it in your own words when we revise.</a:t>
             </a:r>
             <a:endParaRPr lang="en-US" dirty="0"/>
           </a:p>
@@ -3984,7 +3989,7 @@
           <a:p>
             <a:r>
               <a:rPr lang="en-US" dirty="0"/>
-              <a:t>For your homework: Find the population and the area of your region and calculate its density. We shall correct it at the beginning of our next lesson.</a:t>
+              <a:t>Now let us check what you have understood. Question 1: A region has 300,000 people and 1,000 km². Find its density. Answer in your exercise book.</a:t>
             </a:r>
             <a:endParaRPr lang="en-US" dirty="0"/>
           </a:p>
@@ -4072,7 +4077,7 @@
           <a:p>
             <a:r>
               <a:rPr lang="en-US" dirty="0"/>
-              <a:t>Our next lesson will be on Practical Work 2: Population Densities in Cameroon. Thank you for your attention, and see you next time.</a:t>
+              <a:t>The expected answer is: 300,000 ÷ 1,000 = 300 people per km². If you got it right, well done.</a:t>
             </a:r>
             <a:endParaRPr lang="en-US" dirty="0"/>
           </a:p>
@@ -4160,7 +4165,7 @@
           <a:p>
             <a:r>
               <a:rPr lang="en-US" dirty="0"/>
-              <a:t>Let us play the bilingual game. I say a word in English, and you give me the French word. Then we do the reverse.</a:t>
+              <a:t>Now let us check what you have understood. Question 2: Give two reasons why deserts are sparsely populated. Answer in your exercise book.</a:t>
             </a:r>
             <a:endParaRPr lang="en-US" dirty="0"/>
           </a:p>
@@ -4248,7 +4253,7 @@
           <a:p>
             <a:r>
               <a:rPr lang="en-US" dirty="0"/>
-              <a:t>I record this information in the official logbook of the class after the lesson.</a:t>
+              <a:t>The expected answer is: lack of water and very hot temperatures. If you got it right, well done.</a:t>
             </a:r>
             <a:endParaRPr lang="en-US" dirty="0"/>
           </a:p>
@@ -4336,7 +4341,7 @@
           <a:p>
             <a:r>
               <a:rPr lang="en-US" dirty="0"/>
-              <a:t>I complete the second page of the logbook: the matter taught, the evaluation, the homework and the attendance.</a:t>
+              <a:t>For those who need more practice, fill in the blanks in your exercise book. The answers are: number 1, density; number 2, sparsely; number 3, attract.</a:t>
             </a:r>
             <a:endParaRPr lang="en-US" dirty="0"/>
           </a:p>
@@ -4512,7 +4517,7 @@
           <a:p>
             <a:r>
               <a:rPr lang="en-US" dirty="0"/>
-              <a:t>This slide is for me, the teacher: it gives the timing of the lesson and what to do if the projector is not available.</a:t>
+              <a:t>For your homework: Find the population and the area of your region and calculate its density. We shall correct it at the beginning of our next lesson.</a:t>
             </a:r>
             <a:endParaRPr lang="en-US" dirty="0"/>
           </a:p>
@@ -4600,7 +4605,7 @@
           <a:p>
             <a:r>
               <a:rPr lang="en-US" dirty="0"/>
-              <a:t>These are the references and picture credits used to prepare this lesson.</a:t>
+              <a:t>Our next lesson will be on Practical Work 2: Population Densities in Cameroon. Thank you for your attention, and see you next time.</a:t>
             </a:r>
             <a:endParaRPr lang="en-US" dirty="0"/>
           </a:p>
@@ -4624,6 +4629,446 @@
             <a:fld id="{F7021451-1387-4CA6-816F-3879F97B5CBC}" type="slidenum">
               <a:rPr lang="en-US"/>
               <a:t>51</a:t>
+            </a:fld>
+            <a:endParaRPr lang="en-US"/>
+          </a:p>
+        </p:txBody>
+      </p:sp>
+    </p:spTree>
+    <p:extLst>
+      <p:ext uri="{BB962C8B-B14F-4D97-AF65-F5344CB8AC3E}">
+        <p14:creationId xmlns:p14="http://schemas.microsoft.com/office/powerpoint/2010/main" val="1024086991"/>
+      </p:ext>
+    </p:extLst>
+  </p:cSld>
+  <p:clrMapOvr>
+    <a:masterClrMapping/>
+  </p:clrMapOvr>
+</p:notes>
+</file>
+
+<file path=ppt/notesSlides/notesSlide52.xml><?xml version="1.0" encoding="utf-8"?>
+<p:notes xmlns:a="http://schemas.openxmlformats.org/drawingml/2006/main" xmlns:r="http://schemas.openxmlformats.org/officeDocument/2006/relationships" xmlns:p="http://schemas.openxmlformats.org/presentationml/2006/main">
+  <p:cSld>
+    <p:spTree>
+      <p:nvGrpSpPr>
+        <p:cNvPr id="1" name=""/>
+        <p:cNvGrpSpPr/>
+        <p:nvPr/>
+      </p:nvGrpSpPr>
+      <p:grpSpPr>
+        <a:xfrm>
+          <a:off x="0" y="0"/>
+          <a:ext cx="0" cy="0"/>
+          <a:chOff x="0" y="0"/>
+          <a:chExt cx="0" cy="0"/>
+        </a:xfrm>
+      </p:grpSpPr>
+      <p:sp>
+        <p:nvSpPr>
+          <p:cNvPr id="2" name="Slide Image Placeholder 1"/>
+          <p:cNvSpPr>
+            <a:spLocks noGrp="1" noRot="1" noChangeAspect="1"/>
+          </p:cNvSpPr>
+          <p:nvPr>
+            <p:ph type="sldImg"/>
+          </p:nvPr>
+        </p:nvSpPr>
+        <p:spPr/>
+      </p:sp>
+      <p:sp>
+        <p:nvSpPr>
+          <p:cNvPr id="3" name="Notes Placeholder 2"/>
+          <p:cNvSpPr>
+            <a:spLocks noGrp="1"/>
+          </p:cNvSpPr>
+          <p:nvPr>
+            <p:ph type="body" idx="1"/>
+          </p:nvPr>
+        </p:nvSpPr>
+        <p:spPr/>
+        <p:txBody>
+          <a:bodyPr/>
+          <a:lstStyle/>
+          <a:p>
+            <a:r>
+              <a:rPr lang="en-US" dirty="0"/>
+              <a:t>Let us play the bilingual game. I say a word in English, and you give me the French word. Then we do the reverse.</a:t>
+            </a:r>
+            <a:endParaRPr lang="en-US" dirty="0"/>
+          </a:p>
+        </p:txBody>
+      </p:sp>
+      <p:sp>
+        <p:nvSpPr>
+          <p:cNvPr id="4" name="Slide Number Placeholder 3"/>
+          <p:cNvSpPr>
+            <a:spLocks noGrp="1"/>
+          </p:cNvSpPr>
+          <p:nvPr>
+            <p:ph type="sldNum" sz="quarter" idx="10"/>
+          </p:nvPr>
+        </p:nvSpPr>
+        <p:spPr/>
+        <p:txBody>
+          <a:bodyPr/>
+          <a:lstStyle/>
+          <a:p>
+            <a:fld id="{F7021451-1387-4CA6-816F-3879F97B5CBC}" type="slidenum">
+              <a:rPr lang="en-US"/>
+              <a:t>52</a:t>
+            </a:fld>
+            <a:endParaRPr lang="en-US"/>
+          </a:p>
+        </p:txBody>
+      </p:sp>
+    </p:spTree>
+    <p:extLst>
+      <p:ext uri="{BB962C8B-B14F-4D97-AF65-F5344CB8AC3E}">
+        <p14:creationId xmlns:p14="http://schemas.microsoft.com/office/powerpoint/2010/main" val="1024086991"/>
+      </p:ext>
+    </p:extLst>
+  </p:cSld>
+  <p:clrMapOvr>
+    <a:masterClrMapping/>
+  </p:clrMapOvr>
+</p:notes>
+</file>
+
+<file path=ppt/notesSlides/notesSlide53.xml><?xml version="1.0" encoding="utf-8"?>
+<p:notes xmlns:a="http://schemas.openxmlformats.org/drawingml/2006/main" xmlns:r="http://schemas.openxmlformats.org/officeDocument/2006/relationships" xmlns:p="http://schemas.openxmlformats.org/presentationml/2006/main">
+  <p:cSld>
+    <p:spTree>
+      <p:nvGrpSpPr>
+        <p:cNvPr id="1" name=""/>
+        <p:cNvGrpSpPr/>
+        <p:nvPr/>
+      </p:nvGrpSpPr>
+      <p:grpSpPr>
+        <a:xfrm>
+          <a:off x="0" y="0"/>
+          <a:ext cx="0" cy="0"/>
+          <a:chOff x="0" y="0"/>
+          <a:chExt cx="0" cy="0"/>
+        </a:xfrm>
+      </p:grpSpPr>
+      <p:sp>
+        <p:nvSpPr>
+          <p:cNvPr id="2" name="Slide Image Placeholder 1"/>
+          <p:cNvSpPr>
+            <a:spLocks noGrp="1" noRot="1" noChangeAspect="1"/>
+          </p:cNvSpPr>
+          <p:nvPr>
+            <p:ph type="sldImg"/>
+          </p:nvPr>
+        </p:nvSpPr>
+        <p:spPr/>
+      </p:sp>
+      <p:sp>
+        <p:nvSpPr>
+          <p:cNvPr id="3" name="Notes Placeholder 2"/>
+          <p:cNvSpPr>
+            <a:spLocks noGrp="1"/>
+          </p:cNvSpPr>
+          <p:nvPr>
+            <p:ph type="body" idx="1"/>
+          </p:nvPr>
+        </p:nvSpPr>
+        <p:spPr/>
+        <p:txBody>
+          <a:bodyPr/>
+          <a:lstStyle/>
+          <a:p>
+            <a:r>
+              <a:rPr lang="en-US" dirty="0"/>
+              <a:t>I record this information in the official logbook of the class after the lesson.</a:t>
+            </a:r>
+            <a:endParaRPr lang="en-US" dirty="0"/>
+          </a:p>
+        </p:txBody>
+      </p:sp>
+      <p:sp>
+        <p:nvSpPr>
+          <p:cNvPr id="4" name="Slide Number Placeholder 3"/>
+          <p:cNvSpPr>
+            <a:spLocks noGrp="1"/>
+          </p:cNvSpPr>
+          <p:nvPr>
+            <p:ph type="sldNum" sz="quarter" idx="10"/>
+          </p:nvPr>
+        </p:nvSpPr>
+        <p:spPr/>
+        <p:txBody>
+          <a:bodyPr/>
+          <a:lstStyle/>
+          <a:p>
+            <a:fld id="{F7021451-1387-4CA6-816F-3879F97B5CBC}" type="slidenum">
+              <a:rPr lang="en-US"/>
+              <a:t>53</a:t>
+            </a:fld>
+            <a:endParaRPr lang="en-US"/>
+          </a:p>
+        </p:txBody>
+      </p:sp>
+    </p:spTree>
+    <p:extLst>
+      <p:ext uri="{BB962C8B-B14F-4D97-AF65-F5344CB8AC3E}">
+        <p14:creationId xmlns:p14="http://schemas.microsoft.com/office/powerpoint/2010/main" val="1024086991"/>
+      </p:ext>
+    </p:extLst>
+  </p:cSld>
+  <p:clrMapOvr>
+    <a:masterClrMapping/>
+  </p:clrMapOvr>
+</p:notes>
+</file>
+
+<file path=ppt/notesSlides/notesSlide54.xml><?xml version="1.0" encoding="utf-8"?>
+<p:notes xmlns:a="http://schemas.openxmlformats.org/drawingml/2006/main" xmlns:r="http://schemas.openxmlformats.org/officeDocument/2006/relationships" xmlns:p="http://schemas.openxmlformats.org/presentationml/2006/main">
+  <p:cSld>
+    <p:spTree>
+      <p:nvGrpSpPr>
+        <p:cNvPr id="1" name=""/>
+        <p:cNvGrpSpPr/>
+        <p:nvPr/>
+      </p:nvGrpSpPr>
+      <p:grpSpPr>
+        <a:xfrm>
+          <a:off x="0" y="0"/>
+          <a:ext cx="0" cy="0"/>
+          <a:chOff x="0" y="0"/>
+          <a:chExt cx="0" cy="0"/>
+        </a:xfrm>
+      </p:grpSpPr>
+      <p:sp>
+        <p:nvSpPr>
+          <p:cNvPr id="2" name="Slide Image Placeholder 1"/>
+          <p:cNvSpPr>
+            <a:spLocks noGrp="1" noRot="1" noChangeAspect="1"/>
+          </p:cNvSpPr>
+          <p:nvPr>
+            <p:ph type="sldImg"/>
+          </p:nvPr>
+        </p:nvSpPr>
+        <p:spPr/>
+      </p:sp>
+      <p:sp>
+        <p:nvSpPr>
+          <p:cNvPr id="3" name="Notes Placeholder 2"/>
+          <p:cNvSpPr>
+            <a:spLocks noGrp="1"/>
+          </p:cNvSpPr>
+          <p:nvPr>
+            <p:ph type="body" idx="1"/>
+          </p:nvPr>
+        </p:nvSpPr>
+        <p:spPr/>
+        <p:txBody>
+          <a:bodyPr/>
+          <a:lstStyle/>
+          <a:p>
+            <a:r>
+              <a:rPr lang="en-US" dirty="0"/>
+              <a:t>I complete the second page of the logbook: the matter taught, the evaluation, the homework and the attendance.</a:t>
+            </a:r>
+            <a:endParaRPr lang="en-US" dirty="0"/>
+          </a:p>
+        </p:txBody>
+      </p:sp>
+      <p:sp>
+        <p:nvSpPr>
+          <p:cNvPr id="4" name="Slide Number Placeholder 3"/>
+          <p:cNvSpPr>
+            <a:spLocks noGrp="1"/>
+          </p:cNvSpPr>
+          <p:nvPr>
+            <p:ph type="sldNum" sz="quarter" idx="10"/>
+          </p:nvPr>
+        </p:nvSpPr>
+        <p:spPr/>
+        <p:txBody>
+          <a:bodyPr/>
+          <a:lstStyle/>
+          <a:p>
+            <a:fld id="{F7021451-1387-4CA6-816F-3879F97B5CBC}" type="slidenum">
+              <a:rPr lang="en-US"/>
+              <a:t>54</a:t>
+            </a:fld>
+            <a:endParaRPr lang="en-US"/>
+          </a:p>
+        </p:txBody>
+      </p:sp>
+    </p:spTree>
+    <p:extLst>
+      <p:ext uri="{BB962C8B-B14F-4D97-AF65-F5344CB8AC3E}">
+        <p14:creationId xmlns:p14="http://schemas.microsoft.com/office/powerpoint/2010/main" val="1024086991"/>
+      </p:ext>
+    </p:extLst>
+  </p:cSld>
+  <p:clrMapOvr>
+    <a:masterClrMapping/>
+  </p:clrMapOvr>
+</p:notes>
+</file>
+
+<file path=ppt/notesSlides/notesSlide55.xml><?xml version="1.0" encoding="utf-8"?>
+<p:notes xmlns:a="http://schemas.openxmlformats.org/drawingml/2006/main" xmlns:r="http://schemas.openxmlformats.org/officeDocument/2006/relationships" xmlns:p="http://schemas.openxmlformats.org/presentationml/2006/main">
+  <p:cSld>
+    <p:spTree>
+      <p:nvGrpSpPr>
+        <p:cNvPr id="1" name=""/>
+        <p:cNvGrpSpPr/>
+        <p:nvPr/>
+      </p:nvGrpSpPr>
+      <p:grpSpPr>
+        <a:xfrm>
+          <a:off x="0" y="0"/>
+          <a:ext cx="0" cy="0"/>
+          <a:chOff x="0" y="0"/>
+          <a:chExt cx="0" cy="0"/>
+        </a:xfrm>
+      </p:grpSpPr>
+      <p:sp>
+        <p:nvSpPr>
+          <p:cNvPr id="2" name="Slide Image Placeholder 1"/>
+          <p:cNvSpPr>
+            <a:spLocks noGrp="1" noRot="1" noChangeAspect="1"/>
+          </p:cNvSpPr>
+          <p:nvPr>
+            <p:ph type="sldImg"/>
+          </p:nvPr>
+        </p:nvSpPr>
+        <p:spPr/>
+      </p:sp>
+      <p:sp>
+        <p:nvSpPr>
+          <p:cNvPr id="3" name="Notes Placeholder 2"/>
+          <p:cNvSpPr>
+            <a:spLocks noGrp="1"/>
+          </p:cNvSpPr>
+          <p:nvPr>
+            <p:ph type="body" idx="1"/>
+          </p:nvPr>
+        </p:nvSpPr>
+        <p:spPr/>
+        <p:txBody>
+          <a:bodyPr/>
+          <a:lstStyle/>
+          <a:p>
+            <a:r>
+              <a:rPr lang="en-US" dirty="0"/>
+              <a:t>This slide is for me, the teacher: it gives the timing of the lesson and what to do if the projector is not available.</a:t>
+            </a:r>
+            <a:endParaRPr lang="en-US" dirty="0"/>
+          </a:p>
+        </p:txBody>
+      </p:sp>
+      <p:sp>
+        <p:nvSpPr>
+          <p:cNvPr id="4" name="Slide Number Placeholder 3"/>
+          <p:cNvSpPr>
+            <a:spLocks noGrp="1"/>
+          </p:cNvSpPr>
+          <p:nvPr>
+            <p:ph type="sldNum" sz="quarter" idx="10"/>
+          </p:nvPr>
+        </p:nvSpPr>
+        <p:spPr/>
+        <p:txBody>
+          <a:bodyPr/>
+          <a:lstStyle/>
+          <a:p>
+            <a:fld id="{F7021451-1387-4CA6-816F-3879F97B5CBC}" type="slidenum">
+              <a:rPr lang="en-US"/>
+              <a:t>55</a:t>
+            </a:fld>
+            <a:endParaRPr lang="en-US"/>
+          </a:p>
+        </p:txBody>
+      </p:sp>
+    </p:spTree>
+    <p:extLst>
+      <p:ext uri="{BB962C8B-B14F-4D97-AF65-F5344CB8AC3E}">
+        <p14:creationId xmlns:p14="http://schemas.microsoft.com/office/powerpoint/2010/main" val="1024086991"/>
+      </p:ext>
+    </p:extLst>
+  </p:cSld>
+  <p:clrMapOvr>
+    <a:masterClrMapping/>
+  </p:clrMapOvr>
+</p:notes>
+</file>
+
+<file path=ppt/notesSlides/notesSlide56.xml><?xml version="1.0" encoding="utf-8"?>
+<p:notes xmlns:a="http://schemas.openxmlformats.org/drawingml/2006/main" xmlns:r="http://schemas.openxmlformats.org/officeDocument/2006/relationships" xmlns:p="http://schemas.openxmlformats.org/presentationml/2006/main">
+  <p:cSld>
+    <p:spTree>
+      <p:nvGrpSpPr>
+        <p:cNvPr id="1" name=""/>
+        <p:cNvGrpSpPr/>
+        <p:nvPr/>
+      </p:nvGrpSpPr>
+      <p:grpSpPr>
+        <a:xfrm>
+          <a:off x="0" y="0"/>
+          <a:ext cx="0" cy="0"/>
+          <a:chOff x="0" y="0"/>
+          <a:chExt cx="0" cy="0"/>
+        </a:xfrm>
+      </p:grpSpPr>
+      <p:sp>
+        <p:nvSpPr>
+          <p:cNvPr id="2" name="Slide Image Placeholder 1"/>
+          <p:cNvSpPr>
+            <a:spLocks noGrp="1" noRot="1" noChangeAspect="1"/>
+          </p:cNvSpPr>
+          <p:nvPr>
+            <p:ph type="sldImg"/>
+          </p:nvPr>
+        </p:nvSpPr>
+        <p:spPr/>
+      </p:sp>
+      <p:sp>
+        <p:nvSpPr>
+          <p:cNvPr id="3" name="Notes Placeholder 2"/>
+          <p:cNvSpPr>
+            <a:spLocks noGrp="1"/>
+          </p:cNvSpPr>
+          <p:nvPr>
+            <p:ph type="body" idx="1"/>
+          </p:nvPr>
+        </p:nvSpPr>
+        <p:spPr/>
+        <p:txBody>
+          <a:bodyPr/>
+          <a:lstStyle/>
+          <a:p>
+            <a:r>
+              <a:rPr lang="en-US" dirty="0"/>
+              <a:t>These are the references and picture credits used to prepare this lesson.</a:t>
+            </a:r>
+            <a:endParaRPr lang="en-US" dirty="0"/>
+          </a:p>
+        </p:txBody>
+      </p:sp>
+      <p:sp>
+        <p:nvSpPr>
+          <p:cNvPr id="4" name="Slide Number Placeholder 3"/>
+          <p:cNvSpPr>
+            <a:spLocks noGrp="1"/>
+          </p:cNvSpPr>
+          <p:nvPr>
+            <p:ph type="sldNum" sz="quarter" idx="10"/>
+          </p:nvPr>
+        </p:nvSpPr>
+        <p:spPr/>
+        <p:txBody>
+          <a:bodyPr/>
+          <a:lstStyle/>
+          <a:p>
+            <a:fld id="{F7021451-1387-4CA6-816F-3879F97B5CBC}" type="slidenum">
+              <a:rPr lang="en-US"/>
+              <a:t>56</a:t>
             </a:fld>
             <a:endParaRPr lang="en-US"/>
           </a:p>
@@ -4864,7 +5309,7 @@
           <a:p>
             <a:r>
               <a:rPr lang="en-US" dirty="0"/>
-              <a:t>By the end of this lesson, you should be able to do three things. Number 1: define population density and calculate it. Number 2: describe the distribution of the world population. Number 3: explain the factors of uneven distribution.</a:t>
+              <a:t>By the end of this lesson, you should be able to do three things. Number 1: define and calculate population density. Number 2: describe the spatial distribution of the world population. Number 3: explain the factors of uneven distribution.</a:t>
             </a:r>
             <a:endParaRPr lang="en-US" dirty="0"/>
           </a:p>
@@ -4952,7 +5397,7 @@
           <a:p>
             <a:r>
               <a:rPr lang="en-US" dirty="0"/>
-              <a:t>Let us first remember what you already know. The world has 8 billion people. Some places are crowded, others are empty. Deserts are very dry. Keep this in mind, because we shall build on it today.</a:t>
+              <a:t>Let us first remember what you already know. The world has more than 8 billion people. Some places are crowded, others are empty. Deserts are very dry. Keep this in mind, because we shall build on it today.</a:t>
             </a:r>
             <a:endParaRPr lang="en-US" dirty="0"/>
           </a:p>
@@ -6332,7 +6777,7 @@
         <p:spPr>
           <a:xfrm>
             <a:off x="0" y="658368"/>
-            <a:ext cx="5120640" cy="5833872"/>
+            <a:ext cx="3840480" cy="5833872"/>
           </a:xfrm>
           <a:prstGeom prst="rect">
             <a:avLst/>
@@ -6347,8 +6792,8 @@
         </p:nvSpPr>
         <p:spPr>
           <a:xfrm>
-            <a:off x="5349240" y="1005840"/>
-            <a:ext cx="6522415" cy="731520"/>
+            <a:off x="4069080" y="1005840"/>
+            <a:ext cx="7802575" cy="731520"/>
           </a:xfrm>
           <a:prstGeom prst="rect">
             <a:avLst/>
@@ -6388,8 +6833,8 @@
         </p:nvSpPr>
         <p:spPr>
           <a:xfrm>
-            <a:off x="5349240" y="1783080"/>
-            <a:ext cx="6522415" cy="4663440"/>
+            <a:off x="4069080" y="1783080"/>
+            <a:ext cx="7802575" cy="4663440"/>
           </a:xfrm>
           <a:prstGeom prst="rect">
             <a:avLst/>
@@ -6416,7 +6861,7 @@
                 <a:ea typeface="Times New Roman" pitchFamily="34" charset="-122"/>
                 <a:cs typeface="Times New Roman" pitchFamily="34" charset="-120"/>
               </a:rPr>
-              <a:t>On a world map of population, Ali sees that many dots cover Asia and Europe, but very few cover the Sahara and the Amazon forest. He asks why people do not live everywhere.</a:t>
+              <a:t>On a world map of population, Ali sees many dots in Asia and Europe, but very few in the Sahara and the Amazon forest. He asks his teacher: "Why do people not live everywhere on the Earth?"</a:t>
             </a:r>
             <a:endParaRPr lang="en-US" sz="4000" dirty="0"/>
           </a:p>
@@ -6854,7 +7299,7 @@
                 <a:ea typeface="Times New Roman" pitchFamily="34" charset="-122"/>
                 <a:cs typeface="Times New Roman" pitchFamily="34" charset="-120"/>
               </a:rPr>
-              <a:t>Ali wants to know why the population is unevenly distributed.</a:t>
+              <a:t>Ali does not know why people are not spread evenly over the Earth.</a:t>
             </a:r>
             <a:endParaRPr lang="en-US" sz="4000" dirty="0"/>
           </a:p>
@@ -8382,7 +8827,7 @@
                 <a:ea typeface="Times New Roman" pitchFamily="34" charset="-122"/>
                 <a:cs typeface="Times New Roman" pitchFamily="34" charset="-120"/>
               </a:rPr>
-              <a:t>Population density.</a:t>
+              <a:t>People and area.</a:t>
             </a:r>
             <a:endParaRPr lang="en-US" sz="1800" dirty="0"/>
           </a:p>
@@ -9196,7 +9641,7 @@
                 <a:ea typeface="Times New Roman" pitchFamily="34" charset="-122"/>
                 <a:cs typeface="Times New Roman" pitchFamily="34" charset="-120"/>
               </a:rPr>
-              <a:t>How do we calculate population density?</a:t>
+              <a:t>How can we measure how crowded a place is?</a:t>
             </a:r>
             <a:endParaRPr lang="en-US" sz="4000" dirty="0"/>
           </a:p>
@@ -9415,7 +9860,7 @@
                 <a:ea typeface="Times New Roman" pitchFamily="34" charset="-122"/>
                 <a:cs typeface="Times New Roman" pitchFamily="34" charset="-120"/>
               </a:rPr>
-              <a:t>Population ÷ area, in people per km².</a:t>
+              <a:t>By dividing the population by the area: this is the population density, in people per km².</a:t>
             </a:r>
             <a:endParaRPr lang="en-US" sz="4000" dirty="0"/>
           </a:p>
@@ -9629,7 +10074,7 @@
                 <a:ea typeface="Times New Roman" pitchFamily="34" charset="-122"/>
                 <a:cs typeface="Times New Roman" pitchFamily="34" charset="-120"/>
               </a:rPr>
-              <a:t>Dense and sparse areas of the world.</a:t>
+              <a:t>Where people live in the world.</a:t>
             </a:r>
             <a:endParaRPr lang="en-US" sz="1800" dirty="0"/>
           </a:p>
@@ -9848,7 +10293,7 @@
                 <a:ea typeface="Times New Roman" pitchFamily="34" charset="-122"/>
                 <a:cs typeface="Times New Roman" pitchFamily="34" charset="-120"/>
               </a:rPr>
-              <a:t>Name three densely populated areas of the world.</a:t>
+              <a:t>Name three crowded areas of the world.</a:t>
             </a:r>
             <a:endParaRPr lang="en-US" sz="4000" dirty="0"/>
           </a:p>
@@ -10067,7 +10512,7 @@
                 <a:ea typeface="Times New Roman" pitchFamily="34" charset="-122"/>
                 <a:cs typeface="Times New Roman" pitchFamily="34" charset="-120"/>
               </a:rPr>
-              <a:t>East Asia, South Asia and Europe (also West Africa, NE USA).</a:t>
+              <a:t>East Asia, South Asia and Europe (also West Africa and the north-east of the USA).</a:t>
             </a:r>
             <a:endParaRPr lang="en-US" sz="4000" dirty="0"/>
           </a:p>
@@ -10500,7 +10945,7 @@
                 <a:ea typeface="Times New Roman" pitchFamily="34" charset="-122"/>
                 <a:cs typeface="Times New Roman" pitchFamily="34" charset="-120"/>
               </a:rPr>
-              <a:t>Why are deserts sparsely populated?</a:t>
+              <a:t>Why do very few people live here?</a:t>
             </a:r>
             <a:endParaRPr lang="en-US" sz="4000" dirty="0"/>
           </a:p>
@@ -10719,7 +11164,7 @@
                 <a:ea typeface="Times New Roman" pitchFamily="34" charset="-122"/>
                 <a:cs typeface="Times New Roman" pitchFamily="34" charset="-120"/>
               </a:rPr>
-              <a:t>They are too dry and too hot for farming.</a:t>
+              <a:t>It is too dry and too hot for farming.</a:t>
             </a:r>
             <a:endParaRPr lang="en-US" sz="4000" dirty="0"/>
           </a:p>
@@ -10933,7 +11378,7 @@
                 <a:ea typeface="Times New Roman" pitchFamily="34" charset="-122"/>
                 <a:cs typeface="Times New Roman" pitchFamily="34" charset="-120"/>
               </a:rPr>
-              <a:t>Rice fields on a fertile plain.</a:t>
+              <a:t>Rice fields on a plain.</a:t>
             </a:r>
             <a:endParaRPr lang="en-US" sz="1800" dirty="0"/>
           </a:p>
@@ -11835,7 +12280,7 @@
                           <a:ea typeface="Calibri" pitchFamily="34" charset="-122"/>
                           <a:cs typeface="Calibri" pitchFamily="34" charset="-120"/>
                         </a:rPr>
-                        <a:t>Population density, population distribution, dense, sparse.</a:t>
+                        <a:t>Population density, population distribution.</a:t>
                       </a:r>
                       <a:endParaRPr lang="en-US" sz="1700" dirty="0">
                         <a:latin typeface="Calibri" charset="0"/>
@@ -12380,7 +12825,7 @@
                 <a:ea typeface="Times New Roman" pitchFamily="34" charset="-122"/>
                 <a:cs typeface="Times New Roman" pitchFamily="34" charset="-120"/>
               </a:rPr>
-              <a:t>The soil is good for farming and there is water.</a:t>
+              <a:t>The soil is good for farming, and there is water.</a:t>
             </a:r>
             <a:endParaRPr lang="en-US" sz="4000" dirty="0"/>
           </a:p>
@@ -12813,7 +13258,7 @@
                 <a:ea typeface="Times New Roman" pitchFamily="34" charset="-122"/>
                 <a:cs typeface="Times New Roman" pitchFamily="34" charset="-120"/>
               </a:rPr>
-              <a:t>Give two human factors that attract people to towns like Douala.</a:t>
+              <a:t>Why do many people move to towns like Douala?</a:t>
             </a:r>
             <a:endParaRPr lang="en-US" sz="4000" dirty="0"/>
           </a:p>
@@ -13032,7 +13477,7 @@
                 <a:ea typeface="Times New Roman" pitchFamily="34" charset="-122"/>
                 <a:cs typeface="Times New Roman" pitchFamily="34" charset="-120"/>
               </a:rPr>
-              <a:t>Jobs and industries, and services such as schools and hospitals (also the port).</a:t>
+              <a:t>To find jobs in industries and the port, and services such as schools and hospitals.</a:t>
             </a:r>
             <a:endParaRPr lang="en-US" sz="4000" dirty="0"/>
           </a:p>
@@ -13702,9 +14147,129 @@
           </a:p>
         </p:txBody>
       </p:sp>
+      <p:sp>
+        <p:nvSpPr>
+          <p:cNvPr id="3" name="Text 1"/>
+          <p:cNvSpPr/>
+          <p:nvPr/>
+        </p:nvSpPr>
+        <p:spPr>
+          <a:xfrm>
+            <a:off x="365760" y="1005840"/>
+            <a:ext cx="11460175" cy="731520"/>
+          </a:xfrm>
+          <a:prstGeom prst="rect">
+            <a:avLst/>
+          </a:prstGeom>
+          <a:noFill/>
+          <a:ln/>
+        </p:spPr>
+        <p:txBody>
+          <a:bodyPr wrap="square" lIns="0" tIns="0" rIns="0" bIns="0" rtlCol="0" anchor="ctr">
+            <a:normAutofit/>
+          </a:bodyPr>
+          <a:lstStyle/>
+          <a:p>
+            <a:pPr algn="ctr" indent="0" marL="0">
+              <a:buNone/>
+            </a:pPr>
+            <a:r>
+              <a:rPr lang="en-US" sz="3600" b="1" dirty="0">
+                <a:solidFill>
+                  <a:srgbClr val="990011"/>
+                </a:solidFill>
+                <a:latin typeface="Times New Roman" pitchFamily="34" charset="0"/>
+                <a:ea typeface="Times New Roman" pitchFamily="34" charset="-122"/>
+                <a:cs typeface="Times New Roman" pitchFamily="34" charset="-120"/>
+              </a:rPr>
+              <a:t>1. Concept of Population Density</a:t>
+            </a:r>
+            <a:endParaRPr lang="en-US" sz="3600" dirty="0"/>
+          </a:p>
+        </p:txBody>
+      </p:sp>
+      <p:sp>
+        <p:nvSpPr>
+          <p:cNvPr id="4" name="Text 2"/>
+          <p:cNvSpPr/>
+          <p:nvPr/>
+        </p:nvSpPr>
+        <p:spPr>
+          <a:xfrm>
+            <a:off x="365760" y="1783080"/>
+            <a:ext cx="4846320" cy="4617720"/>
+          </a:xfrm>
+          <a:prstGeom prst="rect">
+            <a:avLst/>
+          </a:prstGeom>
+          <a:noFill/>
+          <a:ln/>
+        </p:spPr>
+        <p:txBody>
+          <a:bodyPr wrap="square" lIns="0" tIns="0" rIns="0" bIns="0" rtlCol="0" anchor="t"/>
+          <a:lstStyle/>
+          <a:p>
+            <a:pPr algn="l" indent="0" marL="0">
+              <a:spcAft>
+                <a:spcPts val="800"/>
+              </a:spcAft>
+              <a:buNone/>
+            </a:pPr>
+            <a:r>
+              <a:rPr lang="en-US" sz="3600" i="1" dirty="0">
+                <a:solidFill>
+                  <a:srgbClr val="111111"/>
+                </a:solidFill>
+                <a:latin typeface="Times New Roman" pitchFamily="34" charset="0"/>
+                <a:ea typeface="Times New Roman" pitchFamily="34" charset="-122"/>
+                <a:cs typeface="Times New Roman" pitchFamily="34" charset="-120"/>
+              </a:rPr>
+              <a:t>Population density is understood as follows:</a:t>
+            </a:r>
+            <a:endParaRPr lang="en-US" sz="3600" dirty="0"/>
+          </a:p>
+          <a:p>
+            <a:pPr algn="l" indent="0" marL="0">
+              <a:spcAft>
+                <a:spcPts val="800"/>
+              </a:spcAft>
+              <a:buNone/>
+            </a:pPr>
+            <a:r>
+              <a:rPr lang="en-US" sz="3600" b="1" dirty="0">
+                <a:solidFill>
+                  <a:srgbClr val="111111"/>
+                </a:solidFill>
+                <a:latin typeface="Times New Roman" pitchFamily="34" charset="0"/>
+                <a:ea typeface="Times New Roman" pitchFamily="34" charset="-122"/>
+                <a:cs typeface="Times New Roman" pitchFamily="34" charset="-120"/>
+              </a:rPr>
+              <a:t>Formula: </a:t>
+            </a:r>
+            <a:pPr algn="l" indent="0" marL="0">
+              <a:spcAft>
+                <a:spcPts val="800"/>
+              </a:spcAft>
+              <a:buNone/>
+            </a:pPr>
+            <a:r>
+              <a:rPr lang="en-US" sz="3600" dirty="0">
+                <a:solidFill>
+                  <a:srgbClr val="111111"/>
+                </a:solidFill>
+                <a:latin typeface="Times New Roman" pitchFamily="34" charset="0"/>
+                <a:ea typeface="Times New Roman" pitchFamily="34" charset="-122"/>
+                <a:cs typeface="Times New Roman" pitchFamily="34" charset="-120"/>
+              </a:rPr>
+              <a:t>Density = population ÷ area, in people per km².</a:t>
+            </a:r>
+            <a:endParaRPr lang="en-US" sz="3600" dirty="0"/>
+          </a:p>
+        </p:txBody>
+      </p:sp>
       <p:pic>
         <p:nvPicPr>
-          <p:cNvPr id="3" name="Image 0" descr="/home/claude/f4/img/minesec_sheet.png">    </p:cNvPr>
+          <p:cNvPr id="5" name="Image 0" descr="/home/claude/f4/img/v2/density_types_big.png">    </p:cNvPr>
           <p:cNvPicPr>
             <a:picLocks noChangeAspect="1"/>
           </p:cNvPicPr>
@@ -13718,8 +14283,8 @@
         </p:blipFill>
         <p:spPr>
           <a:xfrm>
-            <a:off x="0" y="658368"/>
-            <a:ext cx="1463040" cy="5833872"/>
+            <a:off x="5349240" y="2617506"/>
+            <a:ext cx="6659575" cy="2601397"/>
           </a:xfrm>
           <a:prstGeom prst="rect">
             <a:avLst/>
@@ -13728,14 +14293,14 @@
       </p:pic>
       <p:sp>
         <p:nvSpPr>
-          <p:cNvPr id="4" name="Text 1"/>
+          <p:cNvPr id="6" name="Text 3"/>
           <p:cNvSpPr/>
           <p:nvPr/>
         </p:nvSpPr>
         <p:spPr>
           <a:xfrm>
-            <a:off x="1691640" y="1005840"/>
-            <a:ext cx="10180015" cy="731520"/>
+            <a:off x="5349240" y="6089904"/>
+            <a:ext cx="6659575" cy="347472"/>
           </a:xfrm>
           <a:prstGeom prst="rect">
             <a:avLst/>
@@ -13744,142 +14309,24 @@
           <a:ln/>
         </p:spPr>
         <p:txBody>
-          <a:bodyPr wrap="square" lIns="0" tIns="0" rIns="0" bIns="0" rtlCol="0" anchor="ctr">
-            <a:normAutofit/>
-          </a:bodyPr>
+          <a:bodyPr wrap="square" lIns="0" tIns="0" rIns="0" bIns="0" rtlCol="0" anchor="ctr"/>
           <a:lstStyle/>
           <a:p>
             <a:pPr algn="ctr" indent="0" marL="0">
               <a:buNone/>
             </a:pPr>
             <a:r>
-              <a:rPr lang="en-US" sz="3600" b="1" dirty="0">
-                <a:solidFill>
-                  <a:srgbClr val="990011"/>
+              <a:rPr lang="en-US" sz="1600" i="1" dirty="0">
+                <a:solidFill>
+                  <a:srgbClr val="555555"/>
                 </a:solidFill>
                 <a:latin typeface="Times New Roman" pitchFamily="34" charset="0"/>
                 <a:ea typeface="Times New Roman" pitchFamily="34" charset="-122"/>
                 <a:cs typeface="Times New Roman" pitchFamily="34" charset="-120"/>
               </a:rPr>
-              <a:t>1. Spatial Distribution</a:t>
-            </a:r>
-            <a:endParaRPr lang="en-US" sz="3600" dirty="0"/>
-          </a:p>
-        </p:txBody>
-      </p:sp>
-      <p:sp>
-        <p:nvSpPr>
-          <p:cNvPr id="5" name="Text 2"/>
-          <p:cNvSpPr/>
-          <p:nvPr/>
-        </p:nvSpPr>
-        <p:spPr>
-          <a:xfrm>
-            <a:off x="1691640" y="1783080"/>
-            <a:ext cx="10180015" cy="4663440"/>
-          </a:xfrm>
-          <a:prstGeom prst="rect">
-            <a:avLst/>
-          </a:prstGeom>
-          <a:noFill/>
-          <a:ln/>
-        </p:spPr>
-        <p:txBody>
-          <a:bodyPr wrap="square" lIns="0" tIns="0" rIns="0" bIns="0" rtlCol="0" anchor="t"/>
-          <a:lstStyle/>
-          <a:p>
-            <a:pPr algn="l" indent="0" marL="0">
-              <a:spcAft>
-                <a:spcPts val="800"/>
-              </a:spcAft>
-              <a:buNone/>
-            </a:pPr>
-            <a:r>
-              <a:rPr lang="en-US" sz="4000" i="1" dirty="0">
-                <a:solidFill>
-                  <a:srgbClr val="111111"/>
-                </a:solidFill>
-                <a:latin typeface="Times New Roman" pitchFamily="34" charset="0"/>
-                <a:ea typeface="Times New Roman" pitchFamily="34" charset="-122"/>
-                <a:cs typeface="Times New Roman" pitchFamily="34" charset="-120"/>
-              </a:rPr>
-              <a:t>The world population is distributed as follows:</a:t>
-            </a:r>
-            <a:endParaRPr lang="en-US" sz="4000" dirty="0"/>
-          </a:p>
-          <a:p>
-            <a:pPr algn="l" indent="0" marL="0">
-              <a:spcAft>
-                <a:spcPts val="800"/>
-              </a:spcAft>
-              <a:buNone/>
-            </a:pPr>
-            <a:r>
-              <a:rPr lang="en-US" sz="4000" b="1" dirty="0">
-                <a:solidFill>
-                  <a:srgbClr val="111111"/>
-                </a:solidFill>
-                <a:latin typeface="Times New Roman" pitchFamily="34" charset="0"/>
-                <a:ea typeface="Times New Roman" pitchFamily="34" charset="-122"/>
-                <a:cs typeface="Times New Roman" pitchFamily="34" charset="-120"/>
-              </a:rPr>
-              <a:t>Dense areas: </a:t>
-            </a:r>
-            <a:pPr algn="l" indent="0" marL="0">
-              <a:spcAft>
-                <a:spcPts val="800"/>
-              </a:spcAft>
-              <a:buNone/>
-            </a:pPr>
-            <a:r>
-              <a:rPr lang="en-US" sz="4000" dirty="0">
-                <a:solidFill>
-                  <a:srgbClr val="111111"/>
-                </a:solidFill>
-                <a:latin typeface="Times New Roman" pitchFamily="34" charset="0"/>
-                <a:ea typeface="Times New Roman" pitchFamily="34" charset="-122"/>
-                <a:cs typeface="Times New Roman" pitchFamily="34" charset="-120"/>
-              </a:rPr>
-              <a:t>East Asia, South Asia, Europe and West Africa have many people per km².</a:t>
-            </a:r>
-            <a:endParaRPr lang="en-US" sz="4000" dirty="0"/>
-          </a:p>
-          <a:p>
-            <a:pPr algn="l" indent="0" marL="0">
-              <a:spcAft>
-                <a:spcPts val="800"/>
-              </a:spcAft>
-              <a:buNone/>
-            </a:pPr>
-            <a:r>
-              <a:rPr lang="en-US" sz="4000" b="1" dirty="0">
-                <a:solidFill>
-                  <a:srgbClr val="111111"/>
-                </a:solidFill>
-                <a:latin typeface="Times New Roman" pitchFamily="34" charset="0"/>
-                <a:ea typeface="Times New Roman" pitchFamily="34" charset="-122"/>
-                <a:cs typeface="Times New Roman" pitchFamily="34" charset="-120"/>
-              </a:rPr>
-              <a:t>Sparse areas: </a:t>
-            </a:r>
-            <a:pPr algn="l" indent="0" marL="0">
-              <a:spcAft>
-                <a:spcPts val="800"/>
-              </a:spcAft>
-              <a:buNone/>
-            </a:pPr>
-            <a:r>
-              <a:rPr lang="en-US" sz="4000" dirty="0">
-                <a:solidFill>
-                  <a:srgbClr val="111111"/>
-                </a:solidFill>
-                <a:latin typeface="Times New Roman" pitchFamily="34" charset="0"/>
-                <a:ea typeface="Times New Roman" pitchFamily="34" charset="-122"/>
-                <a:cs typeface="Times New Roman" pitchFamily="34" charset="-120"/>
-              </a:rPr>
-              <a:t>Deserts, polar lands, high mountains and thick forests have very few people.</a:t>
-            </a:r>
-            <a:endParaRPr lang="en-US" sz="4000" dirty="0"/>
+              <a:t>Illustration: population density</a:t>
+            </a:r>
+            <a:endParaRPr lang="en-US" sz="1600" dirty="0"/>
           </a:p>
         </p:txBody>
       </p:sp>
@@ -13995,48 +14442,9 @@
           </a:p>
         </p:txBody>
       </p:sp>
-      <p:sp>
-        <p:nvSpPr>
-          <p:cNvPr id="3" name="Text 1"/>
-          <p:cNvSpPr/>
-          <p:nvPr/>
-        </p:nvSpPr>
-        <p:spPr>
-          <a:xfrm>
-            <a:off x="457200" y="1005840"/>
-            <a:ext cx="11277295" cy="731520"/>
-          </a:xfrm>
-          <a:prstGeom prst="rect">
-            <a:avLst/>
-          </a:prstGeom>
-          <a:noFill/>
-          <a:ln/>
-        </p:spPr>
-        <p:txBody>
-          <a:bodyPr wrap="square" lIns="0" tIns="0" rIns="0" bIns="0" rtlCol="0" anchor="ctr"/>
-          <a:lstStyle/>
-          <a:p>
-            <a:pPr algn="ctr" indent="0" marL="0">
-              <a:buNone/>
-            </a:pPr>
-            <a:r>
-              <a:rPr lang="en-US" sz="3600" b="1" dirty="0">
-                <a:solidFill>
-                  <a:srgbClr val="990011"/>
-                </a:solidFill>
-                <a:latin typeface="Times New Roman" pitchFamily="34" charset="0"/>
-                <a:ea typeface="Times New Roman" pitchFamily="34" charset="-122"/>
-                <a:cs typeface="Times New Roman" pitchFamily="34" charset="-120"/>
-              </a:rPr>
-              <a:t>1. Spatial Distribution</a:t>
-            </a:r>
-            <a:endParaRPr lang="en-US" sz="3600" dirty="0"/>
-          </a:p>
-        </p:txBody>
-      </p:sp>
       <p:pic>
         <p:nvPicPr>
-          <p:cNvPr id="4" name="Image 0" descr="/home/claude/f4/img/v2/world_density_big.png">    </p:cNvPr>
+          <p:cNvPr id="3" name="Image 0" descr="/home/claude/f4/img/minesec_sheet.png">    </p:cNvPr>
           <p:cNvPicPr>
             <a:picLocks noChangeAspect="1"/>
           </p:cNvPicPr>
@@ -14050,8 +14458,8 @@
         </p:blipFill>
         <p:spPr>
           <a:xfrm>
-            <a:off x="1825600" y="1783080"/>
-            <a:ext cx="8540496" cy="4270248"/>
+            <a:off x="0" y="658368"/>
+            <a:ext cx="5120640" cy="5833872"/>
           </a:xfrm>
           <a:prstGeom prst="rect">
             <a:avLst/>
@@ -14060,14 +14468,14 @@
       </p:pic>
       <p:sp>
         <p:nvSpPr>
-          <p:cNvPr id="5" name="Text 2"/>
+          <p:cNvPr id="4" name="Text 1"/>
           <p:cNvSpPr/>
           <p:nvPr/>
         </p:nvSpPr>
         <p:spPr>
           <a:xfrm>
-            <a:off x="457200" y="6089904"/>
-            <a:ext cx="11277295" cy="347472"/>
+            <a:off x="5349240" y="1005840"/>
+            <a:ext cx="6522415" cy="731520"/>
           </a:xfrm>
           <a:prstGeom prst="rect">
             <a:avLst/>
@@ -14076,24 +14484,122 @@
           <a:ln/>
         </p:spPr>
         <p:txBody>
-          <a:bodyPr wrap="square" lIns="0" tIns="0" rIns="0" bIns="0" rtlCol="0" anchor="ctr"/>
+          <a:bodyPr wrap="square" lIns="0" tIns="0" rIns="0" bIns="0" rtlCol="0" anchor="ctr">
+            <a:normAutofit/>
+          </a:bodyPr>
           <a:lstStyle/>
           <a:p>
             <a:pPr algn="ctr" indent="0" marL="0">
               <a:buNone/>
             </a:pPr>
             <a:r>
-              <a:rPr lang="en-US" sz="1800" i="1" dirty="0">
-                <a:solidFill>
-                  <a:srgbClr val="555555"/>
+              <a:rPr lang="en-US" sz="3600" b="1" dirty="0">
+                <a:solidFill>
+                  <a:srgbClr val="990011"/>
                 </a:solidFill>
                 <a:latin typeface="Times New Roman" pitchFamily="34" charset="0"/>
                 <a:ea typeface="Times New Roman" pitchFamily="34" charset="-122"/>
                 <a:cs typeface="Times New Roman" pitchFamily="34" charset="-120"/>
               </a:rPr>
-              <a:t>Illustration: dense and sparse areas of the world</a:t>
-            </a:r>
-            <a:endParaRPr lang="en-US" sz="1800" dirty="0"/>
+              <a:t>1. Concept of Population Density</a:t>
+            </a:r>
+            <a:endParaRPr lang="en-US" sz="3600" dirty="0"/>
+          </a:p>
+        </p:txBody>
+      </p:sp>
+      <p:sp>
+        <p:nvSpPr>
+          <p:cNvPr id="5" name="Text 2"/>
+          <p:cNvSpPr/>
+          <p:nvPr/>
+        </p:nvSpPr>
+        <p:spPr>
+          <a:xfrm>
+            <a:off x="5349240" y="1783080"/>
+            <a:ext cx="6522415" cy="4663440"/>
+          </a:xfrm>
+          <a:prstGeom prst="rect">
+            <a:avLst/>
+          </a:prstGeom>
+          <a:noFill/>
+          <a:ln/>
+        </p:spPr>
+        <p:txBody>
+          <a:bodyPr wrap="square" lIns="0" tIns="0" rIns="0" bIns="0" rtlCol="0" anchor="t"/>
+          <a:lstStyle/>
+          <a:p>
+            <a:pPr algn="l" indent="0" marL="0">
+              <a:spcAft>
+                <a:spcPts val="800"/>
+              </a:spcAft>
+              <a:buNone/>
+            </a:pPr>
+            <a:r>
+              <a:rPr lang="en-US" sz="4000" b="1" dirty="0">
+                <a:solidFill>
+                  <a:srgbClr val="111111"/>
+                </a:solidFill>
+                <a:latin typeface="Times New Roman" pitchFamily="34" charset="0"/>
+                <a:ea typeface="Times New Roman" pitchFamily="34" charset="-122"/>
+                <a:cs typeface="Times New Roman" pitchFamily="34" charset="-120"/>
+              </a:rPr>
+              <a:t>Example: </a:t>
+            </a:r>
+            <a:pPr algn="l" indent="0" marL="0">
+              <a:spcAft>
+                <a:spcPts val="800"/>
+              </a:spcAft>
+              <a:buNone/>
+            </a:pPr>
+            <a:r>
+              <a:rPr lang="en-US" sz="4000" dirty="0">
+                <a:solidFill>
+                  <a:srgbClr val="111111"/>
+                </a:solidFill>
+                <a:latin typeface="Times New Roman" pitchFamily="34" charset="0"/>
+                <a:ea typeface="Times New Roman" pitchFamily="34" charset="-122"/>
+                <a:cs typeface="Times New Roman" pitchFamily="34" charset="-120"/>
+              </a:rPr>
+              <a:t>Cameroon has about 28,000,000 people on 475,000 km², so its density is about 59 people per km².</a:t>
+            </a:r>
+            <a:endParaRPr lang="en-US" sz="4000" dirty="0"/>
+          </a:p>
+          <a:p>
+            <a:pPr algn="l" indent="0" marL="0">
+              <a:spcAft>
+                <a:spcPts val="800"/>
+              </a:spcAft>
+              <a:buNone/>
+            </a:pPr>
+            <a:r>
+              <a:rPr lang="en-US" sz="4000" b="1" dirty="0">
+                <a:solidFill>
+                  <a:srgbClr val="111111"/>
+                </a:solidFill>
+                <a:latin typeface="Times New Roman" pitchFamily="34" charset="0"/>
+                <a:ea typeface="Times New Roman" pitchFamily="34" charset="-122"/>
+                <a:cs typeface="Times New Roman" pitchFamily="34" charset="-120"/>
+              </a:rPr>
+              <a:t>Levels: </a:t>
+            </a:r>
+            <a:pPr algn="l" indent="0" marL="0">
+              <a:spcAft>
+                <a:spcPts val="800"/>
+              </a:spcAft>
+              <a:buNone/>
+            </a:pPr>
+            <a:r>
+              <a:rPr lang="en-US" sz="4000" dirty="0">
+                <a:solidFill>
+                  <a:srgbClr val="111111"/>
+                </a:solidFill>
+                <a:latin typeface="Times New Roman" pitchFamily="34" charset="0"/>
+                <a:ea typeface="Times New Roman" pitchFamily="34" charset="-122"/>
+                <a:cs typeface="Times New Roman" pitchFamily="34" charset="-120"/>
+              </a:rPr>
+              <a:t>Areas can have a high, moderate or low density.</a:t>
+            </a:r>
+            <a:endParaRPr lang="en-US" sz="4000" dirty="0"/>
           </a:p>
         </p:txBody>
       </p:sp>
@@ -14209,9 +14715,129 @@
           </a:p>
         </p:txBody>
       </p:sp>
+      <p:sp>
+        <p:nvSpPr>
+          <p:cNvPr id="3" name="Text 1"/>
+          <p:cNvSpPr/>
+          <p:nvPr/>
+        </p:nvSpPr>
+        <p:spPr>
+          <a:xfrm>
+            <a:off x="365760" y="1005840"/>
+            <a:ext cx="11460175" cy="731520"/>
+          </a:xfrm>
+          <a:prstGeom prst="rect">
+            <a:avLst/>
+          </a:prstGeom>
+          <a:noFill/>
+          <a:ln/>
+        </p:spPr>
+        <p:txBody>
+          <a:bodyPr wrap="square" lIns="0" tIns="0" rIns="0" bIns="0" rtlCol="0" anchor="ctr">
+            <a:normAutofit/>
+          </a:bodyPr>
+          <a:lstStyle/>
+          <a:p>
+            <a:pPr algn="ctr" indent="0" marL="0">
+              <a:buNone/>
+            </a:pPr>
+            <a:r>
+              <a:rPr lang="en-US" sz="3600" b="1" dirty="0">
+                <a:solidFill>
+                  <a:srgbClr val="990011"/>
+                </a:solidFill>
+                <a:latin typeface="Times New Roman" pitchFamily="34" charset="0"/>
+                <a:ea typeface="Times New Roman" pitchFamily="34" charset="-122"/>
+                <a:cs typeface="Times New Roman" pitchFamily="34" charset="-120"/>
+              </a:rPr>
+              <a:t>2. Spatial Distribution</a:t>
+            </a:r>
+            <a:endParaRPr lang="en-US" sz="3600" dirty="0"/>
+          </a:p>
+        </p:txBody>
+      </p:sp>
+      <p:sp>
+        <p:nvSpPr>
+          <p:cNvPr id="4" name="Text 2"/>
+          <p:cNvSpPr/>
+          <p:nvPr/>
+        </p:nvSpPr>
+        <p:spPr>
+          <a:xfrm>
+            <a:off x="365760" y="1783080"/>
+            <a:ext cx="4846320" cy="4617720"/>
+          </a:xfrm>
+          <a:prstGeom prst="rect">
+            <a:avLst/>
+          </a:prstGeom>
+          <a:noFill/>
+          <a:ln/>
+        </p:spPr>
+        <p:txBody>
+          <a:bodyPr wrap="square" lIns="0" tIns="0" rIns="0" bIns="0" rtlCol="0" anchor="t"/>
+          <a:lstStyle/>
+          <a:p>
+            <a:pPr algn="l" indent="0" marL="0">
+              <a:spcAft>
+                <a:spcPts val="800"/>
+              </a:spcAft>
+              <a:buNone/>
+            </a:pPr>
+            <a:r>
+              <a:rPr lang="en-US" sz="3600" i="1" dirty="0">
+                <a:solidFill>
+                  <a:srgbClr val="111111"/>
+                </a:solidFill>
+                <a:latin typeface="Times New Roman" pitchFamily="34" charset="0"/>
+                <a:ea typeface="Times New Roman" pitchFamily="34" charset="-122"/>
+                <a:cs typeface="Times New Roman" pitchFamily="34" charset="-120"/>
+              </a:rPr>
+              <a:t>The world population is distributed as follows:</a:t>
+            </a:r>
+            <a:endParaRPr lang="en-US" sz="3600" dirty="0"/>
+          </a:p>
+          <a:p>
+            <a:pPr algn="l" indent="0" marL="0">
+              <a:spcAft>
+                <a:spcPts val="800"/>
+              </a:spcAft>
+              <a:buNone/>
+            </a:pPr>
+            <a:r>
+              <a:rPr lang="en-US" sz="3600" b="1" dirty="0">
+                <a:solidFill>
+                  <a:srgbClr val="111111"/>
+                </a:solidFill>
+                <a:latin typeface="Times New Roman" pitchFamily="34" charset="0"/>
+                <a:ea typeface="Times New Roman" pitchFamily="34" charset="-122"/>
+                <a:cs typeface="Times New Roman" pitchFamily="34" charset="-120"/>
+              </a:rPr>
+              <a:t>Densely populated areas: </a:t>
+            </a:r>
+            <a:pPr algn="l" indent="0" marL="0">
+              <a:spcAft>
+                <a:spcPts val="800"/>
+              </a:spcAft>
+              <a:buNone/>
+            </a:pPr>
+            <a:r>
+              <a:rPr lang="en-US" sz="3600" dirty="0">
+                <a:solidFill>
+                  <a:srgbClr val="111111"/>
+                </a:solidFill>
+                <a:latin typeface="Times New Roman" pitchFamily="34" charset="0"/>
+                <a:ea typeface="Times New Roman" pitchFamily="34" charset="-122"/>
+                <a:cs typeface="Times New Roman" pitchFamily="34" charset="-120"/>
+              </a:rPr>
+              <a:t>East Asia, South Asia, Western Europe, West Africa and the north-east of the USA are crowded.</a:t>
+            </a:r>
+            <a:endParaRPr lang="en-US" sz="3600" dirty="0"/>
+          </a:p>
+        </p:txBody>
+      </p:sp>
       <p:pic>
         <p:nvPicPr>
-          <p:cNvPr id="3" name="Image 0" descr="/home/claude/f4/img/minesec_sheet.png">    </p:cNvPr>
+          <p:cNvPr id="5" name="Image 0" descr="/home/claude/f4/img/v2/world_density_big.png">    </p:cNvPr>
           <p:cNvPicPr>
             <a:picLocks noChangeAspect="1"/>
           </p:cNvPicPr>
@@ -14225,8 +14851,8 @@
         </p:blipFill>
         <p:spPr>
           <a:xfrm>
-            <a:off x="0" y="658368"/>
-            <a:ext cx="1463040" cy="5833872"/>
+            <a:off x="5349240" y="2253310"/>
+            <a:ext cx="6659575" cy="3329788"/>
           </a:xfrm>
           <a:prstGeom prst="rect">
             <a:avLst/>
@@ -14235,14 +14861,14 @@
       </p:pic>
       <p:sp>
         <p:nvSpPr>
-          <p:cNvPr id="4" name="Text 1"/>
+          <p:cNvPr id="6" name="Text 3"/>
           <p:cNvSpPr/>
           <p:nvPr/>
         </p:nvSpPr>
         <p:spPr>
           <a:xfrm>
-            <a:off x="1691640" y="1005840"/>
-            <a:ext cx="10180015" cy="731520"/>
+            <a:off x="5349240" y="6089904"/>
+            <a:ext cx="6659575" cy="347472"/>
           </a:xfrm>
           <a:prstGeom prst="rect">
             <a:avLst/>
@@ -14251,142 +14877,24 @@
           <a:ln/>
         </p:spPr>
         <p:txBody>
-          <a:bodyPr wrap="square" lIns="0" tIns="0" rIns="0" bIns="0" rtlCol="0" anchor="ctr">
-            <a:normAutofit/>
-          </a:bodyPr>
+          <a:bodyPr wrap="square" lIns="0" tIns="0" rIns="0" bIns="0" rtlCol="0" anchor="ctr"/>
           <a:lstStyle/>
           <a:p>
             <a:pPr algn="ctr" indent="0" marL="0">
               <a:buNone/>
             </a:pPr>
             <a:r>
-              <a:rPr lang="en-US" sz="3600" b="1" dirty="0">
-                <a:solidFill>
-                  <a:srgbClr val="990011"/>
+              <a:rPr lang="en-US" sz="1600" i="1" dirty="0">
+                <a:solidFill>
+                  <a:srgbClr val="555555"/>
                 </a:solidFill>
                 <a:latin typeface="Times New Roman" pitchFamily="34" charset="0"/>
                 <a:ea typeface="Times New Roman" pitchFamily="34" charset="-122"/>
                 <a:cs typeface="Times New Roman" pitchFamily="34" charset="-120"/>
               </a:rPr>
-              <a:t>2. Factors of Uneven Distribution</a:t>
-            </a:r>
-            <a:endParaRPr lang="en-US" sz="3600" dirty="0"/>
-          </a:p>
-        </p:txBody>
-      </p:sp>
-      <p:sp>
-        <p:nvSpPr>
-          <p:cNvPr id="5" name="Text 2"/>
-          <p:cNvSpPr/>
-          <p:nvPr/>
-        </p:nvSpPr>
-        <p:spPr>
-          <a:xfrm>
-            <a:off x="1691640" y="1783080"/>
-            <a:ext cx="10180015" cy="4663440"/>
-          </a:xfrm>
-          <a:prstGeom prst="rect">
-            <a:avLst/>
-          </a:prstGeom>
-          <a:noFill/>
-          <a:ln/>
-        </p:spPr>
-        <p:txBody>
-          <a:bodyPr wrap="square" lIns="0" tIns="0" rIns="0" bIns="0" rtlCol="0" anchor="t"/>
-          <a:lstStyle/>
-          <a:p>
-            <a:pPr algn="l" indent="0" marL="0">
-              <a:spcAft>
-                <a:spcPts val="800"/>
-              </a:spcAft>
-              <a:buNone/>
-            </a:pPr>
-            <a:r>
-              <a:rPr lang="en-US" sz="4000" i="1" dirty="0">
-                <a:solidFill>
-                  <a:srgbClr val="111111"/>
-                </a:solidFill>
-                <a:latin typeface="Times New Roman" pitchFamily="34" charset="0"/>
-                <a:ea typeface="Times New Roman" pitchFamily="34" charset="-122"/>
-                <a:cs typeface="Times New Roman" pitchFamily="34" charset="-120"/>
-              </a:rPr>
-              <a:t>The distribution depends on the following factors:</a:t>
-            </a:r>
-            <a:endParaRPr lang="en-US" sz="4000" dirty="0"/>
-          </a:p>
-          <a:p>
-            <a:pPr algn="l" indent="0" marL="0">
-              <a:spcAft>
-                <a:spcPts val="800"/>
-              </a:spcAft>
-              <a:buNone/>
-            </a:pPr>
-            <a:r>
-              <a:rPr lang="en-US" sz="4000" b="1" dirty="0">
-                <a:solidFill>
-                  <a:srgbClr val="111111"/>
-                </a:solidFill>
-                <a:latin typeface="Times New Roman" pitchFamily="34" charset="0"/>
-                <a:ea typeface="Times New Roman" pitchFamily="34" charset="-122"/>
-                <a:cs typeface="Times New Roman" pitchFamily="34" charset="-120"/>
-              </a:rPr>
-              <a:t>Physical factors: </a:t>
-            </a:r>
-            <a:pPr algn="l" indent="0" marL="0">
-              <a:spcAft>
-                <a:spcPts val="800"/>
-              </a:spcAft>
-              <a:buNone/>
-            </a:pPr>
-            <a:r>
-              <a:rPr lang="en-US" sz="4000" dirty="0">
-                <a:solidFill>
-                  <a:srgbClr val="111111"/>
-                </a:solidFill>
-                <a:latin typeface="Times New Roman" pitchFamily="34" charset="0"/>
-                <a:ea typeface="Times New Roman" pitchFamily="34" charset="-122"/>
-                <a:cs typeface="Times New Roman" pitchFamily="34" charset="-120"/>
-              </a:rPr>
-              <a:t>Fertile soils, a good climate, water and flat land attract people.</a:t>
-            </a:r>
-            <a:endParaRPr lang="en-US" sz="4000" dirty="0"/>
-          </a:p>
-          <a:p>
-            <a:pPr algn="l" indent="0" marL="0">
-              <a:spcAft>
-                <a:spcPts val="800"/>
-              </a:spcAft>
-              <a:buNone/>
-            </a:pPr>
-            <a:r>
-              <a:rPr lang="en-US" sz="4000" b="1" dirty="0">
-                <a:solidFill>
-                  <a:srgbClr val="111111"/>
-                </a:solidFill>
-                <a:latin typeface="Times New Roman" pitchFamily="34" charset="0"/>
-                <a:ea typeface="Times New Roman" pitchFamily="34" charset="-122"/>
-                <a:cs typeface="Times New Roman" pitchFamily="34" charset="-120"/>
-              </a:rPr>
-              <a:t>Unfavourable conditions: </a:t>
-            </a:r>
-            <a:pPr algn="l" indent="0" marL="0">
-              <a:spcAft>
-                <a:spcPts val="800"/>
-              </a:spcAft>
-              <a:buNone/>
-            </a:pPr>
-            <a:r>
-              <a:rPr lang="en-US" sz="4000" dirty="0">
-                <a:solidFill>
-                  <a:srgbClr val="111111"/>
-                </a:solidFill>
-                <a:latin typeface="Times New Roman" pitchFamily="34" charset="0"/>
-                <a:ea typeface="Times New Roman" pitchFamily="34" charset="-122"/>
-                <a:cs typeface="Times New Roman" pitchFamily="34" charset="-120"/>
-              </a:rPr>
-              <a:t>Too much cold, heat, dryness or steep slopes keep people away.</a:t>
-            </a:r>
-            <a:endParaRPr lang="en-US" sz="4000" dirty="0"/>
+              <a:t>Illustration: dense and sparse areas of the world</a:t>
+            </a:r>
+            <a:endParaRPr lang="en-US" sz="1600" dirty="0"/>
           </a:p>
         </p:txBody>
       </p:sp>
@@ -14502,9 +15010,109 @@
           </a:p>
         </p:txBody>
       </p:sp>
+      <p:sp>
+        <p:nvSpPr>
+          <p:cNvPr id="3" name="Text 1"/>
+          <p:cNvSpPr/>
+          <p:nvPr/>
+        </p:nvSpPr>
+        <p:spPr>
+          <a:xfrm>
+            <a:off x="365760" y="1005840"/>
+            <a:ext cx="11460175" cy="731520"/>
+          </a:xfrm>
+          <a:prstGeom prst="rect">
+            <a:avLst/>
+          </a:prstGeom>
+          <a:noFill/>
+          <a:ln/>
+        </p:spPr>
+        <p:txBody>
+          <a:bodyPr wrap="square" lIns="0" tIns="0" rIns="0" bIns="0" rtlCol="0" anchor="ctr">
+            <a:normAutofit/>
+          </a:bodyPr>
+          <a:lstStyle/>
+          <a:p>
+            <a:pPr algn="ctr" indent="0" marL="0">
+              <a:buNone/>
+            </a:pPr>
+            <a:r>
+              <a:rPr lang="en-US" sz="3600" b="1" dirty="0">
+                <a:solidFill>
+                  <a:srgbClr val="990011"/>
+                </a:solidFill>
+                <a:latin typeface="Times New Roman" pitchFamily="34" charset="0"/>
+                <a:ea typeface="Times New Roman" pitchFamily="34" charset="-122"/>
+                <a:cs typeface="Times New Roman" pitchFamily="34" charset="-120"/>
+              </a:rPr>
+              <a:t>2. Spatial Distribution</a:t>
+            </a:r>
+            <a:endParaRPr lang="en-US" sz="3600" dirty="0"/>
+          </a:p>
+        </p:txBody>
+      </p:sp>
+      <p:sp>
+        <p:nvSpPr>
+          <p:cNvPr id="4" name="Text 2"/>
+          <p:cNvSpPr/>
+          <p:nvPr/>
+        </p:nvSpPr>
+        <p:spPr>
+          <a:xfrm>
+            <a:off x="365760" y="1783080"/>
+            <a:ext cx="4846320" cy="4617720"/>
+          </a:xfrm>
+          <a:prstGeom prst="rect">
+            <a:avLst/>
+          </a:prstGeom>
+          <a:noFill/>
+          <a:ln/>
+        </p:spPr>
+        <p:txBody>
+          <a:bodyPr wrap="square" lIns="0" tIns="0" rIns="0" bIns="0" rtlCol="0" anchor="t"/>
+          <a:lstStyle/>
+          <a:p>
+            <a:pPr algn="l" indent="0" marL="0">
+              <a:spcAft>
+                <a:spcPts val="800"/>
+              </a:spcAft>
+              <a:buNone/>
+            </a:pPr>
+            <a:r>
+              <a:rPr lang="en-US" sz="3600" b="1" dirty="0">
+                <a:solidFill>
+                  <a:srgbClr val="111111"/>
+                </a:solidFill>
+                <a:latin typeface="Times New Roman" pitchFamily="34" charset="0"/>
+                <a:ea typeface="Times New Roman" pitchFamily="34" charset="-122"/>
+                <a:cs typeface="Times New Roman" pitchFamily="34" charset="-120"/>
+              </a:rPr>
+              <a:t>Sparsely populated areas: </a:t>
+            </a:r>
+            <a:pPr algn="l" indent="0" marL="0">
+              <a:spcAft>
+                <a:spcPts val="800"/>
+              </a:spcAft>
+              <a:buNone/>
+            </a:pPr>
+            <a:r>
+              <a:rPr lang="en-US" sz="3600" dirty="0">
+                <a:solidFill>
+                  <a:srgbClr val="111111"/>
+                </a:solidFill>
+                <a:latin typeface="Times New Roman" pitchFamily="34" charset="0"/>
+                <a:ea typeface="Times New Roman" pitchFamily="34" charset="-122"/>
+                <a:cs typeface="Times New Roman" pitchFamily="34" charset="-120"/>
+              </a:rPr>
+              <a:t>Hot deserts, polar lands, high mountains and thick forests have very few people.</a:t>
+            </a:r>
+            <a:endParaRPr lang="en-US" sz="3600" dirty="0"/>
+          </a:p>
+        </p:txBody>
+      </p:sp>
       <p:pic>
         <p:nvPicPr>
-          <p:cNvPr id="3" name="Image 0" descr="/home/claude/f4/img/minesec_sheet.png">    </p:cNvPr>
+          <p:cNvPr id="5" name="Image 0" descr="/home/claude/f4/img/v2/f2t_erg.jpg">    </p:cNvPr>
           <p:cNvPicPr>
             <a:picLocks noChangeAspect="1"/>
           </p:cNvPicPr>
@@ -14518,8 +15126,8 @@
         </p:blipFill>
         <p:spPr>
           <a:xfrm>
-            <a:off x="0" y="658368"/>
-            <a:ext cx="5120640" cy="5833872"/>
+            <a:off x="5349240" y="2071212"/>
+            <a:ext cx="6659575" cy="3693983"/>
           </a:xfrm>
           <a:prstGeom prst="rect">
             <a:avLst/>
@@ -14528,14 +15136,14 @@
       </p:pic>
       <p:sp>
         <p:nvSpPr>
-          <p:cNvPr id="4" name="Text 1"/>
+          <p:cNvPr id="6" name="Text 3"/>
           <p:cNvSpPr/>
           <p:nvPr/>
         </p:nvSpPr>
         <p:spPr>
           <a:xfrm>
-            <a:off x="5349240" y="1005840"/>
-            <a:ext cx="6522415" cy="731520"/>
+            <a:off x="5349240" y="6089904"/>
+            <a:ext cx="6659575" cy="347472"/>
           </a:xfrm>
           <a:prstGeom prst="rect">
             <a:avLst/>
@@ -14544,85 +15152,24 @@
           <a:ln/>
         </p:spPr>
         <p:txBody>
-          <a:bodyPr wrap="square" lIns="0" tIns="0" rIns="0" bIns="0" rtlCol="0" anchor="ctr">
-            <a:normAutofit/>
-          </a:bodyPr>
+          <a:bodyPr wrap="square" lIns="0" tIns="0" rIns="0" bIns="0" rtlCol="0" anchor="ctr"/>
           <a:lstStyle/>
           <a:p>
             <a:pPr algn="ctr" indent="0" marL="0">
               <a:buNone/>
             </a:pPr>
             <a:r>
-              <a:rPr lang="en-US" sz="3600" b="1" dirty="0">
-                <a:solidFill>
-                  <a:srgbClr val="990011"/>
+              <a:rPr lang="en-US" sz="1600" i="1" dirty="0">
+                <a:solidFill>
+                  <a:srgbClr val="555555"/>
                 </a:solidFill>
                 <a:latin typeface="Times New Roman" pitchFamily="34" charset="0"/>
                 <a:ea typeface="Times New Roman" pitchFamily="34" charset="-122"/>
                 <a:cs typeface="Times New Roman" pitchFamily="34" charset="-120"/>
               </a:rPr>
-              <a:t>2. Factors of Uneven Distribution (continued)</a:t>
-            </a:r>
-            <a:endParaRPr lang="en-US" sz="3600" dirty="0"/>
-          </a:p>
-        </p:txBody>
-      </p:sp>
-      <p:sp>
-        <p:nvSpPr>
-          <p:cNvPr id="5" name="Text 2"/>
-          <p:cNvSpPr/>
-          <p:nvPr/>
-        </p:nvSpPr>
-        <p:spPr>
-          <a:xfrm>
-            <a:off x="5349240" y="1783080"/>
-            <a:ext cx="6522415" cy="4663440"/>
-          </a:xfrm>
-          <a:prstGeom prst="rect">
-            <a:avLst/>
-          </a:prstGeom>
-          <a:noFill/>
-          <a:ln/>
-        </p:spPr>
-        <p:txBody>
-          <a:bodyPr wrap="square" lIns="0" tIns="0" rIns="0" bIns="0" rtlCol="0" anchor="t"/>
-          <a:lstStyle/>
-          <a:p>
-            <a:pPr algn="l" indent="0" marL="0">
-              <a:spcAft>
-                <a:spcPts val="800"/>
-              </a:spcAft>
-              <a:buNone/>
-            </a:pPr>
-            <a:r>
-              <a:rPr lang="en-US" sz="4000" b="1" dirty="0">
-                <a:solidFill>
-                  <a:srgbClr val="111111"/>
-                </a:solidFill>
-                <a:latin typeface="Times New Roman" pitchFamily="34" charset="0"/>
-                <a:ea typeface="Times New Roman" pitchFamily="34" charset="-122"/>
-                <a:cs typeface="Times New Roman" pitchFamily="34" charset="-120"/>
-              </a:rPr>
-              <a:t>Human factors: </a:t>
-            </a:r>
-            <a:pPr algn="l" indent="0" marL="0">
-              <a:spcAft>
-                <a:spcPts val="800"/>
-              </a:spcAft>
-              <a:buNone/>
-            </a:pPr>
-            <a:r>
-              <a:rPr lang="en-US" sz="4000" dirty="0">
-                <a:solidFill>
-                  <a:srgbClr val="111111"/>
-                </a:solidFill>
-                <a:latin typeface="Times New Roman" pitchFamily="34" charset="0"/>
-                <a:ea typeface="Times New Roman" pitchFamily="34" charset="-122"/>
-                <a:cs typeface="Times New Roman" pitchFamily="34" charset="-120"/>
-              </a:rPr>
-              <a:t>Jobs, industries, towns, roads and security attract people.</a:t>
-            </a:r>
-            <a:endParaRPr lang="en-US" sz="4000" dirty="0"/>
+              <a:t>Illustration: a desert</a:t>
+            </a:r>
+            <a:endParaRPr lang="en-US" sz="1600" dirty="0"/>
           </a:p>
         </p:txBody>
       </p:sp>
@@ -14971,7 +15518,7 @@
                 <a:ea typeface="Calibri" pitchFamily="34" charset="-122"/>
                 <a:cs typeface="Calibri" pitchFamily="34" charset="-120"/>
               </a:rPr>
-              <a:t>FORMATIVE EVALUATION</a:t>
+              <a:t>BOARD SUMMARY</a:t>
             </a:r>
             <a:endParaRPr lang="en-US" sz="1400" dirty="0"/>
           </a:p>
@@ -15036,7 +15583,7 @@
                 <a:ea typeface="Times New Roman" pitchFamily="34" charset="-122"/>
                 <a:cs typeface="Times New Roman" pitchFamily="34" charset="-120"/>
               </a:rPr>
-              <a:t>Evaluation 1</a:t>
+              <a:t>3. Factors of Uneven Distribution</a:t>
             </a:r>
             <a:endParaRPr lang="en-US" sz="3600" dirty="0"/>
           </a:p>
@@ -15070,7 +15617,7 @@
               <a:buNone/>
             </a:pPr>
             <a:r>
-              <a:rPr lang="en-US" sz="4000" dirty="0">
+              <a:rPr lang="en-US" sz="4000" i="1" dirty="0">
                 <a:solidFill>
                   <a:srgbClr val="111111"/>
                 </a:solidFill>
@@ -15078,7 +15625,44 @@
                 <a:ea typeface="Times New Roman" pitchFamily="34" charset="-122"/>
                 <a:cs typeface="Times New Roman" pitchFamily="34" charset="-120"/>
               </a:rPr>
-              <a:t>A region has 300,000 people and 1,000 km². Find its density.</a:t>
+              <a:t>The distribution depends on the following factors:</a:t>
+            </a:r>
+            <a:endParaRPr lang="en-US" sz="4000" dirty="0"/>
+          </a:p>
+          <a:p>
+            <a:pPr algn="l" indent="0" marL="0">
+              <a:spcAft>
+                <a:spcPts val="800"/>
+              </a:spcAft>
+              <a:buNone/>
+            </a:pPr>
+            <a:r>
+              <a:rPr lang="en-US" sz="4000" b="1" dirty="0">
+                <a:solidFill>
+                  <a:srgbClr val="111111"/>
+                </a:solidFill>
+                <a:latin typeface="Times New Roman" pitchFamily="34" charset="0"/>
+                <a:ea typeface="Times New Roman" pitchFamily="34" charset="-122"/>
+                <a:cs typeface="Times New Roman" pitchFamily="34" charset="-120"/>
+              </a:rPr>
+              <a:t>Climate: </a:t>
+            </a:r>
+            <a:pPr algn="l" indent="0" marL="0">
+              <a:spcAft>
+                <a:spcPts val="800"/>
+              </a:spcAft>
+              <a:buNone/>
+            </a:pPr>
+            <a:r>
+              <a:rPr lang="en-US" sz="4000" dirty="0">
+                <a:solidFill>
+                  <a:srgbClr val="111111"/>
+                </a:solidFill>
+                <a:latin typeface="Times New Roman" pitchFamily="34" charset="0"/>
+                <a:ea typeface="Times New Roman" pitchFamily="34" charset="-122"/>
+                <a:cs typeface="Times New Roman" pitchFamily="34" charset="-120"/>
+              </a:rPr>
+              <a:t>A mild climate with enough rain attracts people, while very hot, cold or dry places repel them.</a:t>
             </a:r>
             <a:endParaRPr lang="en-US" sz="4000" dirty="0"/>
           </a:p>
@@ -15190,15 +15774,115 @@
                 <a:ea typeface="Calibri" pitchFamily="34" charset="-122"/>
                 <a:cs typeface="Calibri" pitchFamily="34" charset="-120"/>
               </a:rPr>
-              <a:t>FORMATIVE EVALUATION</a:t>
+              <a:t>BOARD SUMMARY</a:t>
             </a:r>
             <a:endParaRPr lang="en-US" sz="1400" dirty="0"/>
+          </a:p>
+        </p:txBody>
+      </p:sp>
+      <p:sp>
+        <p:nvSpPr>
+          <p:cNvPr id="3" name="Text 1"/>
+          <p:cNvSpPr/>
+          <p:nvPr/>
+        </p:nvSpPr>
+        <p:spPr>
+          <a:xfrm>
+            <a:off x="365760" y="1005840"/>
+            <a:ext cx="11460175" cy="731520"/>
+          </a:xfrm>
+          <a:prstGeom prst="rect">
+            <a:avLst/>
+          </a:prstGeom>
+          <a:noFill/>
+          <a:ln/>
+        </p:spPr>
+        <p:txBody>
+          <a:bodyPr wrap="square" lIns="0" tIns="0" rIns="0" bIns="0" rtlCol="0" anchor="ctr">
+            <a:normAutofit/>
+          </a:bodyPr>
+          <a:lstStyle/>
+          <a:p>
+            <a:pPr algn="ctr" indent="0" marL="0">
+              <a:buNone/>
+            </a:pPr>
+            <a:r>
+              <a:rPr lang="en-US" sz="3600" b="1" dirty="0">
+                <a:solidFill>
+                  <a:srgbClr val="990011"/>
+                </a:solidFill>
+                <a:latin typeface="Times New Roman" pitchFamily="34" charset="0"/>
+                <a:ea typeface="Times New Roman" pitchFamily="34" charset="-122"/>
+                <a:cs typeface="Times New Roman" pitchFamily="34" charset="-120"/>
+              </a:rPr>
+              <a:t>3. Factors of Uneven Distribution</a:t>
+            </a:r>
+            <a:endParaRPr lang="en-US" sz="3600" dirty="0"/>
+          </a:p>
+        </p:txBody>
+      </p:sp>
+      <p:sp>
+        <p:nvSpPr>
+          <p:cNvPr id="4" name="Text 2"/>
+          <p:cNvSpPr/>
+          <p:nvPr/>
+        </p:nvSpPr>
+        <p:spPr>
+          <a:xfrm>
+            <a:off x="365760" y="1783080"/>
+            <a:ext cx="4846320" cy="4617720"/>
+          </a:xfrm>
+          <a:prstGeom prst="rect">
+            <a:avLst/>
+          </a:prstGeom>
+          <a:noFill/>
+          <a:ln/>
+        </p:spPr>
+        <p:txBody>
+          <a:bodyPr wrap="square" lIns="0" tIns="0" rIns="0" bIns="0" rtlCol="0" anchor="t"/>
+          <a:lstStyle/>
+          <a:p>
+            <a:pPr algn="l" indent="0" marL="0">
+              <a:spcAft>
+                <a:spcPts val="800"/>
+              </a:spcAft>
+              <a:buNone/>
+            </a:pPr>
+            <a:r>
+              <a:rPr lang="en-US" sz="3600" b="1" dirty="0">
+                <a:solidFill>
+                  <a:srgbClr val="111111"/>
+                </a:solidFill>
+                <a:latin typeface="Times New Roman" pitchFamily="34" charset="0"/>
+                <a:ea typeface="Times New Roman" pitchFamily="34" charset="-122"/>
+                <a:cs typeface="Times New Roman" pitchFamily="34" charset="-120"/>
+              </a:rPr>
+              <a:t>Relief and soils: </a:t>
+            </a:r>
+            <a:pPr algn="l" indent="0" marL="0">
+              <a:spcAft>
+                <a:spcPts val="800"/>
+              </a:spcAft>
+              <a:buNone/>
+            </a:pPr>
+            <a:r>
+              <a:rPr lang="en-US" sz="3600" dirty="0">
+                <a:solidFill>
+                  <a:srgbClr val="111111"/>
+                </a:solidFill>
+                <a:latin typeface="Times New Roman" pitchFamily="34" charset="0"/>
+                <a:ea typeface="Times New Roman" pitchFamily="34" charset="-122"/>
+                <a:cs typeface="Times New Roman" pitchFamily="34" charset="-120"/>
+              </a:rPr>
+              <a:t>Flat land and fertile soils attract people.</a:t>
+            </a:r>
+            <a:endParaRPr lang="en-US" sz="3600" dirty="0"/>
           </a:p>
         </p:txBody>
       </p:sp>
       <p:pic>
         <p:nvPicPr>
-          <p:cNvPr id="3" name="Image 0" descr="/home/claude/f4/img/minesec_sheet.png">    </p:cNvPr>
+          <p:cNvPr id="5" name="Image 0" descr="/home/claude/f4/img/v2/f2t_rice_field.jpg">    </p:cNvPr>
           <p:cNvPicPr>
             <a:picLocks noChangeAspect="1"/>
           </p:cNvPicPr>
@@ -15212,8 +15896,8 @@
         </p:blipFill>
         <p:spPr>
           <a:xfrm>
-            <a:off x="0" y="658368"/>
-            <a:ext cx="5120640" cy="5833872"/>
+            <a:off x="5349240" y="2071212"/>
+            <a:ext cx="6659575" cy="3693983"/>
           </a:xfrm>
           <a:prstGeom prst="rect">
             <a:avLst/>
@@ -15222,14 +15906,14 @@
       </p:pic>
       <p:sp>
         <p:nvSpPr>
-          <p:cNvPr id="4" name="Text 1"/>
+          <p:cNvPr id="6" name="Text 3"/>
           <p:cNvSpPr/>
           <p:nvPr/>
         </p:nvSpPr>
         <p:spPr>
           <a:xfrm>
-            <a:off x="5349240" y="1005840"/>
-            <a:ext cx="6522415" cy="731520"/>
+            <a:off x="5349240" y="6089904"/>
+            <a:ext cx="6659575" cy="347472"/>
           </a:xfrm>
           <a:prstGeom prst="rect">
             <a:avLst/>
@@ -15238,68 +15922,24 @@
           <a:ln/>
         </p:spPr>
         <p:txBody>
-          <a:bodyPr wrap="square" lIns="0" tIns="0" rIns="0" bIns="0" rtlCol="0" anchor="ctr">
-            <a:normAutofit/>
-          </a:bodyPr>
+          <a:bodyPr wrap="square" lIns="0" tIns="0" rIns="0" bIns="0" rtlCol="0" anchor="ctr"/>
           <a:lstStyle/>
           <a:p>
             <a:pPr algn="ctr" indent="0" marL="0">
               <a:buNone/>
             </a:pPr>
             <a:r>
-              <a:rPr lang="en-US" sz="3600" b="1" dirty="0">
-                <a:solidFill>
-                  <a:srgbClr val="990011"/>
+              <a:rPr lang="en-US" sz="1600" i="1" dirty="0">
+                <a:solidFill>
+                  <a:srgbClr val="555555"/>
                 </a:solidFill>
                 <a:latin typeface="Times New Roman" pitchFamily="34" charset="0"/>
                 <a:ea typeface="Times New Roman" pitchFamily="34" charset="-122"/>
                 <a:cs typeface="Times New Roman" pitchFamily="34" charset="-120"/>
               </a:rPr>
-              <a:t>Expected Answer</a:t>
-            </a:r>
-            <a:endParaRPr lang="en-US" sz="3600" dirty="0"/>
-          </a:p>
-        </p:txBody>
-      </p:sp>
-      <p:sp>
-        <p:nvSpPr>
-          <p:cNvPr id="5" name="Text 2"/>
-          <p:cNvSpPr/>
-          <p:nvPr/>
-        </p:nvSpPr>
-        <p:spPr>
-          <a:xfrm>
-            <a:off x="5349240" y="1783080"/>
-            <a:ext cx="6522415" cy="4663440"/>
-          </a:xfrm>
-          <a:prstGeom prst="rect">
-            <a:avLst/>
-          </a:prstGeom>
-          <a:noFill/>
-          <a:ln/>
-        </p:spPr>
-        <p:txBody>
-          <a:bodyPr wrap="square" lIns="0" tIns="0" rIns="0" bIns="0" rtlCol="0" anchor="t"/>
-          <a:lstStyle/>
-          <a:p>
-            <a:pPr algn="l" indent="0" marL="0">
-              <a:spcAft>
-                <a:spcPts val="800"/>
-              </a:spcAft>
-              <a:buNone/>
-            </a:pPr>
-            <a:r>
-              <a:rPr lang="en-US" sz="4000" dirty="0">
-                <a:solidFill>
-                  <a:srgbClr val="111111"/>
-                </a:solidFill>
-                <a:latin typeface="Times New Roman" pitchFamily="34" charset="0"/>
-                <a:ea typeface="Times New Roman" pitchFamily="34" charset="-122"/>
-                <a:cs typeface="Times New Roman" pitchFamily="34" charset="-120"/>
-              </a:rPr>
-              <a:t>300,000 ÷ 1,000 = 300 people per km².</a:t>
-            </a:r>
-            <a:endParaRPr lang="en-US" sz="4000" dirty="0"/>
+              <a:t>Illustration: a fertile plain</a:t>
+            </a:r>
+            <a:endParaRPr lang="en-US" sz="1600" dirty="0"/>
           </a:p>
         </p:txBody>
       </p:sp>
@@ -15409,7 +16049,7 @@
                 <a:ea typeface="Calibri" pitchFamily="34" charset="-122"/>
                 <a:cs typeface="Calibri" pitchFamily="34" charset="-120"/>
               </a:rPr>
-              <a:t>FORMATIVE EVALUATION</a:t>
+              <a:t>BOARD SUMMARY</a:t>
             </a:r>
             <a:endParaRPr lang="en-US" sz="1400" dirty="0"/>
           </a:p>
@@ -15474,7 +16114,7 @@
                 <a:ea typeface="Times New Roman" pitchFamily="34" charset="-122"/>
                 <a:cs typeface="Times New Roman" pitchFamily="34" charset="-120"/>
               </a:rPr>
-              <a:t>Evaluation 2</a:t>
+              <a:t>3. Factors of Uneven Distribution</a:t>
             </a:r>
             <a:endParaRPr lang="en-US" sz="3600" dirty="0"/>
           </a:p>
@@ -15508,7 +16148,7 @@
               <a:buNone/>
             </a:pPr>
             <a:r>
-              <a:rPr lang="en-US" sz="4000" dirty="0">
+              <a:rPr lang="en-US" sz="4000" b="1" dirty="0">
                 <a:solidFill>
                   <a:srgbClr val="111111"/>
                 </a:solidFill>
@@ -15516,7 +16156,24 @@
                 <a:ea typeface="Times New Roman" pitchFamily="34" charset="-122"/>
                 <a:cs typeface="Times New Roman" pitchFamily="34" charset="-120"/>
               </a:rPr>
-              <a:t>Give two reasons why deserts are sparsely populated.</a:t>
+              <a:t>Water: </a:t>
+            </a:r>
+            <a:pPr algn="l" indent="0" marL="0">
+              <a:spcAft>
+                <a:spcPts val="800"/>
+              </a:spcAft>
+              <a:buNone/>
+            </a:pPr>
+            <a:r>
+              <a:rPr lang="en-US" sz="4000" dirty="0">
+                <a:solidFill>
+                  <a:srgbClr val="111111"/>
+                </a:solidFill>
+                <a:latin typeface="Times New Roman" pitchFamily="34" charset="0"/>
+                <a:ea typeface="Times New Roman" pitchFamily="34" charset="-122"/>
+                <a:cs typeface="Times New Roman" pitchFamily="34" charset="-120"/>
+              </a:rPr>
+              <a:t>People settle near rivers, lakes and coasts.</a:t>
             </a:r>
             <a:endParaRPr lang="en-US" sz="4000" dirty="0"/>
           </a:p>
@@ -15628,15 +16285,115 @@
                 <a:ea typeface="Calibri" pitchFamily="34" charset="-122"/>
                 <a:cs typeface="Calibri" pitchFamily="34" charset="-120"/>
               </a:rPr>
-              <a:t>FORMATIVE EVALUATION</a:t>
+              <a:t>BOARD SUMMARY</a:t>
             </a:r>
             <a:endParaRPr lang="en-US" sz="1400" dirty="0"/>
+          </a:p>
+        </p:txBody>
+      </p:sp>
+      <p:sp>
+        <p:nvSpPr>
+          <p:cNvPr id="3" name="Text 1"/>
+          <p:cNvSpPr/>
+          <p:nvPr/>
+        </p:nvSpPr>
+        <p:spPr>
+          <a:xfrm>
+            <a:off x="365760" y="1005840"/>
+            <a:ext cx="11460175" cy="731520"/>
+          </a:xfrm>
+          <a:prstGeom prst="rect">
+            <a:avLst/>
+          </a:prstGeom>
+          <a:noFill/>
+          <a:ln/>
+        </p:spPr>
+        <p:txBody>
+          <a:bodyPr wrap="square" lIns="0" tIns="0" rIns="0" bIns="0" rtlCol="0" anchor="ctr">
+            <a:normAutofit/>
+          </a:bodyPr>
+          <a:lstStyle/>
+          <a:p>
+            <a:pPr algn="ctr" indent="0" marL="0">
+              <a:buNone/>
+            </a:pPr>
+            <a:r>
+              <a:rPr lang="en-US" sz="3600" b="1" dirty="0">
+                <a:solidFill>
+                  <a:srgbClr val="990011"/>
+                </a:solidFill>
+                <a:latin typeface="Times New Roman" pitchFamily="34" charset="0"/>
+                <a:ea typeface="Times New Roman" pitchFamily="34" charset="-122"/>
+                <a:cs typeface="Times New Roman" pitchFamily="34" charset="-120"/>
+              </a:rPr>
+              <a:t>3. Factors of Uneven Distribution</a:t>
+            </a:r>
+            <a:endParaRPr lang="en-US" sz="3600" dirty="0"/>
+          </a:p>
+        </p:txBody>
+      </p:sp>
+      <p:sp>
+        <p:nvSpPr>
+          <p:cNvPr id="4" name="Text 2"/>
+          <p:cNvSpPr/>
+          <p:nvPr/>
+        </p:nvSpPr>
+        <p:spPr>
+          <a:xfrm>
+            <a:off x="365760" y="1783080"/>
+            <a:ext cx="4846320" cy="4617720"/>
+          </a:xfrm>
+          <a:prstGeom prst="rect">
+            <a:avLst/>
+          </a:prstGeom>
+          <a:noFill/>
+          <a:ln/>
+        </p:spPr>
+        <p:txBody>
+          <a:bodyPr wrap="square" lIns="0" tIns="0" rIns="0" bIns="0" rtlCol="0" anchor="t"/>
+          <a:lstStyle/>
+          <a:p>
+            <a:pPr algn="l" indent="0" marL="0">
+              <a:spcAft>
+                <a:spcPts val="800"/>
+              </a:spcAft>
+              <a:buNone/>
+            </a:pPr>
+            <a:r>
+              <a:rPr lang="en-US" sz="3600" b="1" dirty="0">
+                <a:solidFill>
+                  <a:srgbClr val="111111"/>
+                </a:solidFill>
+                <a:latin typeface="Times New Roman" pitchFamily="34" charset="0"/>
+                <a:ea typeface="Times New Roman" pitchFamily="34" charset="-122"/>
+                <a:cs typeface="Times New Roman" pitchFamily="34" charset="-120"/>
+              </a:rPr>
+              <a:t>Economic factors: </a:t>
+            </a:r>
+            <a:pPr algn="l" indent="0" marL="0">
+              <a:spcAft>
+                <a:spcPts val="800"/>
+              </a:spcAft>
+              <a:buNone/>
+            </a:pPr>
+            <a:r>
+              <a:rPr lang="en-US" sz="3600" dirty="0">
+                <a:solidFill>
+                  <a:srgbClr val="111111"/>
+                </a:solidFill>
+                <a:latin typeface="Times New Roman" pitchFamily="34" charset="0"/>
+                <a:ea typeface="Times New Roman" pitchFamily="34" charset="-122"/>
+                <a:cs typeface="Times New Roman" pitchFamily="34" charset="-120"/>
+              </a:rPr>
+              <a:t>Jobs, industries, ports and mines attract people.</a:t>
+            </a:r>
+            <a:endParaRPr lang="en-US" sz="3600" dirty="0"/>
           </a:p>
         </p:txBody>
       </p:sp>
       <p:pic>
         <p:nvPicPr>
-          <p:cNvPr id="3" name="Image 0" descr="/home/claude/f4/img/minesec_sheet.png">    </p:cNvPr>
+          <p:cNvPr id="5" name="Image 0" descr="/home/claude/f4/img/v2/lsa_douala.jpg">    </p:cNvPr>
           <p:cNvPicPr>
             <a:picLocks noChangeAspect="1"/>
           </p:cNvPicPr>
@@ -15650,8 +16407,8 @@
         </p:blipFill>
         <p:spPr>
           <a:xfrm>
-            <a:off x="0" y="658368"/>
-            <a:ext cx="5120640" cy="5833872"/>
+            <a:off x="5349240" y="2071212"/>
+            <a:ext cx="6659575" cy="3693983"/>
           </a:xfrm>
           <a:prstGeom prst="rect">
             <a:avLst/>
@@ -15660,14 +16417,14 @@
       </p:pic>
       <p:sp>
         <p:nvSpPr>
-          <p:cNvPr id="4" name="Text 1"/>
+          <p:cNvPr id="6" name="Text 3"/>
           <p:cNvSpPr/>
           <p:nvPr/>
         </p:nvSpPr>
         <p:spPr>
           <a:xfrm>
-            <a:off x="5349240" y="1005840"/>
-            <a:ext cx="6522415" cy="731520"/>
+            <a:off x="5349240" y="6089904"/>
+            <a:ext cx="6659575" cy="347472"/>
           </a:xfrm>
           <a:prstGeom prst="rect">
             <a:avLst/>
@@ -15676,68 +16433,24 @@
           <a:ln/>
         </p:spPr>
         <p:txBody>
-          <a:bodyPr wrap="square" lIns="0" tIns="0" rIns="0" bIns="0" rtlCol="0" anchor="ctr">
-            <a:normAutofit/>
-          </a:bodyPr>
+          <a:bodyPr wrap="square" lIns="0" tIns="0" rIns="0" bIns="0" rtlCol="0" anchor="ctr"/>
           <a:lstStyle/>
           <a:p>
             <a:pPr algn="ctr" indent="0" marL="0">
               <a:buNone/>
             </a:pPr>
             <a:r>
-              <a:rPr lang="en-US" sz="3600" b="1" dirty="0">
-                <a:solidFill>
-                  <a:srgbClr val="990011"/>
+              <a:rPr lang="en-US" sz="1600" i="1" dirty="0">
+                <a:solidFill>
+                  <a:srgbClr val="555555"/>
                 </a:solidFill>
                 <a:latin typeface="Times New Roman" pitchFamily="34" charset="0"/>
                 <a:ea typeface="Times New Roman" pitchFamily="34" charset="-122"/>
                 <a:cs typeface="Times New Roman" pitchFamily="34" charset="-120"/>
               </a:rPr>
-              <a:t>Expected Answer</a:t>
-            </a:r>
-            <a:endParaRPr lang="en-US" sz="3600" dirty="0"/>
-          </a:p>
-        </p:txBody>
-      </p:sp>
-      <p:sp>
-        <p:nvSpPr>
-          <p:cNvPr id="5" name="Text 2"/>
-          <p:cNvSpPr/>
-          <p:nvPr/>
-        </p:nvSpPr>
-        <p:spPr>
-          <a:xfrm>
-            <a:off x="5349240" y="1783080"/>
-            <a:ext cx="6522415" cy="4663440"/>
-          </a:xfrm>
-          <a:prstGeom prst="rect">
-            <a:avLst/>
-          </a:prstGeom>
-          <a:noFill/>
-          <a:ln/>
-        </p:spPr>
-        <p:txBody>
-          <a:bodyPr wrap="square" lIns="0" tIns="0" rIns="0" bIns="0" rtlCol="0" anchor="t"/>
-          <a:lstStyle/>
-          <a:p>
-            <a:pPr algn="l" indent="0" marL="0">
-              <a:spcAft>
-                <a:spcPts val="800"/>
-              </a:spcAft>
-              <a:buNone/>
-            </a:pPr>
-            <a:r>
-              <a:rPr lang="en-US" sz="4000" dirty="0">
-                <a:solidFill>
-                  <a:srgbClr val="111111"/>
-                </a:solidFill>
-                <a:latin typeface="Times New Roman" pitchFamily="34" charset="0"/>
-                <a:ea typeface="Times New Roman" pitchFamily="34" charset="-122"/>
-                <a:cs typeface="Times New Roman" pitchFamily="34" charset="-120"/>
-              </a:rPr>
-              <a:t>Lack of water and very hot temperatures.</a:t>
-            </a:r>
-            <a:endParaRPr lang="en-US" sz="4000" dirty="0"/>
+              <a:t>Illustration: Douala, a port and industrial town</a:t>
+            </a:r>
+            <a:endParaRPr lang="en-US" sz="1600" dirty="0"/>
           </a:p>
         </p:txBody>
       </p:sp>
@@ -15847,7 +16560,7 @@
                 <a:ea typeface="Calibri" pitchFamily="34" charset="-122"/>
                 <a:cs typeface="Calibri" pitchFamily="34" charset="-120"/>
               </a:rPr>
-              <a:t>REMEDIATION</a:t>
+              <a:t>BOARD SUMMARY</a:t>
             </a:r>
             <a:endParaRPr lang="en-US" sz="1400" dirty="0"/>
           </a:p>
@@ -15870,7 +16583,7 @@
         <p:spPr>
           <a:xfrm>
             <a:off x="0" y="658368"/>
-            <a:ext cx="3840480" cy="5833872"/>
+            <a:ext cx="5120640" cy="5833872"/>
           </a:xfrm>
           <a:prstGeom prst="rect">
             <a:avLst/>
@@ -15885,8 +16598,8 @@
         </p:nvSpPr>
         <p:spPr>
           <a:xfrm>
-            <a:off x="4069080" y="1005840"/>
-            <a:ext cx="7802575" cy="731520"/>
+            <a:off x="5349240" y="1005840"/>
+            <a:ext cx="6522415" cy="731520"/>
           </a:xfrm>
           <a:prstGeom prst="rect">
             <a:avLst/>
@@ -15912,7 +16625,7 @@
                 <a:ea typeface="Times New Roman" pitchFamily="34" charset="-122"/>
                 <a:cs typeface="Times New Roman" pitchFamily="34" charset="-120"/>
               </a:rPr>
-              <a:t>Remediation</a:t>
+              <a:t>3. Factors of Uneven Distribution</a:t>
             </a:r>
             <a:endParaRPr lang="en-US" sz="3600" dirty="0"/>
           </a:p>
@@ -15926,8 +16639,8 @@
         </p:nvSpPr>
         <p:spPr>
           <a:xfrm>
-            <a:off x="4069080" y="1783080"/>
-            <a:ext cx="7802575" cy="4663440"/>
+            <a:off x="5349240" y="1783080"/>
+            <a:ext cx="6522415" cy="4663440"/>
           </a:xfrm>
           <a:prstGeom prst="rect">
             <a:avLst/>
@@ -15954,18 +16667,13 @@
                 <a:ea typeface="Times New Roman" pitchFamily="34" charset="-122"/>
                 <a:cs typeface="Times New Roman" pitchFamily="34" charset="-120"/>
               </a:rPr>
-              <a:t>Fill in the blanks:</a:t>
-            </a:r>
-            <a:endParaRPr lang="en-US" sz="4000" dirty="0"/>
-          </a:p>
-          <a:p>
-            <a:pPr algn="l" marL="342900" indent="-342900">
+              <a:t>Social and political factors: </a:t>
+            </a:r>
+            <a:pPr algn="l" indent="0" marL="0">
               <a:spcAft>
                 <a:spcPts val="800"/>
               </a:spcAft>
-              <a:buSzPct val="100000"/>
-              <a:buFont typeface="+mj-lt"/>
-              <a:buAutoNum type="arabicPeriod" startAt="1"/>
+              <a:buNone/>
             </a:pPr>
             <a:r>
               <a:rPr lang="en-US" sz="4000" dirty="0">
@@ -15976,51 +16684,7 @@
                 <a:ea typeface="Times New Roman" pitchFamily="34" charset="-122"/>
                 <a:cs typeface="Times New Roman" pitchFamily="34" charset="-120"/>
               </a:rPr>
-              <a:t>Population ÷ area gives population ______.</a:t>
-            </a:r>
-            <a:endParaRPr lang="en-US" sz="4000" dirty="0"/>
-          </a:p>
-          <a:p>
-            <a:pPr algn="l" marL="342900" indent="-342900">
-              <a:spcAft>
-                <a:spcPts val="800"/>
-              </a:spcAft>
-              <a:buSzPct val="100000"/>
-              <a:buFont typeface="+mj-lt"/>
-              <a:buAutoNum type="arabicPeriod" startAt="1"/>
-            </a:pPr>
-            <a:r>
-              <a:rPr lang="en-US" sz="4000" dirty="0">
-                <a:solidFill>
-                  <a:srgbClr val="111111"/>
-                </a:solidFill>
-                <a:latin typeface="Times New Roman" pitchFamily="34" charset="0"/>
-                <a:ea typeface="Times New Roman" pitchFamily="34" charset="-122"/>
-                <a:cs typeface="Times New Roman" pitchFamily="34" charset="-120"/>
-              </a:rPr>
-              <a:t>The Sahara is a ______ populated area.</a:t>
-            </a:r>
-            <a:endParaRPr lang="en-US" sz="4000" dirty="0"/>
-          </a:p>
-          <a:p>
-            <a:pPr algn="l" marL="342900" indent="-342900">
-              <a:spcAft>
-                <a:spcPts val="800"/>
-              </a:spcAft>
-              <a:buSzPct val="100000"/>
-              <a:buFont typeface="+mj-lt"/>
-              <a:buAutoNum type="arabicPeriod" startAt="1"/>
-            </a:pPr>
-            <a:r>
-              <a:rPr lang="en-US" sz="4000" dirty="0">
-                <a:solidFill>
-                  <a:srgbClr val="111111"/>
-                </a:solidFill>
-                <a:latin typeface="Times New Roman" pitchFamily="34" charset="0"/>
-                <a:ea typeface="Times New Roman" pitchFamily="34" charset="-122"/>
-                <a:cs typeface="Times New Roman" pitchFamily="34" charset="-120"/>
-              </a:rPr>
-              <a:t>Fertile soils ______ people.</a:t>
+              <a:t>Services, security and good government attract people.</a:t>
             </a:r>
             <a:endParaRPr lang="en-US" sz="4000" dirty="0"/>
           </a:p>
@@ -16132,7 +16796,7 @@
                 <a:ea typeface="Calibri" pitchFamily="34" charset="-122"/>
                 <a:cs typeface="Calibri" pitchFamily="34" charset="-120"/>
               </a:rPr>
-              <a:t>HOMEWORK</a:t>
+              <a:t>FORMATIVE EVALUATION</a:t>
             </a:r>
             <a:endParaRPr lang="en-US" sz="1400" dirty="0"/>
           </a:p>
@@ -16197,7 +16861,7 @@
                 <a:ea typeface="Times New Roman" pitchFamily="34" charset="-122"/>
                 <a:cs typeface="Times New Roman" pitchFamily="34" charset="-120"/>
               </a:rPr>
-              <a:t>Homework</a:t>
+              <a:t>Evaluation 1</a:t>
             </a:r>
             <a:endParaRPr lang="en-US" sz="3600" dirty="0"/>
           </a:p>
@@ -16239,7 +16903,7 @@
                 <a:ea typeface="Times New Roman" pitchFamily="34" charset="-122"/>
                 <a:cs typeface="Times New Roman" pitchFamily="34" charset="-120"/>
               </a:rPr>
-              <a:t>Find the population and the area of your region and calculate its density.</a:t>
+              <a:t>A region has 300,000 people and 1,000 km². Find its density.</a:t>
             </a:r>
             <a:endParaRPr lang="en-US" sz="4000" dirty="0"/>
           </a:p>
@@ -16351,7 +17015,7 @@
                 <a:ea typeface="Calibri" pitchFamily="34" charset="-122"/>
                 <a:cs typeface="Calibri" pitchFamily="34" charset="-120"/>
               </a:rPr>
-              <a:t>NEXT LESSON</a:t>
+              <a:t>FORMATIVE EVALUATION</a:t>
             </a:r>
             <a:endParaRPr lang="en-US" sz="1400" dirty="0"/>
           </a:p>
@@ -16416,7 +17080,7 @@
                 <a:ea typeface="Times New Roman" pitchFamily="34" charset="-122"/>
                 <a:cs typeface="Times New Roman" pitchFamily="34" charset="-120"/>
               </a:rPr>
-              <a:t>Next Lesson</a:t>
+              <a:t>Expected Answer</a:t>
             </a:r>
             <a:endParaRPr lang="en-US" sz="3600" dirty="0"/>
           </a:p>
@@ -16440,17 +17104,17 @@
           <a:ln/>
         </p:spPr>
         <p:txBody>
-          <a:bodyPr wrap="square" lIns="0" tIns="0" rIns="0" bIns="0" rtlCol="0" anchor="ctr"/>
-          <a:lstStyle/>
-          <a:p>
-            <a:pPr algn="ctr" indent="0" marL="0">
+          <a:bodyPr wrap="square" lIns="0" tIns="0" rIns="0" bIns="0" rtlCol="0" anchor="t"/>
+          <a:lstStyle/>
+          <a:p>
+            <a:pPr algn="l" indent="0" marL="0">
               <a:spcAft>
                 <a:spcPts val="800"/>
               </a:spcAft>
               <a:buNone/>
             </a:pPr>
             <a:r>
-              <a:rPr lang="en-US" sz="4000" b="1" dirty="0">
+              <a:rPr lang="en-US" sz="4000" dirty="0">
                 <a:solidFill>
                   <a:srgbClr val="111111"/>
                 </a:solidFill>
@@ -16458,27 +17122,7 @@
                 <a:ea typeface="Times New Roman" pitchFamily="34" charset="-122"/>
                 <a:cs typeface="Times New Roman" pitchFamily="34" charset="-120"/>
               </a:rPr>
-              <a:t>Our next lesson will be on:</a:t>
-            </a:r>
-            <a:endParaRPr lang="en-US" sz="4000" dirty="0"/>
-          </a:p>
-          <a:p>
-            <a:pPr algn="ctr" indent="0" marL="0">
-              <a:spcAft>
-                <a:spcPts val="800"/>
-              </a:spcAft>
-              <a:buNone/>
-            </a:pPr>
-            <a:r>
-              <a:rPr lang="en-US" sz="4000" b="1" dirty="0">
-                <a:solidFill>
-                  <a:srgbClr val="990011"/>
-                </a:solidFill>
-                <a:latin typeface="Times New Roman" pitchFamily="34" charset="0"/>
-                <a:ea typeface="Times New Roman" pitchFamily="34" charset="-122"/>
-                <a:cs typeface="Times New Roman" pitchFamily="34" charset="-120"/>
-              </a:rPr>
-              <a:t>Practical Work 2: Population Densities in Cameroon</a:t>
+              <a:t>300,000 ÷ 1,000 = 300 people per km².</a:t>
             </a:r>
             <a:endParaRPr lang="en-US" sz="4000" dirty="0"/>
           </a:p>
@@ -16590,6 +17234,1406 @@
                 <a:ea typeface="Calibri" pitchFamily="34" charset="-122"/>
                 <a:cs typeface="Calibri" pitchFamily="34" charset="-120"/>
               </a:rPr>
+              <a:t>FORMATIVE EVALUATION</a:t>
+            </a:r>
+            <a:endParaRPr lang="en-US" sz="1400" dirty="0"/>
+          </a:p>
+        </p:txBody>
+      </p:sp>
+      <p:pic>
+        <p:nvPicPr>
+          <p:cNvPr id="3" name="Image 0" descr="/home/claude/f4/img/minesec_sheet.png">    </p:cNvPr>
+          <p:cNvPicPr>
+            <a:picLocks noChangeAspect="1"/>
+          </p:cNvPicPr>
+          <p:nvPr/>
+        </p:nvPicPr>
+        <p:blipFill>
+          <a:blip r:embed="rId1"/>
+          <a:stretch>
+            <a:fillRect/>
+          </a:stretch>
+        </p:blipFill>
+        <p:spPr>
+          <a:xfrm>
+            <a:off x="0" y="658368"/>
+            <a:ext cx="5120640" cy="5833872"/>
+          </a:xfrm>
+          <a:prstGeom prst="rect">
+            <a:avLst/>
+          </a:prstGeom>
+        </p:spPr>
+      </p:pic>
+      <p:sp>
+        <p:nvSpPr>
+          <p:cNvPr id="4" name="Text 1"/>
+          <p:cNvSpPr/>
+          <p:nvPr/>
+        </p:nvSpPr>
+        <p:spPr>
+          <a:xfrm>
+            <a:off x="5349240" y="1005840"/>
+            <a:ext cx="6522415" cy="731520"/>
+          </a:xfrm>
+          <a:prstGeom prst="rect">
+            <a:avLst/>
+          </a:prstGeom>
+          <a:noFill/>
+          <a:ln/>
+        </p:spPr>
+        <p:txBody>
+          <a:bodyPr wrap="square" lIns="0" tIns="0" rIns="0" bIns="0" rtlCol="0" anchor="ctr">
+            <a:normAutofit/>
+          </a:bodyPr>
+          <a:lstStyle/>
+          <a:p>
+            <a:pPr algn="ctr" indent="0" marL="0">
+              <a:buNone/>
+            </a:pPr>
+            <a:r>
+              <a:rPr lang="en-US" sz="3600" b="1" dirty="0">
+                <a:solidFill>
+                  <a:srgbClr val="990011"/>
+                </a:solidFill>
+                <a:latin typeface="Times New Roman" pitchFamily="34" charset="0"/>
+                <a:ea typeface="Times New Roman" pitchFamily="34" charset="-122"/>
+                <a:cs typeface="Times New Roman" pitchFamily="34" charset="-120"/>
+              </a:rPr>
+              <a:t>Evaluation 2</a:t>
+            </a:r>
+            <a:endParaRPr lang="en-US" sz="3600" dirty="0"/>
+          </a:p>
+        </p:txBody>
+      </p:sp>
+      <p:sp>
+        <p:nvSpPr>
+          <p:cNvPr id="5" name="Text 2"/>
+          <p:cNvSpPr/>
+          <p:nvPr/>
+        </p:nvSpPr>
+        <p:spPr>
+          <a:xfrm>
+            <a:off x="5349240" y="1783080"/>
+            <a:ext cx="6522415" cy="4663440"/>
+          </a:xfrm>
+          <a:prstGeom prst="rect">
+            <a:avLst/>
+          </a:prstGeom>
+          <a:noFill/>
+          <a:ln/>
+        </p:spPr>
+        <p:txBody>
+          <a:bodyPr wrap="square" lIns="0" tIns="0" rIns="0" bIns="0" rtlCol="0" anchor="t"/>
+          <a:lstStyle/>
+          <a:p>
+            <a:pPr algn="l" indent="0" marL="0">
+              <a:spcAft>
+                <a:spcPts val="800"/>
+              </a:spcAft>
+              <a:buNone/>
+            </a:pPr>
+            <a:r>
+              <a:rPr lang="en-US" sz="4000" dirty="0">
+                <a:solidFill>
+                  <a:srgbClr val="111111"/>
+                </a:solidFill>
+                <a:latin typeface="Times New Roman" pitchFamily="34" charset="0"/>
+                <a:ea typeface="Times New Roman" pitchFamily="34" charset="-122"/>
+                <a:cs typeface="Times New Roman" pitchFamily="34" charset="-120"/>
+              </a:rPr>
+              <a:t>Give two reasons why deserts are sparsely populated.</a:t>
+            </a:r>
+            <a:endParaRPr lang="en-US" sz="4000" dirty="0"/>
+          </a:p>
+        </p:txBody>
+      </p:sp>
+      <p:sp>
+        <p:nvSpPr>
+          <p:cNvPr id="25" name="Slide Number Placeholder 0"/>
+          <p:cNvSpPr>
+            <a:spLocks noGrp="1"/>
+          </p:cNvSpPr>
+          <p:nvPr>
+            <p:ph type="sldNum" sz="quarter" idx="4294967295"/>
+          </p:nvPr>
+        </p:nvSpPr>
+        <p:spPr>
+          <a:xfrm>
+            <a:off x="27432" y="91440"/>
+            <a:ext cx="585216" cy="475488"/>
+          </a:xfrm>
+          <a:prstGeom prst="rect">
+            <a:avLst/>
+          </a:prstGeom>
+          <a:extLst>
+            <a:ext uri="{C572A759-6A51-4108-AA02-DFA0A04FC94B}">
+              <ma14:wrappingTextBoxFlag xmlns:ma14="http://schemas.microsoft.com/office/mac/drawingml/2011/main" val="0"/>
+            </a:ext>
+          </a:extLst>
+        </p:spPr>
+        <p:txBody>
+          <a:bodyPr/>
+          <a:lstStyle>
+            <a:lvl1pPr>
+              <a:defRPr sz="2000">
+                <a:solidFill>
+                  <a:srgbClr val="FFFFFF"/>
+                </a:solidFill>
+                <a:latin typeface="Calibri"/>
+                <a:ea typeface="Calibri"/>
+                <a:cs typeface="Calibri"/>
+              </a:defRPr>
+            </a:lvl1pPr>
+          </a:lstStyle>
+          <a:p>
+            <a:pPr algn="ctr"/>
+            <a:fld id="{F7021451-1387-4CA6-816F-3879F97B5CBC}" type="slidenum">
+              <a:rPr b="1" lang="en-US"/>
+              <a:t>47</a:t>
+            </a:fld>
+            <a:endParaRPr lang="en-US"/>
+          </a:p>
+        </p:txBody>
+      </p:sp>
+    </p:spTree>
+  </p:cSld>
+  <p:clrMapOvr>
+    <a:masterClrMapping/>
+  </p:clrMapOvr>
+</p:sld>
+</file>
+
+<file path=ppt/slides/slide48.xml><?xml version="1.0" encoding="utf-8"?>
+<p:sld xmlns:a="http://schemas.openxmlformats.org/drawingml/2006/main" xmlns:r="http://schemas.openxmlformats.org/officeDocument/2006/relationships" xmlns:p="http://schemas.openxmlformats.org/presentationml/2006/main">
+  <p:cSld name="Slide 48">
+    <p:spTree>
+      <p:nvGrpSpPr>
+        <p:cNvPr id="1" name=""/>
+        <p:cNvGrpSpPr/>
+        <p:nvPr/>
+      </p:nvGrpSpPr>
+      <p:grpSpPr>
+        <a:xfrm>
+          <a:off x="0" y="0"/>
+          <a:ext cx="0" cy="0"/>
+          <a:chOff x="0" y="0"/>
+          <a:chExt cx="0" cy="0"/>
+        </a:xfrm>
+      </p:grpSpPr>
+      <p:sp>
+        <p:nvSpPr>
+          <p:cNvPr id="2" name="Text 0"/>
+          <p:cNvSpPr/>
+          <p:nvPr/>
+        </p:nvSpPr>
+        <p:spPr>
+          <a:xfrm>
+            <a:off x="457200" y="713232"/>
+            <a:ext cx="11368735" cy="274320"/>
+          </a:xfrm>
+          <a:prstGeom prst="rect">
+            <a:avLst/>
+          </a:prstGeom>
+          <a:noFill/>
+          <a:ln/>
+        </p:spPr>
+        <p:txBody>
+          <a:bodyPr wrap="square" lIns="0" tIns="0" rIns="0" bIns="0" rtlCol="0" anchor="ctr"/>
+          <a:lstStyle/>
+          <a:p>
+            <a:pPr algn="r" indent="0" marL="0">
+              <a:buNone/>
+            </a:pPr>
+            <a:r>
+              <a:rPr lang="en-US" sz="1400" b="1" dirty="0">
+                <a:solidFill>
+                  <a:srgbClr val="1C3F6E"/>
+                </a:solidFill>
+                <a:latin typeface="Calibri" pitchFamily="34" charset="0"/>
+                <a:ea typeface="Calibri" pitchFamily="34" charset="-122"/>
+                <a:cs typeface="Calibri" pitchFamily="34" charset="-120"/>
+              </a:rPr>
+              <a:t>FORMATIVE EVALUATION</a:t>
+            </a:r>
+            <a:endParaRPr lang="en-US" sz="1400" dirty="0"/>
+          </a:p>
+        </p:txBody>
+      </p:sp>
+      <p:pic>
+        <p:nvPicPr>
+          <p:cNvPr id="3" name="Image 0" descr="/home/claude/f4/img/minesec_sheet.png">    </p:cNvPr>
+          <p:cNvPicPr>
+            <a:picLocks noChangeAspect="1"/>
+          </p:cNvPicPr>
+          <p:nvPr/>
+        </p:nvPicPr>
+        <p:blipFill>
+          <a:blip r:embed="rId1"/>
+          <a:stretch>
+            <a:fillRect/>
+          </a:stretch>
+        </p:blipFill>
+        <p:spPr>
+          <a:xfrm>
+            <a:off x="0" y="658368"/>
+            <a:ext cx="5120640" cy="5833872"/>
+          </a:xfrm>
+          <a:prstGeom prst="rect">
+            <a:avLst/>
+          </a:prstGeom>
+        </p:spPr>
+      </p:pic>
+      <p:sp>
+        <p:nvSpPr>
+          <p:cNvPr id="4" name="Text 1"/>
+          <p:cNvSpPr/>
+          <p:nvPr/>
+        </p:nvSpPr>
+        <p:spPr>
+          <a:xfrm>
+            <a:off x="5349240" y="1005840"/>
+            <a:ext cx="6522415" cy="731520"/>
+          </a:xfrm>
+          <a:prstGeom prst="rect">
+            <a:avLst/>
+          </a:prstGeom>
+          <a:noFill/>
+          <a:ln/>
+        </p:spPr>
+        <p:txBody>
+          <a:bodyPr wrap="square" lIns="0" tIns="0" rIns="0" bIns="0" rtlCol="0" anchor="ctr">
+            <a:normAutofit/>
+          </a:bodyPr>
+          <a:lstStyle/>
+          <a:p>
+            <a:pPr algn="ctr" indent="0" marL="0">
+              <a:buNone/>
+            </a:pPr>
+            <a:r>
+              <a:rPr lang="en-US" sz="3600" b="1" dirty="0">
+                <a:solidFill>
+                  <a:srgbClr val="990011"/>
+                </a:solidFill>
+                <a:latin typeface="Times New Roman" pitchFamily="34" charset="0"/>
+                <a:ea typeface="Times New Roman" pitchFamily="34" charset="-122"/>
+                <a:cs typeface="Times New Roman" pitchFamily="34" charset="-120"/>
+              </a:rPr>
+              <a:t>Expected Answer</a:t>
+            </a:r>
+            <a:endParaRPr lang="en-US" sz="3600" dirty="0"/>
+          </a:p>
+        </p:txBody>
+      </p:sp>
+      <p:sp>
+        <p:nvSpPr>
+          <p:cNvPr id="5" name="Text 2"/>
+          <p:cNvSpPr/>
+          <p:nvPr/>
+        </p:nvSpPr>
+        <p:spPr>
+          <a:xfrm>
+            <a:off x="5349240" y="1783080"/>
+            <a:ext cx="6522415" cy="4663440"/>
+          </a:xfrm>
+          <a:prstGeom prst="rect">
+            <a:avLst/>
+          </a:prstGeom>
+          <a:noFill/>
+          <a:ln/>
+        </p:spPr>
+        <p:txBody>
+          <a:bodyPr wrap="square" lIns="0" tIns="0" rIns="0" bIns="0" rtlCol="0" anchor="t"/>
+          <a:lstStyle/>
+          <a:p>
+            <a:pPr algn="l" indent="0" marL="0">
+              <a:spcAft>
+                <a:spcPts val="800"/>
+              </a:spcAft>
+              <a:buNone/>
+            </a:pPr>
+            <a:r>
+              <a:rPr lang="en-US" sz="4000" dirty="0">
+                <a:solidFill>
+                  <a:srgbClr val="111111"/>
+                </a:solidFill>
+                <a:latin typeface="Times New Roman" pitchFamily="34" charset="0"/>
+                <a:ea typeface="Times New Roman" pitchFamily="34" charset="-122"/>
+                <a:cs typeface="Times New Roman" pitchFamily="34" charset="-120"/>
+              </a:rPr>
+              <a:t>Lack of water and very hot temperatures.</a:t>
+            </a:r>
+            <a:endParaRPr lang="en-US" sz="4000" dirty="0"/>
+          </a:p>
+        </p:txBody>
+      </p:sp>
+      <p:sp>
+        <p:nvSpPr>
+          <p:cNvPr id="25" name="Slide Number Placeholder 0"/>
+          <p:cNvSpPr>
+            <a:spLocks noGrp="1"/>
+          </p:cNvSpPr>
+          <p:nvPr>
+            <p:ph type="sldNum" sz="quarter" idx="4294967295"/>
+          </p:nvPr>
+        </p:nvSpPr>
+        <p:spPr>
+          <a:xfrm>
+            <a:off x="27432" y="91440"/>
+            <a:ext cx="585216" cy="475488"/>
+          </a:xfrm>
+          <a:prstGeom prst="rect">
+            <a:avLst/>
+          </a:prstGeom>
+          <a:extLst>
+            <a:ext uri="{C572A759-6A51-4108-AA02-DFA0A04FC94B}">
+              <ma14:wrappingTextBoxFlag xmlns:ma14="http://schemas.microsoft.com/office/mac/drawingml/2011/main" val="0"/>
+            </a:ext>
+          </a:extLst>
+        </p:spPr>
+        <p:txBody>
+          <a:bodyPr/>
+          <a:lstStyle>
+            <a:lvl1pPr>
+              <a:defRPr sz="2000">
+                <a:solidFill>
+                  <a:srgbClr val="FFFFFF"/>
+                </a:solidFill>
+                <a:latin typeface="Calibri"/>
+                <a:ea typeface="Calibri"/>
+                <a:cs typeface="Calibri"/>
+              </a:defRPr>
+            </a:lvl1pPr>
+          </a:lstStyle>
+          <a:p>
+            <a:pPr algn="ctr"/>
+            <a:fld id="{F7021451-1387-4CA6-816F-3879F97B5CBC}" type="slidenum">
+              <a:rPr b="1" lang="en-US"/>
+              <a:t>48</a:t>
+            </a:fld>
+            <a:endParaRPr lang="en-US"/>
+          </a:p>
+        </p:txBody>
+      </p:sp>
+    </p:spTree>
+  </p:cSld>
+  <p:clrMapOvr>
+    <a:masterClrMapping/>
+  </p:clrMapOvr>
+</p:sld>
+</file>
+
+<file path=ppt/slides/slide49.xml><?xml version="1.0" encoding="utf-8"?>
+<p:sld xmlns:a="http://schemas.openxmlformats.org/drawingml/2006/main" xmlns:r="http://schemas.openxmlformats.org/officeDocument/2006/relationships" xmlns:p="http://schemas.openxmlformats.org/presentationml/2006/main">
+  <p:cSld name="Slide 49">
+    <p:spTree>
+      <p:nvGrpSpPr>
+        <p:cNvPr id="1" name=""/>
+        <p:cNvGrpSpPr/>
+        <p:nvPr/>
+      </p:nvGrpSpPr>
+      <p:grpSpPr>
+        <a:xfrm>
+          <a:off x="0" y="0"/>
+          <a:ext cx="0" cy="0"/>
+          <a:chOff x="0" y="0"/>
+          <a:chExt cx="0" cy="0"/>
+        </a:xfrm>
+      </p:grpSpPr>
+      <p:sp>
+        <p:nvSpPr>
+          <p:cNvPr id="2" name="Text 0"/>
+          <p:cNvSpPr/>
+          <p:nvPr/>
+        </p:nvSpPr>
+        <p:spPr>
+          <a:xfrm>
+            <a:off x="457200" y="713232"/>
+            <a:ext cx="11368735" cy="274320"/>
+          </a:xfrm>
+          <a:prstGeom prst="rect">
+            <a:avLst/>
+          </a:prstGeom>
+          <a:noFill/>
+          <a:ln/>
+        </p:spPr>
+        <p:txBody>
+          <a:bodyPr wrap="square" lIns="0" tIns="0" rIns="0" bIns="0" rtlCol="0" anchor="ctr"/>
+          <a:lstStyle/>
+          <a:p>
+            <a:pPr algn="r" indent="0" marL="0">
+              <a:buNone/>
+            </a:pPr>
+            <a:r>
+              <a:rPr lang="en-US" sz="1400" b="1" dirty="0">
+                <a:solidFill>
+                  <a:srgbClr val="1C3F6E"/>
+                </a:solidFill>
+                <a:latin typeface="Calibri" pitchFamily="34" charset="0"/>
+                <a:ea typeface="Calibri" pitchFamily="34" charset="-122"/>
+                <a:cs typeface="Calibri" pitchFamily="34" charset="-120"/>
+              </a:rPr>
+              <a:t>REMEDIATION</a:t>
+            </a:r>
+            <a:endParaRPr lang="en-US" sz="1400" dirty="0"/>
+          </a:p>
+        </p:txBody>
+      </p:sp>
+      <p:pic>
+        <p:nvPicPr>
+          <p:cNvPr id="3" name="Image 0" descr="/home/claude/f4/img/minesec_sheet.png">    </p:cNvPr>
+          <p:cNvPicPr>
+            <a:picLocks noChangeAspect="1"/>
+          </p:cNvPicPr>
+          <p:nvPr/>
+        </p:nvPicPr>
+        <p:blipFill>
+          <a:blip r:embed="rId1"/>
+          <a:stretch>
+            <a:fillRect/>
+          </a:stretch>
+        </p:blipFill>
+        <p:spPr>
+          <a:xfrm>
+            <a:off x="0" y="658368"/>
+            <a:ext cx="3840480" cy="5833872"/>
+          </a:xfrm>
+          <a:prstGeom prst="rect">
+            <a:avLst/>
+          </a:prstGeom>
+        </p:spPr>
+      </p:pic>
+      <p:sp>
+        <p:nvSpPr>
+          <p:cNvPr id="4" name="Text 1"/>
+          <p:cNvSpPr/>
+          <p:nvPr/>
+        </p:nvSpPr>
+        <p:spPr>
+          <a:xfrm>
+            <a:off x="4069080" y="1005840"/>
+            <a:ext cx="7802575" cy="731520"/>
+          </a:xfrm>
+          <a:prstGeom prst="rect">
+            <a:avLst/>
+          </a:prstGeom>
+          <a:noFill/>
+          <a:ln/>
+        </p:spPr>
+        <p:txBody>
+          <a:bodyPr wrap="square" lIns="0" tIns="0" rIns="0" bIns="0" rtlCol="0" anchor="ctr">
+            <a:normAutofit/>
+          </a:bodyPr>
+          <a:lstStyle/>
+          <a:p>
+            <a:pPr algn="ctr" indent="0" marL="0">
+              <a:buNone/>
+            </a:pPr>
+            <a:r>
+              <a:rPr lang="en-US" sz="3600" b="1" dirty="0">
+                <a:solidFill>
+                  <a:srgbClr val="990011"/>
+                </a:solidFill>
+                <a:latin typeface="Times New Roman" pitchFamily="34" charset="0"/>
+                <a:ea typeface="Times New Roman" pitchFamily="34" charset="-122"/>
+                <a:cs typeface="Times New Roman" pitchFamily="34" charset="-120"/>
+              </a:rPr>
+              <a:t>Remediation</a:t>
+            </a:r>
+            <a:endParaRPr lang="en-US" sz="3600" dirty="0"/>
+          </a:p>
+        </p:txBody>
+      </p:sp>
+      <p:sp>
+        <p:nvSpPr>
+          <p:cNvPr id="5" name="Text 2"/>
+          <p:cNvSpPr/>
+          <p:nvPr/>
+        </p:nvSpPr>
+        <p:spPr>
+          <a:xfrm>
+            <a:off x="4069080" y="1783080"/>
+            <a:ext cx="7802575" cy="4663440"/>
+          </a:xfrm>
+          <a:prstGeom prst="rect">
+            <a:avLst/>
+          </a:prstGeom>
+          <a:noFill/>
+          <a:ln/>
+        </p:spPr>
+        <p:txBody>
+          <a:bodyPr wrap="square" lIns="0" tIns="0" rIns="0" bIns="0" rtlCol="0" anchor="t"/>
+          <a:lstStyle/>
+          <a:p>
+            <a:pPr algn="l" indent="0" marL="0">
+              <a:spcAft>
+                <a:spcPts val="800"/>
+              </a:spcAft>
+              <a:buNone/>
+            </a:pPr>
+            <a:r>
+              <a:rPr lang="en-US" sz="4000" b="1" dirty="0">
+                <a:solidFill>
+                  <a:srgbClr val="111111"/>
+                </a:solidFill>
+                <a:latin typeface="Times New Roman" pitchFamily="34" charset="0"/>
+                <a:ea typeface="Times New Roman" pitchFamily="34" charset="-122"/>
+                <a:cs typeface="Times New Roman" pitchFamily="34" charset="-120"/>
+              </a:rPr>
+              <a:t>Fill in the blanks:</a:t>
+            </a:r>
+            <a:endParaRPr lang="en-US" sz="4000" dirty="0"/>
+          </a:p>
+          <a:p>
+            <a:pPr algn="l" marL="342900" indent="-342900">
+              <a:spcAft>
+                <a:spcPts val="800"/>
+              </a:spcAft>
+              <a:buSzPct val="100000"/>
+              <a:buFont typeface="+mj-lt"/>
+              <a:buAutoNum type="arabicPeriod" startAt="1"/>
+            </a:pPr>
+            <a:r>
+              <a:rPr lang="en-US" sz="4000" dirty="0">
+                <a:solidFill>
+                  <a:srgbClr val="111111"/>
+                </a:solidFill>
+                <a:latin typeface="Times New Roman" pitchFamily="34" charset="0"/>
+                <a:ea typeface="Times New Roman" pitchFamily="34" charset="-122"/>
+                <a:cs typeface="Times New Roman" pitchFamily="34" charset="-120"/>
+              </a:rPr>
+              <a:t>Population ÷ area gives population ______.</a:t>
+            </a:r>
+            <a:endParaRPr lang="en-US" sz="4000" dirty="0"/>
+          </a:p>
+          <a:p>
+            <a:pPr algn="l" marL="342900" indent="-342900">
+              <a:spcAft>
+                <a:spcPts val="800"/>
+              </a:spcAft>
+              <a:buSzPct val="100000"/>
+              <a:buFont typeface="+mj-lt"/>
+              <a:buAutoNum type="arabicPeriod" startAt="1"/>
+            </a:pPr>
+            <a:r>
+              <a:rPr lang="en-US" sz="4000" dirty="0">
+                <a:solidFill>
+                  <a:srgbClr val="111111"/>
+                </a:solidFill>
+                <a:latin typeface="Times New Roman" pitchFamily="34" charset="0"/>
+                <a:ea typeface="Times New Roman" pitchFamily="34" charset="-122"/>
+                <a:cs typeface="Times New Roman" pitchFamily="34" charset="-120"/>
+              </a:rPr>
+              <a:t>The Sahara is a ______ populated area.</a:t>
+            </a:r>
+            <a:endParaRPr lang="en-US" sz="4000" dirty="0"/>
+          </a:p>
+          <a:p>
+            <a:pPr algn="l" marL="342900" indent="-342900">
+              <a:spcAft>
+                <a:spcPts val="800"/>
+              </a:spcAft>
+              <a:buSzPct val="100000"/>
+              <a:buFont typeface="+mj-lt"/>
+              <a:buAutoNum type="arabicPeriod" startAt="1"/>
+            </a:pPr>
+            <a:r>
+              <a:rPr lang="en-US" sz="4000" dirty="0">
+                <a:solidFill>
+                  <a:srgbClr val="111111"/>
+                </a:solidFill>
+                <a:latin typeface="Times New Roman" pitchFamily="34" charset="0"/>
+                <a:ea typeface="Times New Roman" pitchFamily="34" charset="-122"/>
+                <a:cs typeface="Times New Roman" pitchFamily="34" charset="-120"/>
+              </a:rPr>
+              <a:t>Fertile soils ______ people.</a:t>
+            </a:r>
+            <a:endParaRPr lang="en-US" sz="4000" dirty="0"/>
+          </a:p>
+        </p:txBody>
+      </p:sp>
+      <p:sp>
+        <p:nvSpPr>
+          <p:cNvPr id="25" name="Slide Number Placeholder 0"/>
+          <p:cNvSpPr>
+            <a:spLocks noGrp="1"/>
+          </p:cNvSpPr>
+          <p:nvPr>
+            <p:ph type="sldNum" sz="quarter" idx="4294967295"/>
+          </p:nvPr>
+        </p:nvSpPr>
+        <p:spPr>
+          <a:xfrm>
+            <a:off x="27432" y="91440"/>
+            <a:ext cx="585216" cy="475488"/>
+          </a:xfrm>
+          <a:prstGeom prst="rect">
+            <a:avLst/>
+          </a:prstGeom>
+          <a:extLst>
+            <a:ext uri="{C572A759-6A51-4108-AA02-DFA0A04FC94B}">
+              <ma14:wrappingTextBoxFlag xmlns:ma14="http://schemas.microsoft.com/office/mac/drawingml/2011/main" val="0"/>
+            </a:ext>
+          </a:extLst>
+        </p:spPr>
+        <p:txBody>
+          <a:bodyPr/>
+          <a:lstStyle>
+            <a:lvl1pPr>
+              <a:defRPr sz="2000">
+                <a:solidFill>
+                  <a:srgbClr val="FFFFFF"/>
+                </a:solidFill>
+                <a:latin typeface="Calibri"/>
+                <a:ea typeface="Calibri"/>
+                <a:cs typeface="Calibri"/>
+              </a:defRPr>
+            </a:lvl1pPr>
+          </a:lstStyle>
+          <a:p>
+            <a:pPr algn="ctr"/>
+            <a:fld id="{F7021451-1387-4CA6-816F-3879F97B5CBC}" type="slidenum">
+              <a:rPr b="1" lang="en-US"/>
+              <a:t>49</a:t>
+            </a:fld>
+            <a:endParaRPr lang="en-US"/>
+          </a:p>
+        </p:txBody>
+      </p:sp>
+    </p:spTree>
+  </p:cSld>
+  <p:clrMapOvr>
+    <a:masterClrMapping/>
+  </p:clrMapOvr>
+</p:sld>
+</file>
+
+<file path=ppt/slides/slide5.xml><?xml version="1.0" encoding="utf-8"?>
+<p:sld xmlns:a="http://schemas.openxmlformats.org/drawingml/2006/main" xmlns:r="http://schemas.openxmlformats.org/officeDocument/2006/relationships" xmlns:p="http://schemas.openxmlformats.org/presentationml/2006/main">
+  <p:cSld name="Slide 5">
+    <p:spTree>
+      <p:nvGrpSpPr>
+        <p:cNvPr id="1" name=""/>
+        <p:cNvGrpSpPr/>
+        <p:nvPr/>
+      </p:nvGrpSpPr>
+      <p:grpSpPr>
+        <a:xfrm>
+          <a:off x="0" y="0"/>
+          <a:ext cx="0" cy="0"/>
+          <a:chOff x="0" y="0"/>
+          <a:chExt cx="0" cy="0"/>
+        </a:xfrm>
+      </p:grpSpPr>
+      <p:sp>
+        <p:nvSpPr>
+          <p:cNvPr id="2" name="Text 0"/>
+          <p:cNvSpPr/>
+          <p:nvPr/>
+        </p:nvSpPr>
+        <p:spPr>
+          <a:xfrm>
+            <a:off x="457200" y="713232"/>
+            <a:ext cx="11368735" cy="274320"/>
+          </a:xfrm>
+          <a:prstGeom prst="rect">
+            <a:avLst/>
+          </a:prstGeom>
+          <a:noFill/>
+          <a:ln/>
+        </p:spPr>
+        <p:txBody>
+          <a:bodyPr wrap="square" lIns="0" tIns="0" rIns="0" bIns="0" rtlCol="0" anchor="ctr"/>
+          <a:lstStyle/>
+          <a:p>
+            <a:pPr algn="r" indent="0" marL="0">
+              <a:buNone/>
+            </a:pPr>
+            <a:r>
+              <a:rPr lang="en-US" sz="1400" b="1" dirty="0">
+                <a:solidFill>
+                  <a:srgbClr val="1C3F6E"/>
+                </a:solidFill>
+                <a:latin typeface="Calibri" pitchFamily="34" charset="0"/>
+                <a:ea typeface="Calibri" pitchFamily="34" charset="-122"/>
+                <a:cs typeface="Calibri" pitchFamily="34" charset="-120"/>
+              </a:rPr>
+              <a:t>HOMEWORK CORRECTION</a:t>
+            </a:r>
+            <a:endParaRPr lang="en-US" sz="1400" dirty="0"/>
+          </a:p>
+        </p:txBody>
+      </p:sp>
+      <p:pic>
+        <p:nvPicPr>
+          <p:cNvPr id="3" name="Image 0" descr="/home/claude/f4/img/minesec_sheet.png">    </p:cNvPr>
+          <p:cNvPicPr>
+            <a:picLocks noChangeAspect="1"/>
+          </p:cNvPicPr>
+          <p:nvPr/>
+        </p:nvPicPr>
+        <p:blipFill>
+          <a:blip r:embed="rId1"/>
+          <a:stretch>
+            <a:fillRect/>
+          </a:stretch>
+        </p:blipFill>
+        <p:spPr>
+          <a:xfrm>
+            <a:off x="0" y="658368"/>
+            <a:ext cx="5120640" cy="5833872"/>
+          </a:xfrm>
+          <a:prstGeom prst="rect">
+            <a:avLst/>
+          </a:prstGeom>
+        </p:spPr>
+      </p:pic>
+      <p:sp>
+        <p:nvSpPr>
+          <p:cNvPr id="4" name="Text 1"/>
+          <p:cNvSpPr/>
+          <p:nvPr/>
+        </p:nvSpPr>
+        <p:spPr>
+          <a:xfrm>
+            <a:off x="5349240" y="1005840"/>
+            <a:ext cx="6522415" cy="731520"/>
+          </a:xfrm>
+          <a:prstGeom prst="rect">
+            <a:avLst/>
+          </a:prstGeom>
+          <a:noFill/>
+          <a:ln/>
+        </p:spPr>
+        <p:txBody>
+          <a:bodyPr wrap="square" lIns="0" tIns="0" rIns="0" bIns="0" rtlCol="0" anchor="ctr">
+            <a:normAutofit/>
+          </a:bodyPr>
+          <a:lstStyle/>
+          <a:p>
+            <a:pPr algn="ctr" indent="0" marL="0">
+              <a:buNone/>
+            </a:pPr>
+            <a:r>
+              <a:rPr lang="en-US" sz="3600" b="1" dirty="0">
+                <a:solidFill>
+                  <a:srgbClr val="990011"/>
+                </a:solidFill>
+                <a:latin typeface="Times New Roman" pitchFamily="34" charset="0"/>
+                <a:ea typeface="Times New Roman" pitchFamily="34" charset="-122"/>
+                <a:cs typeface="Times New Roman" pitchFamily="34" charset="-120"/>
+              </a:rPr>
+              <a:t>Correction: Possible Answer</a:t>
+            </a:r>
+            <a:endParaRPr lang="en-US" sz="3600" dirty="0"/>
+          </a:p>
+        </p:txBody>
+      </p:sp>
+      <p:sp>
+        <p:nvSpPr>
+          <p:cNvPr id="5" name="Text 2"/>
+          <p:cNvSpPr/>
+          <p:nvPr/>
+        </p:nvSpPr>
+        <p:spPr>
+          <a:xfrm>
+            <a:off x="5349240" y="1783080"/>
+            <a:ext cx="6522415" cy="4663440"/>
+          </a:xfrm>
+          <a:prstGeom prst="rect">
+            <a:avLst/>
+          </a:prstGeom>
+          <a:noFill/>
+          <a:ln/>
+        </p:spPr>
+        <p:txBody>
+          <a:bodyPr wrap="square" lIns="0" tIns="0" rIns="0" bIns="0" rtlCol="0" anchor="t"/>
+          <a:lstStyle/>
+          <a:p>
+            <a:pPr algn="l" indent="0" marL="0">
+              <a:spcAft>
+                <a:spcPts val="800"/>
+              </a:spcAft>
+              <a:buNone/>
+            </a:pPr>
+            <a:r>
+              <a:rPr lang="en-US" sz="4000" dirty="0">
+                <a:solidFill>
+                  <a:srgbClr val="111111"/>
+                </a:solidFill>
+                <a:latin typeface="Times New Roman" pitchFamily="34" charset="0"/>
+                <a:ea typeface="Times New Roman" pitchFamily="34" charset="-122"/>
+                <a:cs typeface="Times New Roman" pitchFamily="34" charset="-120"/>
+              </a:rPr>
+              <a:t>Birth rate = (200 ÷ 5,000) × 1,000 = 40 ‰. Death rate = (50 ÷ 5,000) × 1,000 = 10 ‰. Natural growth rate = (40 − 10) ÷ 10 = 3 %.</a:t>
+            </a:r>
+            <a:endParaRPr lang="en-US" sz="4000" dirty="0"/>
+          </a:p>
+        </p:txBody>
+      </p:sp>
+      <p:sp>
+        <p:nvSpPr>
+          <p:cNvPr id="25" name="Slide Number Placeholder 0"/>
+          <p:cNvSpPr>
+            <a:spLocks noGrp="1"/>
+          </p:cNvSpPr>
+          <p:nvPr>
+            <p:ph type="sldNum" sz="quarter" idx="4294967295"/>
+          </p:nvPr>
+        </p:nvSpPr>
+        <p:spPr>
+          <a:xfrm>
+            <a:off x="27432" y="91440"/>
+            <a:ext cx="585216" cy="475488"/>
+          </a:xfrm>
+          <a:prstGeom prst="rect">
+            <a:avLst/>
+          </a:prstGeom>
+          <a:extLst>
+            <a:ext uri="{C572A759-6A51-4108-AA02-DFA0A04FC94B}">
+              <ma14:wrappingTextBoxFlag xmlns:ma14="http://schemas.microsoft.com/office/mac/drawingml/2011/main" val="0"/>
+            </a:ext>
+          </a:extLst>
+        </p:spPr>
+        <p:txBody>
+          <a:bodyPr/>
+          <a:lstStyle>
+            <a:lvl1pPr>
+              <a:defRPr sz="2000">
+                <a:solidFill>
+                  <a:srgbClr val="FFFFFF"/>
+                </a:solidFill>
+                <a:latin typeface="Calibri"/>
+                <a:ea typeface="Calibri"/>
+                <a:cs typeface="Calibri"/>
+              </a:defRPr>
+            </a:lvl1pPr>
+          </a:lstStyle>
+          <a:p>
+            <a:pPr algn="ctr"/>
+            <a:fld id="{F7021451-1387-4CA6-816F-3879F97B5CBC}" type="slidenum">
+              <a:rPr b="1" lang="en-US"/>
+              <a:t>5</a:t>
+            </a:fld>
+            <a:endParaRPr lang="en-US"/>
+          </a:p>
+        </p:txBody>
+      </p:sp>
+    </p:spTree>
+  </p:cSld>
+  <p:clrMapOvr>
+    <a:masterClrMapping/>
+  </p:clrMapOvr>
+</p:sld>
+</file>
+
+<file path=ppt/slides/slide50.xml><?xml version="1.0" encoding="utf-8"?>
+<p:sld xmlns:a="http://schemas.openxmlformats.org/drawingml/2006/main" xmlns:r="http://schemas.openxmlformats.org/officeDocument/2006/relationships" xmlns:p="http://schemas.openxmlformats.org/presentationml/2006/main">
+  <p:cSld name="Slide 50">
+    <p:spTree>
+      <p:nvGrpSpPr>
+        <p:cNvPr id="1" name=""/>
+        <p:cNvGrpSpPr/>
+        <p:nvPr/>
+      </p:nvGrpSpPr>
+      <p:grpSpPr>
+        <a:xfrm>
+          <a:off x="0" y="0"/>
+          <a:ext cx="0" cy="0"/>
+          <a:chOff x="0" y="0"/>
+          <a:chExt cx="0" cy="0"/>
+        </a:xfrm>
+      </p:grpSpPr>
+      <p:sp>
+        <p:nvSpPr>
+          <p:cNvPr id="2" name="Text 0"/>
+          <p:cNvSpPr/>
+          <p:nvPr/>
+        </p:nvSpPr>
+        <p:spPr>
+          <a:xfrm>
+            <a:off x="457200" y="713232"/>
+            <a:ext cx="11368735" cy="274320"/>
+          </a:xfrm>
+          <a:prstGeom prst="rect">
+            <a:avLst/>
+          </a:prstGeom>
+          <a:noFill/>
+          <a:ln/>
+        </p:spPr>
+        <p:txBody>
+          <a:bodyPr wrap="square" lIns="0" tIns="0" rIns="0" bIns="0" rtlCol="0" anchor="ctr"/>
+          <a:lstStyle/>
+          <a:p>
+            <a:pPr algn="r" indent="0" marL="0">
+              <a:buNone/>
+            </a:pPr>
+            <a:r>
+              <a:rPr lang="en-US" sz="1400" b="1" dirty="0">
+                <a:solidFill>
+                  <a:srgbClr val="1C3F6E"/>
+                </a:solidFill>
+                <a:latin typeface="Calibri" pitchFamily="34" charset="0"/>
+                <a:ea typeface="Calibri" pitchFamily="34" charset="-122"/>
+                <a:cs typeface="Calibri" pitchFamily="34" charset="-120"/>
+              </a:rPr>
+              <a:t>HOMEWORK</a:t>
+            </a:r>
+            <a:endParaRPr lang="en-US" sz="1400" dirty="0"/>
+          </a:p>
+        </p:txBody>
+      </p:sp>
+      <p:pic>
+        <p:nvPicPr>
+          <p:cNvPr id="3" name="Image 0" descr="/home/claude/f4/img/minesec_sheet.png">    </p:cNvPr>
+          <p:cNvPicPr>
+            <a:picLocks noChangeAspect="1"/>
+          </p:cNvPicPr>
+          <p:nvPr/>
+        </p:nvPicPr>
+        <p:blipFill>
+          <a:blip r:embed="rId1"/>
+          <a:stretch>
+            <a:fillRect/>
+          </a:stretch>
+        </p:blipFill>
+        <p:spPr>
+          <a:xfrm>
+            <a:off x="0" y="658368"/>
+            <a:ext cx="5120640" cy="5833872"/>
+          </a:xfrm>
+          <a:prstGeom prst="rect">
+            <a:avLst/>
+          </a:prstGeom>
+        </p:spPr>
+      </p:pic>
+      <p:sp>
+        <p:nvSpPr>
+          <p:cNvPr id="4" name="Text 1"/>
+          <p:cNvSpPr/>
+          <p:nvPr/>
+        </p:nvSpPr>
+        <p:spPr>
+          <a:xfrm>
+            <a:off x="5349240" y="1005840"/>
+            <a:ext cx="6522415" cy="731520"/>
+          </a:xfrm>
+          <a:prstGeom prst="rect">
+            <a:avLst/>
+          </a:prstGeom>
+          <a:noFill/>
+          <a:ln/>
+        </p:spPr>
+        <p:txBody>
+          <a:bodyPr wrap="square" lIns="0" tIns="0" rIns="0" bIns="0" rtlCol="0" anchor="ctr">
+            <a:normAutofit/>
+          </a:bodyPr>
+          <a:lstStyle/>
+          <a:p>
+            <a:pPr algn="ctr" indent="0" marL="0">
+              <a:buNone/>
+            </a:pPr>
+            <a:r>
+              <a:rPr lang="en-US" sz="3600" b="1" dirty="0">
+                <a:solidFill>
+                  <a:srgbClr val="990011"/>
+                </a:solidFill>
+                <a:latin typeface="Times New Roman" pitchFamily="34" charset="0"/>
+                <a:ea typeface="Times New Roman" pitchFamily="34" charset="-122"/>
+                <a:cs typeface="Times New Roman" pitchFamily="34" charset="-120"/>
+              </a:rPr>
+              <a:t>Homework</a:t>
+            </a:r>
+            <a:endParaRPr lang="en-US" sz="3600" dirty="0"/>
+          </a:p>
+        </p:txBody>
+      </p:sp>
+      <p:sp>
+        <p:nvSpPr>
+          <p:cNvPr id="5" name="Text 2"/>
+          <p:cNvSpPr/>
+          <p:nvPr/>
+        </p:nvSpPr>
+        <p:spPr>
+          <a:xfrm>
+            <a:off x="5349240" y="1783080"/>
+            <a:ext cx="6522415" cy="4663440"/>
+          </a:xfrm>
+          <a:prstGeom prst="rect">
+            <a:avLst/>
+          </a:prstGeom>
+          <a:noFill/>
+          <a:ln/>
+        </p:spPr>
+        <p:txBody>
+          <a:bodyPr wrap="square" lIns="0" tIns="0" rIns="0" bIns="0" rtlCol="0" anchor="t"/>
+          <a:lstStyle/>
+          <a:p>
+            <a:pPr algn="l" indent="0" marL="0">
+              <a:spcAft>
+                <a:spcPts val="800"/>
+              </a:spcAft>
+              <a:buNone/>
+            </a:pPr>
+            <a:r>
+              <a:rPr lang="en-US" sz="4000" dirty="0">
+                <a:solidFill>
+                  <a:srgbClr val="111111"/>
+                </a:solidFill>
+                <a:latin typeface="Times New Roman" pitchFamily="34" charset="0"/>
+                <a:ea typeface="Times New Roman" pitchFamily="34" charset="-122"/>
+                <a:cs typeface="Times New Roman" pitchFamily="34" charset="-120"/>
+              </a:rPr>
+              <a:t>Find the population and the area of your region and calculate its density.</a:t>
+            </a:r>
+            <a:endParaRPr lang="en-US" sz="4000" dirty="0"/>
+          </a:p>
+        </p:txBody>
+      </p:sp>
+      <p:sp>
+        <p:nvSpPr>
+          <p:cNvPr id="25" name="Slide Number Placeholder 0"/>
+          <p:cNvSpPr>
+            <a:spLocks noGrp="1"/>
+          </p:cNvSpPr>
+          <p:nvPr>
+            <p:ph type="sldNum" sz="quarter" idx="4294967295"/>
+          </p:nvPr>
+        </p:nvSpPr>
+        <p:spPr>
+          <a:xfrm>
+            <a:off x="27432" y="91440"/>
+            <a:ext cx="585216" cy="475488"/>
+          </a:xfrm>
+          <a:prstGeom prst="rect">
+            <a:avLst/>
+          </a:prstGeom>
+          <a:extLst>
+            <a:ext uri="{C572A759-6A51-4108-AA02-DFA0A04FC94B}">
+              <ma14:wrappingTextBoxFlag xmlns:ma14="http://schemas.microsoft.com/office/mac/drawingml/2011/main" val="0"/>
+            </a:ext>
+          </a:extLst>
+        </p:spPr>
+        <p:txBody>
+          <a:bodyPr/>
+          <a:lstStyle>
+            <a:lvl1pPr>
+              <a:defRPr sz="2000">
+                <a:solidFill>
+                  <a:srgbClr val="FFFFFF"/>
+                </a:solidFill>
+                <a:latin typeface="Calibri"/>
+                <a:ea typeface="Calibri"/>
+                <a:cs typeface="Calibri"/>
+              </a:defRPr>
+            </a:lvl1pPr>
+          </a:lstStyle>
+          <a:p>
+            <a:pPr algn="ctr"/>
+            <a:fld id="{F7021451-1387-4CA6-816F-3879F97B5CBC}" type="slidenum">
+              <a:rPr b="1" lang="en-US"/>
+              <a:t>50</a:t>
+            </a:fld>
+            <a:endParaRPr lang="en-US"/>
+          </a:p>
+        </p:txBody>
+      </p:sp>
+    </p:spTree>
+  </p:cSld>
+  <p:clrMapOvr>
+    <a:masterClrMapping/>
+  </p:clrMapOvr>
+</p:sld>
+</file>
+
+<file path=ppt/slides/slide51.xml><?xml version="1.0" encoding="utf-8"?>
+<p:sld xmlns:a="http://schemas.openxmlformats.org/drawingml/2006/main" xmlns:r="http://schemas.openxmlformats.org/officeDocument/2006/relationships" xmlns:p="http://schemas.openxmlformats.org/presentationml/2006/main">
+  <p:cSld name="Slide 51">
+    <p:spTree>
+      <p:nvGrpSpPr>
+        <p:cNvPr id="1" name=""/>
+        <p:cNvGrpSpPr/>
+        <p:nvPr/>
+      </p:nvGrpSpPr>
+      <p:grpSpPr>
+        <a:xfrm>
+          <a:off x="0" y="0"/>
+          <a:ext cx="0" cy="0"/>
+          <a:chOff x="0" y="0"/>
+          <a:chExt cx="0" cy="0"/>
+        </a:xfrm>
+      </p:grpSpPr>
+      <p:sp>
+        <p:nvSpPr>
+          <p:cNvPr id="2" name="Text 0"/>
+          <p:cNvSpPr/>
+          <p:nvPr/>
+        </p:nvSpPr>
+        <p:spPr>
+          <a:xfrm>
+            <a:off x="457200" y="713232"/>
+            <a:ext cx="11368735" cy="274320"/>
+          </a:xfrm>
+          <a:prstGeom prst="rect">
+            <a:avLst/>
+          </a:prstGeom>
+          <a:noFill/>
+          <a:ln/>
+        </p:spPr>
+        <p:txBody>
+          <a:bodyPr wrap="square" lIns="0" tIns="0" rIns="0" bIns="0" rtlCol="0" anchor="ctr"/>
+          <a:lstStyle/>
+          <a:p>
+            <a:pPr algn="r" indent="0" marL="0">
+              <a:buNone/>
+            </a:pPr>
+            <a:r>
+              <a:rPr lang="en-US" sz="1400" b="1" dirty="0">
+                <a:solidFill>
+                  <a:srgbClr val="1C3F6E"/>
+                </a:solidFill>
+                <a:latin typeface="Calibri" pitchFamily="34" charset="0"/>
+                <a:ea typeface="Calibri" pitchFamily="34" charset="-122"/>
+                <a:cs typeface="Calibri" pitchFamily="34" charset="-120"/>
+              </a:rPr>
+              <a:t>NEXT LESSON</a:t>
+            </a:r>
+            <a:endParaRPr lang="en-US" sz="1400" dirty="0"/>
+          </a:p>
+        </p:txBody>
+      </p:sp>
+      <p:pic>
+        <p:nvPicPr>
+          <p:cNvPr id="3" name="Image 0" descr="/home/claude/f4/img/minesec_sheet.png">    </p:cNvPr>
+          <p:cNvPicPr>
+            <a:picLocks noChangeAspect="1"/>
+          </p:cNvPicPr>
+          <p:nvPr/>
+        </p:nvPicPr>
+        <p:blipFill>
+          <a:blip r:embed="rId1"/>
+          <a:stretch>
+            <a:fillRect/>
+          </a:stretch>
+        </p:blipFill>
+        <p:spPr>
+          <a:xfrm>
+            <a:off x="0" y="658368"/>
+            <a:ext cx="5120640" cy="5833872"/>
+          </a:xfrm>
+          <a:prstGeom prst="rect">
+            <a:avLst/>
+          </a:prstGeom>
+        </p:spPr>
+      </p:pic>
+      <p:sp>
+        <p:nvSpPr>
+          <p:cNvPr id="4" name="Text 1"/>
+          <p:cNvSpPr/>
+          <p:nvPr/>
+        </p:nvSpPr>
+        <p:spPr>
+          <a:xfrm>
+            <a:off x="5349240" y="1005840"/>
+            <a:ext cx="6522415" cy="731520"/>
+          </a:xfrm>
+          <a:prstGeom prst="rect">
+            <a:avLst/>
+          </a:prstGeom>
+          <a:noFill/>
+          <a:ln/>
+        </p:spPr>
+        <p:txBody>
+          <a:bodyPr wrap="square" lIns="0" tIns="0" rIns="0" bIns="0" rtlCol="0" anchor="ctr">
+            <a:normAutofit/>
+          </a:bodyPr>
+          <a:lstStyle/>
+          <a:p>
+            <a:pPr algn="ctr" indent="0" marL="0">
+              <a:buNone/>
+            </a:pPr>
+            <a:r>
+              <a:rPr lang="en-US" sz="3600" b="1" dirty="0">
+                <a:solidFill>
+                  <a:srgbClr val="990011"/>
+                </a:solidFill>
+                <a:latin typeface="Times New Roman" pitchFamily="34" charset="0"/>
+                <a:ea typeface="Times New Roman" pitchFamily="34" charset="-122"/>
+                <a:cs typeface="Times New Roman" pitchFamily="34" charset="-120"/>
+              </a:rPr>
+              <a:t>Next Lesson</a:t>
+            </a:r>
+            <a:endParaRPr lang="en-US" sz="3600" dirty="0"/>
+          </a:p>
+        </p:txBody>
+      </p:sp>
+      <p:sp>
+        <p:nvSpPr>
+          <p:cNvPr id="5" name="Text 2"/>
+          <p:cNvSpPr/>
+          <p:nvPr/>
+        </p:nvSpPr>
+        <p:spPr>
+          <a:xfrm>
+            <a:off x="5349240" y="1783080"/>
+            <a:ext cx="6522415" cy="4663440"/>
+          </a:xfrm>
+          <a:prstGeom prst="rect">
+            <a:avLst/>
+          </a:prstGeom>
+          <a:noFill/>
+          <a:ln/>
+        </p:spPr>
+        <p:txBody>
+          <a:bodyPr wrap="square" lIns="0" tIns="0" rIns="0" bIns="0" rtlCol="0" anchor="ctr"/>
+          <a:lstStyle/>
+          <a:p>
+            <a:pPr algn="ctr" indent="0" marL="0">
+              <a:spcAft>
+                <a:spcPts val="800"/>
+              </a:spcAft>
+              <a:buNone/>
+            </a:pPr>
+            <a:r>
+              <a:rPr lang="en-US" sz="4000" b="1" dirty="0">
+                <a:solidFill>
+                  <a:srgbClr val="111111"/>
+                </a:solidFill>
+                <a:latin typeface="Times New Roman" pitchFamily="34" charset="0"/>
+                <a:ea typeface="Times New Roman" pitchFamily="34" charset="-122"/>
+                <a:cs typeface="Times New Roman" pitchFamily="34" charset="-120"/>
+              </a:rPr>
+              <a:t>Our next lesson will be on:</a:t>
+            </a:r>
+            <a:endParaRPr lang="en-US" sz="4000" dirty="0"/>
+          </a:p>
+          <a:p>
+            <a:pPr algn="ctr" indent="0" marL="0">
+              <a:spcAft>
+                <a:spcPts val="800"/>
+              </a:spcAft>
+              <a:buNone/>
+            </a:pPr>
+            <a:r>
+              <a:rPr lang="en-US" sz="4000" b="1" dirty="0">
+                <a:solidFill>
+                  <a:srgbClr val="990011"/>
+                </a:solidFill>
+                <a:latin typeface="Times New Roman" pitchFamily="34" charset="0"/>
+                <a:ea typeface="Times New Roman" pitchFamily="34" charset="-122"/>
+                <a:cs typeface="Times New Roman" pitchFamily="34" charset="-120"/>
+              </a:rPr>
+              <a:t>Practical Work 2: Population Densities in Cameroon</a:t>
+            </a:r>
+            <a:endParaRPr lang="en-US" sz="4000" dirty="0"/>
+          </a:p>
+        </p:txBody>
+      </p:sp>
+      <p:sp>
+        <p:nvSpPr>
+          <p:cNvPr id="25" name="Slide Number Placeholder 0"/>
+          <p:cNvSpPr>
+            <a:spLocks noGrp="1"/>
+          </p:cNvSpPr>
+          <p:nvPr>
+            <p:ph type="sldNum" sz="quarter" idx="4294967295"/>
+          </p:nvPr>
+        </p:nvSpPr>
+        <p:spPr>
+          <a:xfrm>
+            <a:off x="27432" y="91440"/>
+            <a:ext cx="585216" cy="475488"/>
+          </a:xfrm>
+          <a:prstGeom prst="rect">
+            <a:avLst/>
+          </a:prstGeom>
+          <a:extLst>
+            <a:ext uri="{C572A759-6A51-4108-AA02-DFA0A04FC94B}">
+              <ma14:wrappingTextBoxFlag xmlns:ma14="http://schemas.microsoft.com/office/mac/drawingml/2011/main" val="0"/>
+            </a:ext>
+          </a:extLst>
+        </p:spPr>
+        <p:txBody>
+          <a:bodyPr/>
+          <a:lstStyle>
+            <a:lvl1pPr>
+              <a:defRPr sz="2000">
+                <a:solidFill>
+                  <a:srgbClr val="FFFFFF"/>
+                </a:solidFill>
+                <a:latin typeface="Calibri"/>
+                <a:ea typeface="Calibri"/>
+                <a:cs typeface="Calibri"/>
+              </a:defRPr>
+            </a:lvl1pPr>
+          </a:lstStyle>
+          <a:p>
+            <a:pPr algn="ctr"/>
+            <a:fld id="{F7021451-1387-4CA6-816F-3879F97B5CBC}" type="slidenum">
+              <a:rPr b="1" lang="en-US"/>
+              <a:t>51</a:t>
+            </a:fld>
+            <a:endParaRPr lang="en-US"/>
+          </a:p>
+        </p:txBody>
+      </p:sp>
+    </p:spTree>
+  </p:cSld>
+  <p:clrMapOvr>
+    <a:masterClrMapping/>
+  </p:clrMapOvr>
+</p:sld>
+</file>
+
+<file path=ppt/slides/slide52.xml><?xml version="1.0" encoding="utf-8"?>
+<p:sld xmlns:a="http://schemas.openxmlformats.org/drawingml/2006/main" xmlns:r="http://schemas.openxmlformats.org/officeDocument/2006/relationships" xmlns:p="http://schemas.openxmlformats.org/presentationml/2006/main">
+  <p:cSld name="Slide 52">
+    <p:spTree>
+      <p:nvGrpSpPr>
+        <p:cNvPr id="1" name=""/>
+        <p:cNvGrpSpPr/>
+        <p:nvPr/>
+      </p:nvGrpSpPr>
+      <p:grpSpPr>
+        <a:xfrm>
+          <a:off x="0" y="0"/>
+          <a:ext cx="0" cy="0"/>
+          <a:chOff x="0" y="0"/>
+          <a:chExt cx="0" cy="0"/>
+        </a:xfrm>
+      </p:grpSpPr>
+      <p:sp>
+        <p:nvSpPr>
+          <p:cNvPr id="2" name="Text 0"/>
+          <p:cNvSpPr/>
+          <p:nvPr/>
+        </p:nvSpPr>
+        <p:spPr>
+          <a:xfrm>
+            <a:off x="457200" y="713232"/>
+            <a:ext cx="11368735" cy="274320"/>
+          </a:xfrm>
+          <a:prstGeom prst="rect">
+            <a:avLst/>
+          </a:prstGeom>
+          <a:noFill/>
+          <a:ln/>
+        </p:spPr>
+        <p:txBody>
+          <a:bodyPr wrap="square" lIns="0" tIns="0" rIns="0" bIns="0" rtlCol="0" anchor="ctr"/>
+          <a:lstStyle/>
+          <a:p>
+            <a:pPr algn="r" indent="0" marL="0">
+              <a:buNone/>
+            </a:pPr>
+            <a:r>
+              <a:rPr lang="en-US" sz="1400" b="1" dirty="0">
+                <a:solidFill>
+                  <a:srgbClr val="1C3F6E"/>
+                </a:solidFill>
+                <a:latin typeface="Calibri" pitchFamily="34" charset="0"/>
+                <a:ea typeface="Calibri" pitchFamily="34" charset="-122"/>
+                <a:cs typeface="Calibri" pitchFamily="34" charset="-120"/>
+              </a:rPr>
               <a:t>BILINGUAL GAME</a:t>
             </a:r>
             <a:endParaRPr lang="en-US" sz="1400" dirty="0"/>
@@ -16637,7 +18681,7 @@
       </p:sp>
       <p:graphicFrame>
         <p:nvGraphicFramePr>
-          <p:cNvPr id="48" name="Table 0"/>
+          <p:cNvPr id="53" name="Table 0"/>
           <p:cNvGraphicFramePr>
             <a:graphicFrameLocks noGrp="1"/>
           </p:cNvGraphicFramePr>
@@ -17673,7 +19717,7 @@
             <a:pPr algn="ctr"/>
             <a:fld id="{F7021451-1387-4CA6-816F-3879F97B5CBC}" type="slidenum">
               <a:rPr b="1" lang="en-US"/>
-              <a:t>47</a:t>
+              <a:t>52</a:t>
             </a:fld>
             <a:endParaRPr lang="en-US"/>
           </a:p>
@@ -17687,9 +19731,9 @@
 </p:sld>
 </file>
 
-<file path=ppt/slides/slide48.xml><?xml version="1.0" encoding="utf-8"?>
+<file path=ppt/slides/slide53.xml><?xml version="1.0" encoding="utf-8"?>
 <p:sld xmlns:a="http://schemas.openxmlformats.org/drawingml/2006/main" xmlns:r="http://schemas.openxmlformats.org/officeDocument/2006/relationships" xmlns:p="http://schemas.openxmlformats.org/presentationml/2006/main">
-  <p:cSld name="Slide 48">
+  <p:cSld name="Slide 53">
     <p:spTree>
       <p:nvGrpSpPr>
         <p:cNvPr id="1" name=""/>
@@ -17784,7 +19828,7 @@
       </p:sp>
       <p:graphicFrame>
         <p:nvGraphicFramePr>
-          <p:cNvPr id="49" name="Table 0"/>
+          <p:cNvPr id="54" name="Table 0"/>
           <p:cNvGraphicFramePr>
             <a:graphicFrameLocks noGrp="1"/>
           </p:cNvGraphicFramePr>
@@ -18170,7 +20214,7 @@
                           <a:ea typeface="Calibri" pitchFamily="34" charset="-122"/>
                           <a:cs typeface="Calibri" pitchFamily="34" charset="-120"/>
                         </a:rPr>
-                        <a:t>Define population density and calculate it. Describe the distribution of the world population. Explain the factors of uneven distribution.</a:t>
+                        <a:t>Define and calculate population density. Describe the spatial distribution of the world population. Explain the factors of uneven distribution.</a:t>
                       </a:r>
                       <a:endParaRPr lang="en-US" sz="1600" dirty="0">
                         <a:latin typeface="Calibri" charset="0"/>
@@ -18406,7 +20450,7 @@
             <a:pPr algn="ctr"/>
             <a:fld id="{F7021451-1387-4CA6-816F-3879F97B5CBC}" type="slidenum">
               <a:rPr b="1" lang="en-US"/>
-              <a:t>48</a:t>
+              <a:t>53</a:t>
             </a:fld>
             <a:endParaRPr lang="en-US"/>
           </a:p>
@@ -18420,9 +20464,9 @@
 </p:sld>
 </file>
 
-<file path=ppt/slides/slide49.xml><?xml version="1.0" encoding="utf-8"?>
+<file path=ppt/slides/slide54.xml><?xml version="1.0" encoding="utf-8"?>
 <p:sld xmlns:a="http://schemas.openxmlformats.org/drawingml/2006/main" xmlns:r="http://schemas.openxmlformats.org/officeDocument/2006/relationships" xmlns:p="http://schemas.openxmlformats.org/presentationml/2006/main">
-  <p:cSld name="Slide 49">
+  <p:cSld name="Slide 54">
     <p:spTree>
       <p:nvGrpSpPr>
         <p:cNvPr id="1" name=""/>
@@ -18517,7 +20561,7 @@
       </p:sp>
       <p:graphicFrame>
         <p:nvGraphicFramePr>
-          <p:cNvPr id="50" name="Table 0"/>
+          <p:cNvPr id="55" name="Table 0"/>
           <p:cNvGraphicFramePr>
             <a:graphicFrameLocks noGrp="1"/>
           </p:cNvGraphicFramePr>
@@ -18627,7 +20671,7 @@
                           <a:ea typeface="Calibri" pitchFamily="34" charset="-122"/>
                           <a:cs typeface="Calibri" pitchFamily="34" charset="-120"/>
                         </a:rPr>
-                        <a:t>DEFINITIONS; Spatial Distribution; Factors of Uneven Distribution.</a:t>
+                        <a:t>DEFINITIONS; Concept of Population Density; Spatial Distribution; Factors of Uneven Distribution.</a:t>
                       </a:r>
                       <a:endParaRPr lang="en-US" sz="1600" dirty="0">
                         <a:latin typeface="Calibri" charset="0"/>
@@ -19277,7 +21321,7 @@
             <a:pPr algn="ctr"/>
             <a:fld id="{F7021451-1387-4CA6-816F-3879F97B5CBC}" type="slidenum">
               <a:rPr b="1" lang="en-US"/>
-              <a:t>49</a:t>
+              <a:t>54</a:t>
             </a:fld>
             <a:endParaRPr lang="en-US"/>
           </a:p>
@@ -19291,9 +21335,9 @@
 </p:sld>
 </file>
 
-<file path=ppt/slides/slide5.xml><?xml version="1.0" encoding="utf-8"?>
+<file path=ppt/slides/slide55.xml><?xml version="1.0" encoding="utf-8"?>
 <p:sld xmlns:a="http://schemas.openxmlformats.org/drawingml/2006/main" xmlns:r="http://schemas.openxmlformats.org/officeDocument/2006/relationships" xmlns:p="http://schemas.openxmlformats.org/presentationml/2006/main">
-  <p:cSld name="Slide 5">
+  <p:cSld name="Slide 55">
     <p:spTree>
       <p:nvGrpSpPr>
         <p:cNvPr id="1" name=""/>
@@ -19341,7 +21385,7 @@
                 <a:ea typeface="Calibri" pitchFamily="34" charset="-122"/>
                 <a:cs typeface="Calibri" pitchFamily="34" charset="-120"/>
               </a:rPr>
-              <a:t>HOMEWORK CORRECTION</a:t>
+              <a:t>TEACHER'S NOTE</a:t>
             </a:r>
             <a:endParaRPr lang="en-US" sz="1400" dirty="0"/>
           </a:p>
@@ -19364,7 +21408,7 @@
         <p:spPr>
           <a:xfrm>
             <a:off x="0" y="658368"/>
-            <a:ext cx="5120640" cy="5833872"/>
+            <a:ext cx="3840480" cy="5833872"/>
           </a:xfrm>
           <a:prstGeom prst="rect">
             <a:avLst/>
@@ -19379,8 +21423,8 @@
         </p:nvSpPr>
         <p:spPr>
           <a:xfrm>
-            <a:off x="5349240" y="1005840"/>
-            <a:ext cx="6522415" cy="731520"/>
+            <a:off x="4069080" y="1005840"/>
+            <a:ext cx="7802575" cy="731520"/>
           </a:xfrm>
           <a:prstGeom prst="rect">
             <a:avLst/>
@@ -19406,7 +21450,7 @@
                 <a:ea typeface="Times New Roman" pitchFamily="34" charset="-122"/>
                 <a:cs typeface="Times New Roman" pitchFamily="34" charset="-120"/>
               </a:rPr>
-              <a:t>Correction: Possible Answer</a:t>
+              <a:t>Teacher's Note</a:t>
             </a:r>
             <a:endParaRPr lang="en-US" sz="3600" dirty="0"/>
           </a:p>
@@ -19420,8 +21464,8 @@
         </p:nvSpPr>
         <p:spPr>
           <a:xfrm>
-            <a:off x="5349240" y="1783080"/>
-            <a:ext cx="6522415" cy="4663440"/>
+            <a:off x="4069080" y="1783080"/>
+            <a:ext cx="7802575" cy="4663440"/>
           </a:xfrm>
           <a:prstGeom prst="rect">
             <a:avLst/>
@@ -19433,24 +21477,130 @@
           <a:bodyPr wrap="square" lIns="0" tIns="0" rIns="0" bIns="0" rtlCol="0" anchor="t"/>
           <a:lstStyle/>
           <a:p>
-            <a:pPr algn="l" indent="0" marL="0">
+            <a:pPr algn="l" marL="342900" indent="-342900">
               <a:spcAft>
                 <a:spcPts val="800"/>
               </a:spcAft>
-              <a:buNone/>
+              <a:buSzPct val="100000"/>
+              <a:buChar char="•"/>
             </a:pPr>
             <a:r>
-              <a:rPr lang="en-US" sz="4000" dirty="0">
+              <a:rPr lang="en-US" sz="2000" dirty="0">
                 <a:solidFill>
                   <a:srgbClr val="111111"/>
                 </a:solidFill>
-                <a:latin typeface="Times New Roman" pitchFamily="34" charset="0"/>
-                <a:ea typeface="Times New Roman" pitchFamily="34" charset="-122"/>
-                <a:cs typeface="Times New Roman" pitchFamily="34" charset="-120"/>
+                <a:latin typeface="Calibri" pitchFamily="34" charset="0"/>
+                <a:ea typeface="Calibri" pitchFamily="34" charset="-122"/>
+                <a:cs typeface="Calibri" pitchFamily="34" charset="-120"/>
               </a:rPr>
-              <a:t>Birth rate = (200 ÷ 5,000) × 1,000 = 40 ‰. Death rate = (50 ÷ 5,000) × 1,000 = 10 ‰. Natural growth rate = (40 − 10) ÷ 10 = 3 %.</a:t>
-            </a:r>
-            <a:endParaRPr lang="en-US" sz="4000" dirty="0"/>
+              <a:t>Timing: Homework correction, plan, objectives 8 min | Recall, situation, action 10 min | 5 activities 30 min | Board summary (copying) 30 min | Evaluation, remediation 10 min | Homework, next lesson 5 min | Logbook 7 min</a:t>
+            </a:r>
+            <a:endParaRPr lang="en-US" sz="2000" dirty="0"/>
+          </a:p>
+          <a:p>
+            <a:pPr algn="l" marL="342900" indent="-342900">
+              <a:spcAft>
+                <a:spcPts val="800"/>
+              </a:spcAft>
+              <a:buSzPct val="100000"/>
+              <a:buChar char="•"/>
+            </a:pPr>
+            <a:r>
+              <a:rPr lang="en-US" sz="2000" dirty="0">
+                <a:solidFill>
+                  <a:srgbClr val="111111"/>
+                </a:solidFill>
+                <a:latin typeface="Calibri" pitchFamily="34" charset="0"/>
+                <a:ea typeface="Calibri" pitchFamily="34" charset="-122"/>
+                <a:cs typeface="Calibri" pitchFamily="34" charset="-120"/>
+              </a:rPr>
+              <a:t>Without the projector (Activity 1): write the formula.</a:t>
+            </a:r>
+            <a:endParaRPr lang="en-US" sz="2000" dirty="0"/>
+          </a:p>
+          <a:p>
+            <a:pPr algn="l" marL="342900" indent="-342900">
+              <a:spcAft>
+                <a:spcPts val="800"/>
+              </a:spcAft>
+              <a:buSzPct val="100000"/>
+              <a:buChar char="•"/>
+            </a:pPr>
+            <a:r>
+              <a:rPr lang="en-US" sz="2000" dirty="0">
+                <a:solidFill>
+                  <a:srgbClr val="111111"/>
+                </a:solidFill>
+                <a:latin typeface="Calibri" pitchFamily="34" charset="0"/>
+                <a:ea typeface="Calibri" pitchFamily="34" charset="-122"/>
+                <a:cs typeface="Calibri" pitchFamily="34" charset="-120"/>
+              </a:rPr>
+              <a:t>Without the projector (Activity 2): use the atlas.</a:t>
+            </a:r>
+            <a:endParaRPr lang="en-US" sz="2000" dirty="0"/>
+          </a:p>
+          <a:p>
+            <a:pPr algn="l" marL="342900" indent="-342900">
+              <a:spcAft>
+                <a:spcPts val="800"/>
+              </a:spcAft>
+              <a:buSzPct val="100000"/>
+              <a:buChar char="•"/>
+            </a:pPr>
+            <a:r>
+              <a:rPr lang="en-US" sz="2000" dirty="0">
+                <a:solidFill>
+                  <a:srgbClr val="111111"/>
+                </a:solidFill>
+                <a:latin typeface="Calibri" pitchFamily="34" charset="0"/>
+                <a:ea typeface="Calibri" pitchFamily="34" charset="-122"/>
+                <a:cs typeface="Calibri" pitchFamily="34" charset="-120"/>
+              </a:rPr>
+              <a:t>Without the projector (Activity 3): describe the Sahara.</a:t>
+            </a:r>
+            <a:endParaRPr lang="en-US" sz="2000" dirty="0"/>
+          </a:p>
+          <a:p>
+            <a:pPr algn="l" marL="342900" indent="-342900">
+              <a:spcAft>
+                <a:spcPts val="800"/>
+              </a:spcAft>
+              <a:buSzPct val="100000"/>
+              <a:buChar char="•"/>
+            </a:pPr>
+            <a:r>
+              <a:rPr lang="en-US" sz="2000" dirty="0">
+                <a:solidFill>
+                  <a:srgbClr val="111111"/>
+                </a:solidFill>
+                <a:latin typeface="Calibri" pitchFamily="34" charset="0"/>
+                <a:ea typeface="Calibri" pitchFamily="34" charset="-122"/>
+                <a:cs typeface="Calibri" pitchFamily="34" charset="-120"/>
+              </a:rPr>
+              <a:t>Without the projector (Activity 4): name fertile areas of Cameroon.</a:t>
+            </a:r>
+            <a:endParaRPr lang="en-US" sz="2000" dirty="0"/>
+          </a:p>
+          <a:p>
+            <a:pPr algn="l" marL="342900" indent="-342900">
+              <a:spcAft>
+                <a:spcPts val="800"/>
+              </a:spcAft>
+              <a:buSzPct val="100000"/>
+              <a:buChar char="•"/>
+            </a:pPr>
+            <a:r>
+              <a:rPr lang="en-US" sz="2000" dirty="0">
+                <a:solidFill>
+                  <a:srgbClr val="111111"/>
+                </a:solidFill>
+                <a:latin typeface="Calibri" pitchFamily="34" charset="0"/>
+                <a:ea typeface="Calibri" pitchFamily="34" charset="-122"/>
+                <a:cs typeface="Calibri" pitchFamily="34" charset="-120"/>
+              </a:rPr>
+              <a:t>Without the projector (Activity 5): ask why people move to Douala.</a:t>
+            </a:r>
+            <a:endParaRPr lang="en-US" sz="2000" dirty="0"/>
           </a:p>
         </p:txBody>
       </p:sp>
@@ -19496,7 +21646,7 @@
             <a:pPr algn="ctr"/>
             <a:fld id="{F7021451-1387-4CA6-816F-3879F97B5CBC}" type="slidenum">
               <a:rPr b="1" lang="en-US"/>
-              <a:t>5</a:t>
+              <a:t>55</a:t>
             </a:fld>
             <a:endParaRPr lang="en-US"/>
           </a:p>
@@ -19510,9 +21660,9 @@
 </p:sld>
 </file>
 
-<file path=ppt/slides/slide50.xml><?xml version="1.0" encoding="utf-8"?>
+<file path=ppt/slides/slide56.xml><?xml version="1.0" encoding="utf-8"?>
 <p:sld xmlns:a="http://schemas.openxmlformats.org/drawingml/2006/main" xmlns:r="http://schemas.openxmlformats.org/officeDocument/2006/relationships" xmlns:p="http://schemas.openxmlformats.org/presentationml/2006/main">
-  <p:cSld name="Slide 50">
+  <p:cSld name="Slide 56">
     <p:spTree>
       <p:nvGrpSpPr>
         <p:cNvPr id="1" name=""/>
@@ -19560,7 +21710,7 @@
                 <a:ea typeface="Calibri" pitchFamily="34" charset="-122"/>
                 <a:cs typeface="Calibri" pitchFamily="34" charset="-120"/>
               </a:rPr>
-              <a:t>TEACHER'S NOTE</a:t>
+              <a:t>REFERENCES</a:t>
             </a:r>
             <a:endParaRPr lang="en-US" sz="1400" dirty="0"/>
           </a:p>
@@ -19583,7 +21733,7 @@
         <p:spPr>
           <a:xfrm>
             <a:off x="0" y="658368"/>
-            <a:ext cx="3840480" cy="5833872"/>
+            <a:ext cx="5120640" cy="5833872"/>
           </a:xfrm>
           <a:prstGeom prst="rect">
             <a:avLst/>
@@ -19598,8 +21748,8 @@
         </p:nvSpPr>
         <p:spPr>
           <a:xfrm>
-            <a:off x="4069080" y="1005840"/>
-            <a:ext cx="7802575" cy="731520"/>
+            <a:off x="5349240" y="1005840"/>
+            <a:ext cx="6522415" cy="731520"/>
           </a:xfrm>
           <a:prstGeom prst="rect">
             <a:avLst/>
@@ -19625,7 +21775,7 @@
                 <a:ea typeface="Times New Roman" pitchFamily="34" charset="-122"/>
                 <a:cs typeface="Times New Roman" pitchFamily="34" charset="-120"/>
               </a:rPr>
-              <a:t>Teacher's Note</a:t>
+              <a:t>References</a:t>
             </a:r>
             <a:endParaRPr lang="en-US" sz="3600" dirty="0"/>
           </a:p>
@@ -19639,8 +21789,8 @@
         </p:nvSpPr>
         <p:spPr>
           <a:xfrm>
-            <a:off x="4069080" y="1783080"/>
-            <a:ext cx="7802575" cy="4663440"/>
+            <a:off x="5349240" y="1783080"/>
+            <a:ext cx="6522415" cy="4663440"/>
           </a:xfrm>
           <a:prstGeom prst="rect">
             <a:avLst/>
@@ -19660,7 +21810,7 @@
               <a:buChar char="•"/>
             </a:pPr>
             <a:r>
-              <a:rPr lang="en-US" sz="2000" dirty="0">
+              <a:rPr lang="en-US" sz="1800" dirty="0">
                 <a:solidFill>
                   <a:srgbClr val="111111"/>
                 </a:solidFill>
@@ -19668,9 +21818,9 @@
                 <a:ea typeface="Calibri" pitchFamily="34" charset="-122"/>
                 <a:cs typeface="Calibri" pitchFamily="34" charset="-120"/>
               </a:rPr>
-              <a:t>Timing: Homework correction, plan, objectives 8 min | Recall, situation, action 10 min | 5 activities 30 min | Board summary (copying) 30 min | Evaluation, remediation 10 min | Homework, next lesson 5 min | Logbook 7 min</a:t>
-            </a:r>
-            <a:endParaRPr lang="en-US" sz="2000" dirty="0"/>
+              <a:t>Geography Syllabus, Forms I–V, MINESEC (2023) — Form 2, Module 1: Man in his Environment.</a:t>
+            </a:r>
+            <a:endParaRPr lang="en-US" sz="1800" dirty="0"/>
           </a:p>
           <a:p>
             <a:pPr algn="l" marL="342900" indent="-342900">
@@ -19681,7 +21831,7 @@
               <a:buChar char="•"/>
             </a:pPr>
             <a:r>
-              <a:rPr lang="en-US" sz="2000" dirty="0">
+              <a:rPr lang="en-US" sz="1800" dirty="0">
                 <a:solidFill>
                   <a:srgbClr val="111111"/>
                 </a:solidFill>
@@ -19689,9 +21839,9 @@
                 <a:ea typeface="Calibri" pitchFamily="34" charset="-122"/>
                 <a:cs typeface="Calibri" pitchFamily="34" charset="-120"/>
               </a:rPr>
-              <a:t>Without the projector (Activity 1): write the formula.</a:t>
-            </a:r>
-            <a:endParaRPr lang="en-US" sz="2000" dirty="0"/>
+              <a:t>Photo, Activity 3: “Desert trekking in Merzouga” by Antonio Cinotti , CC BY-NC-ND 2.0, via Flickr (https://www.flickr.com/photos/46378751@N02/15331399979)</a:t>
+            </a:r>
+            <a:endParaRPr lang="en-US" sz="1800" dirty="0"/>
           </a:p>
           <a:p>
             <a:pPr algn="l" marL="342900" indent="-342900">
@@ -19702,7 +21852,7 @@
               <a:buChar char="•"/>
             </a:pPr>
             <a:r>
-              <a:rPr lang="en-US" sz="2000" dirty="0">
+              <a:rPr lang="en-US" sz="1800" dirty="0">
                 <a:solidFill>
                   <a:srgbClr val="111111"/>
                 </a:solidFill>
@@ -19710,9 +21860,9 @@
                 <a:ea typeface="Calibri" pitchFamily="34" charset="-122"/>
                 <a:cs typeface="Calibri" pitchFamily="34" charset="-120"/>
               </a:rPr>
-              <a:t>Without the projector (Activity 2): use the atlas.</a:t>
-            </a:r>
-            <a:endParaRPr lang="en-US" sz="2000" dirty="0"/>
+              <a:t>Photo, Activity 4: “Irrigated rice fields in Sefula, Zambia. Photo by Kate Longley, 2013.” by WorldFish, CC BY-NC-ND 2.0, via Flickr (https://www.flickr.com/photos/61545321@N06/8608804590)</a:t>
+            </a:r>
+            <a:endParaRPr lang="en-US" sz="1800" dirty="0"/>
           </a:p>
           <a:p>
             <a:pPr algn="l" marL="342900" indent="-342900">
@@ -19723,7 +21873,7 @@
               <a:buChar char="•"/>
             </a:pPr>
             <a:r>
-              <a:rPr lang="en-US" sz="2000" dirty="0">
+              <a:rPr lang="en-US" sz="1800" dirty="0">
                 <a:solidFill>
                   <a:srgbClr val="111111"/>
                 </a:solidFill>
@@ -19731,9 +21881,9 @@
                 <a:ea typeface="Calibri" pitchFamily="34" charset="-122"/>
                 <a:cs typeface="Calibri" pitchFamily="34" charset="-120"/>
               </a:rPr>
-              <a:t>Without the projector (Activity 3): describe the Sahara.</a:t>
-            </a:r>
-            <a:endParaRPr lang="en-US" sz="2000" dirty="0"/>
+              <a:t>Photo, Activity 5: “Douala” by christing-O-, CC BY 2.0, via Flickr (https://www.flickr.com/photos/76187282@N00/7227535754)</a:t>
+            </a:r>
+            <a:endParaRPr lang="en-US" sz="1800" dirty="0"/>
           </a:p>
           <a:p>
             <a:pPr algn="l" marL="342900" indent="-342900">
@@ -19744,7 +21894,7 @@
               <a:buChar char="•"/>
             </a:pPr>
             <a:r>
-              <a:rPr lang="en-US" sz="2000" dirty="0">
+              <a:rPr lang="en-US" sz="1800" dirty="0">
                 <a:solidFill>
                   <a:srgbClr val="111111"/>
                 </a:solidFill>
@@ -19752,30 +21902,9 @@
                 <a:ea typeface="Calibri" pitchFamily="34" charset="-122"/>
                 <a:cs typeface="Calibri" pitchFamily="34" charset="-120"/>
               </a:rPr>
-              <a:t>Without the projector (Activity 4): name fertile areas of Cameroon.</a:t>
-            </a:r>
-            <a:endParaRPr lang="en-US" sz="2000" dirty="0"/>
-          </a:p>
-          <a:p>
-            <a:pPr algn="l" marL="342900" indent="-342900">
-              <a:spcAft>
-                <a:spcPts val="800"/>
-              </a:spcAft>
-              <a:buSzPct val="100000"/>
-              <a:buChar char="•"/>
-            </a:pPr>
-            <a:r>
-              <a:rPr lang="en-US" sz="2000" dirty="0">
-                <a:solidFill>
-                  <a:srgbClr val="111111"/>
-                </a:solidFill>
-                <a:latin typeface="Calibri" pitchFamily="34" charset="0"/>
-                <a:ea typeface="Calibri" pitchFamily="34" charset="-122"/>
-                <a:cs typeface="Calibri" pitchFamily="34" charset="-120"/>
-              </a:rPr>
-              <a:t>Without the projector (Activity 5): ask why people move to Douala.</a:t>
-            </a:r>
-            <a:endParaRPr lang="en-US" sz="2000" dirty="0"/>
+              <a:t>Diagrams and animations: drawn for this lesson (Geography Department).</a:t>
+            </a:r>
+            <a:endParaRPr lang="en-US" sz="1800" dirty="0"/>
           </a:p>
         </p:txBody>
       </p:sp>
@@ -19821,311 +21950,7 @@
             <a:pPr algn="ctr"/>
             <a:fld id="{F7021451-1387-4CA6-816F-3879F97B5CBC}" type="slidenum">
               <a:rPr b="1" lang="en-US"/>
-              <a:t>50</a:t>
-            </a:fld>
-            <a:endParaRPr lang="en-US"/>
-          </a:p>
-        </p:txBody>
-      </p:sp>
-    </p:spTree>
-  </p:cSld>
-  <p:clrMapOvr>
-    <a:masterClrMapping/>
-  </p:clrMapOvr>
-</p:sld>
-</file>
-
-<file path=ppt/slides/slide51.xml><?xml version="1.0" encoding="utf-8"?>
-<p:sld xmlns:a="http://schemas.openxmlformats.org/drawingml/2006/main" xmlns:r="http://schemas.openxmlformats.org/officeDocument/2006/relationships" xmlns:p="http://schemas.openxmlformats.org/presentationml/2006/main">
-  <p:cSld name="Slide 51">
-    <p:spTree>
-      <p:nvGrpSpPr>
-        <p:cNvPr id="1" name=""/>
-        <p:cNvGrpSpPr/>
-        <p:nvPr/>
-      </p:nvGrpSpPr>
-      <p:grpSpPr>
-        <a:xfrm>
-          <a:off x="0" y="0"/>
-          <a:ext cx="0" cy="0"/>
-          <a:chOff x="0" y="0"/>
-          <a:chExt cx="0" cy="0"/>
-        </a:xfrm>
-      </p:grpSpPr>
-      <p:sp>
-        <p:nvSpPr>
-          <p:cNvPr id="2" name="Text 0"/>
-          <p:cNvSpPr/>
-          <p:nvPr/>
-        </p:nvSpPr>
-        <p:spPr>
-          <a:xfrm>
-            <a:off x="457200" y="713232"/>
-            <a:ext cx="11368735" cy="274320"/>
-          </a:xfrm>
-          <a:prstGeom prst="rect">
-            <a:avLst/>
-          </a:prstGeom>
-          <a:noFill/>
-          <a:ln/>
-        </p:spPr>
-        <p:txBody>
-          <a:bodyPr wrap="square" lIns="0" tIns="0" rIns="0" bIns="0" rtlCol="0" anchor="ctr"/>
-          <a:lstStyle/>
-          <a:p>
-            <a:pPr algn="r" indent="0" marL="0">
-              <a:buNone/>
-            </a:pPr>
-            <a:r>
-              <a:rPr lang="en-US" sz="1400" b="1" dirty="0">
-                <a:solidFill>
-                  <a:srgbClr val="1C3F6E"/>
-                </a:solidFill>
-                <a:latin typeface="Calibri" pitchFamily="34" charset="0"/>
-                <a:ea typeface="Calibri" pitchFamily="34" charset="-122"/>
-                <a:cs typeface="Calibri" pitchFamily="34" charset="-120"/>
-              </a:rPr>
-              <a:t>REFERENCES</a:t>
-            </a:r>
-            <a:endParaRPr lang="en-US" sz="1400" dirty="0"/>
-          </a:p>
-        </p:txBody>
-      </p:sp>
-      <p:pic>
-        <p:nvPicPr>
-          <p:cNvPr id="3" name="Image 0" descr="/home/claude/f4/img/minesec_sheet.png">    </p:cNvPr>
-          <p:cNvPicPr>
-            <a:picLocks noChangeAspect="1"/>
-          </p:cNvPicPr>
-          <p:nvPr/>
-        </p:nvPicPr>
-        <p:blipFill>
-          <a:blip r:embed="rId1"/>
-          <a:stretch>
-            <a:fillRect/>
-          </a:stretch>
-        </p:blipFill>
-        <p:spPr>
-          <a:xfrm>
-            <a:off x="0" y="658368"/>
-            <a:ext cx="5120640" cy="5833872"/>
-          </a:xfrm>
-          <a:prstGeom prst="rect">
-            <a:avLst/>
-          </a:prstGeom>
-        </p:spPr>
-      </p:pic>
-      <p:sp>
-        <p:nvSpPr>
-          <p:cNvPr id="4" name="Text 1"/>
-          <p:cNvSpPr/>
-          <p:nvPr/>
-        </p:nvSpPr>
-        <p:spPr>
-          <a:xfrm>
-            <a:off x="5349240" y="1005840"/>
-            <a:ext cx="6522415" cy="731520"/>
-          </a:xfrm>
-          <a:prstGeom prst="rect">
-            <a:avLst/>
-          </a:prstGeom>
-          <a:noFill/>
-          <a:ln/>
-        </p:spPr>
-        <p:txBody>
-          <a:bodyPr wrap="square" lIns="0" tIns="0" rIns="0" bIns="0" rtlCol="0" anchor="ctr">
-            <a:normAutofit/>
-          </a:bodyPr>
-          <a:lstStyle/>
-          <a:p>
-            <a:pPr algn="ctr" indent="0" marL="0">
-              <a:buNone/>
-            </a:pPr>
-            <a:r>
-              <a:rPr lang="en-US" sz="3600" b="1" dirty="0">
-                <a:solidFill>
-                  <a:srgbClr val="990011"/>
-                </a:solidFill>
-                <a:latin typeface="Times New Roman" pitchFamily="34" charset="0"/>
-                <a:ea typeface="Times New Roman" pitchFamily="34" charset="-122"/>
-                <a:cs typeface="Times New Roman" pitchFamily="34" charset="-120"/>
-              </a:rPr>
-              <a:t>References</a:t>
-            </a:r>
-            <a:endParaRPr lang="en-US" sz="3600" dirty="0"/>
-          </a:p>
-        </p:txBody>
-      </p:sp>
-      <p:sp>
-        <p:nvSpPr>
-          <p:cNvPr id="5" name="Text 2"/>
-          <p:cNvSpPr/>
-          <p:nvPr/>
-        </p:nvSpPr>
-        <p:spPr>
-          <a:xfrm>
-            <a:off x="5349240" y="1783080"/>
-            <a:ext cx="6522415" cy="4663440"/>
-          </a:xfrm>
-          <a:prstGeom prst="rect">
-            <a:avLst/>
-          </a:prstGeom>
-          <a:noFill/>
-          <a:ln/>
-        </p:spPr>
-        <p:txBody>
-          <a:bodyPr wrap="square" lIns="0" tIns="0" rIns="0" bIns="0" rtlCol="0" anchor="t"/>
-          <a:lstStyle/>
-          <a:p>
-            <a:pPr algn="l" marL="342900" indent="-342900">
-              <a:spcAft>
-                <a:spcPts val="800"/>
-              </a:spcAft>
-              <a:buSzPct val="100000"/>
-              <a:buChar char="•"/>
-            </a:pPr>
-            <a:r>
-              <a:rPr lang="en-US" sz="1800" dirty="0">
-                <a:solidFill>
-                  <a:srgbClr val="111111"/>
-                </a:solidFill>
-                <a:latin typeface="Calibri" pitchFamily="34" charset="0"/>
-                <a:ea typeface="Calibri" pitchFamily="34" charset="-122"/>
-                <a:cs typeface="Calibri" pitchFamily="34" charset="-120"/>
-              </a:rPr>
-              <a:t>Geography Syllabus, Forms I–V, MINESEC (2023) — Form 2, Module 1: Man in his Environment.</a:t>
-            </a:r>
-            <a:endParaRPr lang="en-US" sz="1800" dirty="0"/>
-          </a:p>
-          <a:p>
-            <a:pPr algn="l" marL="342900" indent="-342900">
-              <a:spcAft>
-                <a:spcPts val="800"/>
-              </a:spcAft>
-              <a:buSzPct val="100000"/>
-              <a:buChar char="•"/>
-            </a:pPr>
-            <a:r>
-              <a:rPr lang="en-US" sz="1800" dirty="0">
-                <a:solidFill>
-                  <a:srgbClr val="111111"/>
-                </a:solidFill>
-                <a:latin typeface="Calibri" pitchFamily="34" charset="0"/>
-                <a:ea typeface="Calibri" pitchFamily="34" charset="-122"/>
-                <a:cs typeface="Calibri" pitchFamily="34" charset="-120"/>
-              </a:rPr>
-              <a:t>Photo, Activity 3: “Desert trekking in Merzouga” by Antonio Cinotti , CC BY-NC-ND 2.0, via Flickr (https://www.flickr.com/photos/46378751@N02/15331399979)</a:t>
-            </a:r>
-            <a:endParaRPr lang="en-US" sz="1800" dirty="0"/>
-          </a:p>
-          <a:p>
-            <a:pPr algn="l" marL="342900" indent="-342900">
-              <a:spcAft>
-                <a:spcPts val="800"/>
-              </a:spcAft>
-              <a:buSzPct val="100000"/>
-              <a:buChar char="•"/>
-            </a:pPr>
-            <a:r>
-              <a:rPr lang="en-US" sz="1800" dirty="0">
-                <a:solidFill>
-                  <a:srgbClr val="111111"/>
-                </a:solidFill>
-                <a:latin typeface="Calibri" pitchFamily="34" charset="0"/>
-                <a:ea typeface="Calibri" pitchFamily="34" charset="-122"/>
-                <a:cs typeface="Calibri" pitchFamily="34" charset="-120"/>
-              </a:rPr>
-              <a:t>Photo, Activity 4: “Irrigated rice fields in Sefula, Zambia. Photo by Kate Longley, 2013.” by WorldFish, CC BY-NC-ND 2.0, via Flickr (https://www.flickr.com/photos/61545321@N06/8608804590)</a:t>
-            </a:r>
-            <a:endParaRPr lang="en-US" sz="1800" dirty="0"/>
-          </a:p>
-          <a:p>
-            <a:pPr algn="l" marL="342900" indent="-342900">
-              <a:spcAft>
-                <a:spcPts val="800"/>
-              </a:spcAft>
-              <a:buSzPct val="100000"/>
-              <a:buChar char="•"/>
-            </a:pPr>
-            <a:r>
-              <a:rPr lang="en-US" sz="1800" dirty="0">
-                <a:solidFill>
-                  <a:srgbClr val="111111"/>
-                </a:solidFill>
-                <a:latin typeface="Calibri" pitchFamily="34" charset="0"/>
-                <a:ea typeface="Calibri" pitchFamily="34" charset="-122"/>
-                <a:cs typeface="Calibri" pitchFamily="34" charset="-120"/>
-              </a:rPr>
-              <a:t>Photo, Activity 5: “Douala” by christing-O-, CC BY 2.0, via Flickr (https://www.flickr.com/photos/76187282@N00/7227535754)</a:t>
-            </a:r>
-            <a:endParaRPr lang="en-US" sz="1800" dirty="0"/>
-          </a:p>
-          <a:p>
-            <a:pPr algn="l" marL="342900" indent="-342900">
-              <a:spcAft>
-                <a:spcPts val="800"/>
-              </a:spcAft>
-              <a:buSzPct val="100000"/>
-              <a:buChar char="•"/>
-            </a:pPr>
-            <a:r>
-              <a:rPr lang="en-US" sz="1800" dirty="0">
-                <a:solidFill>
-                  <a:srgbClr val="111111"/>
-                </a:solidFill>
-                <a:latin typeface="Calibri" pitchFamily="34" charset="0"/>
-                <a:ea typeface="Calibri" pitchFamily="34" charset="-122"/>
-                <a:cs typeface="Calibri" pitchFamily="34" charset="-120"/>
-              </a:rPr>
-              <a:t>Diagrams and animations: drawn for this lesson (Geography Department).</a:t>
-            </a:r>
-            <a:endParaRPr lang="en-US" sz="1800" dirty="0"/>
-          </a:p>
-        </p:txBody>
-      </p:sp>
-      <p:sp>
-        <p:nvSpPr>
-          <p:cNvPr id="25" name="Slide Number Placeholder 0"/>
-          <p:cNvSpPr>
-            <a:spLocks noGrp="1"/>
-          </p:cNvSpPr>
-          <p:nvPr>
-            <p:ph type="sldNum" sz="quarter" idx="4294967295"/>
-          </p:nvPr>
-        </p:nvSpPr>
-        <p:spPr>
-          <a:xfrm>
-            <a:off x="27432" y="91440"/>
-            <a:ext cx="585216" cy="475488"/>
-          </a:xfrm>
-          <a:prstGeom prst="rect">
-            <a:avLst/>
-          </a:prstGeom>
-          <a:extLst>
-            <a:ext uri="{C572A759-6A51-4108-AA02-DFA0A04FC94B}">
-              <ma14:wrappingTextBoxFlag xmlns:ma14="http://schemas.microsoft.com/office/mac/drawingml/2011/main" val="0"/>
-            </a:ext>
-          </a:extLst>
-        </p:spPr>
-        <p:txBody>
-          <a:bodyPr/>
-          <a:lstStyle>
-            <a:lvl1pPr>
-              <a:defRPr sz="2000">
-                <a:solidFill>
-                  <a:srgbClr val="FFFFFF"/>
-                </a:solidFill>
-                <a:latin typeface="Calibri"/>
-                <a:ea typeface="Calibri"/>
-                <a:cs typeface="Calibri"/>
-              </a:defRPr>
-            </a:lvl1pPr>
-          </a:lstStyle>
-          <a:p>
-            <a:pPr algn="ctr"/>
-            <a:fld id="{F7021451-1387-4CA6-816F-3879F97B5CBC}" type="slidenum">
-              <a:rPr b="1" lang="en-US"/>
-              <a:t>51</a:t>
+              <a:t>56</a:t>
             </a:fld>
             <a:endParaRPr lang="en-US"/>
           </a:p>
@@ -20649,7 +22474,7 @@
                 <a:ea typeface="Times New Roman" pitchFamily="34" charset="-122"/>
                 <a:cs typeface="Times New Roman" pitchFamily="34" charset="-120"/>
               </a:rPr>
-              <a:t>Define population density and calculate it.</a:t>
+              <a:t>Define and calculate population density.</a:t>
             </a:r>
             <a:endParaRPr lang="en-US" sz="4000" dirty="0"/>
           </a:p>
@@ -20671,7 +22496,7 @@
                 <a:ea typeface="Times New Roman" pitchFamily="34" charset="-122"/>
                 <a:cs typeface="Times New Roman" pitchFamily="34" charset="-120"/>
               </a:rPr>
-              <a:t>Describe the distribution of the world population.</a:t>
+              <a:t>Describe the spatial distribution of the world population.</a:t>
             </a:r>
             <a:endParaRPr lang="en-US" sz="4000" dirty="0"/>
           </a:p>
@@ -21112,7 +22937,7 @@
                 <a:ea typeface="Times New Roman" pitchFamily="34" charset="-122"/>
                 <a:cs typeface="Times New Roman" pitchFamily="34" charset="-120"/>
               </a:rPr>
-              <a:t>The world has 8 billion people.</a:t>
+              <a:t>The world has more than 8 billion people.</a:t>
             </a:r>
             <a:endParaRPr lang="en-US" sz="4000" dirty="0"/>
           </a:p>

--- a/lecons/F2/03_F2_M1_L02_The_Uneven_Distribution_of_the_World_s_Population.pptx
+++ b/lecons/F2/03_F2_M1_L02_The_Uneven_Distribution_of_the_World_s_Population.pptx
@@ -3461,7 +3461,7 @@
           <a:p>
             <a:r>
               <a:rPr lang="en-US" dirty="0"/>
-              <a:t>Before we start the new lesson, let us correct the homework I gave you at the end of Practical Work 1: Calculation of the Demographic Indices of Cameroon. The question was: A village of 5,000 people has 200 births and 50 deaths. Calculate the three indices. Take out your exercise books.</a:t>
+              <a:t>Before we start the new lesson, let us correct the homework I gave you at the end of Practical Work 1: Calculation of the Demographic Indices of Cameroon. The question was: Write the formula of population density. Take out your exercise books.</a:t>
             </a:r>
             <a:endParaRPr lang="en-US" dirty="0"/>
           </a:p>
@@ -4429,7 +4429,7 @@
           <a:p>
             <a:r>
               <a:rPr lang="en-US" dirty="0"/>
-              <a:t>Here is a good answer. Birth rate = (200 ÷ 5,000) × 1,000 = 40 ‰. Death rate = (50 ÷ 5,000) × 1,000 = 10 ‰. Natural growth rate = (40 − 10) ÷ 10 = 3 %. Compare it with your own answer and correct your work in red.</a:t>
+              <a:t>Here is a good answer. Density = population ÷ area, in people per km². Compare it with your own answer and correct your work in red.</a:t>
             </a:r>
             <a:endParaRPr lang="en-US" dirty="0"/>
           </a:p>
@@ -4517,7 +4517,7 @@
           <a:p>
             <a:r>
               <a:rPr lang="en-US" dirty="0"/>
-              <a:t>For your homework: Find the population and the area of your region and calculate its density. We shall correct it at the beginning of our next lesson.</a:t>
+              <a:t>For your homework: Calculate the density of the Littoral: 3,850,000 people on 20,248 km². We shall correct it at the beginning of our next lesson.</a:t>
             </a:r>
             <a:endParaRPr lang="en-US" dirty="0"/>
           </a:p>
@@ -15302,7 +15302,7 @@
         <p:spPr>
           <a:xfrm>
             <a:off x="0" y="658368"/>
-            <a:ext cx="3840480" cy="5833872"/>
+            <a:ext cx="5120640" cy="5833872"/>
           </a:xfrm>
           <a:prstGeom prst="rect">
             <a:avLst/>
@@ -15317,8 +15317,8 @@
         </p:nvSpPr>
         <p:spPr>
           <a:xfrm>
-            <a:off x="4069080" y="1005840"/>
-            <a:ext cx="7802575" cy="731520"/>
+            <a:off x="5349240" y="1005840"/>
+            <a:ext cx="6522415" cy="731520"/>
           </a:xfrm>
           <a:prstGeom prst="rect">
             <a:avLst/>
@@ -15358,8 +15358,8 @@
         </p:nvSpPr>
         <p:spPr>
           <a:xfrm>
-            <a:off x="4069080" y="1783080"/>
-            <a:ext cx="7802575" cy="4663440"/>
+            <a:off x="5349240" y="1783080"/>
+            <a:ext cx="6522415" cy="4663440"/>
           </a:xfrm>
           <a:prstGeom prst="rect">
             <a:avLst/>
@@ -15406,7 +15406,7 @@
                 <a:ea typeface="Times New Roman" pitchFamily="34" charset="-122"/>
                 <a:cs typeface="Times New Roman" pitchFamily="34" charset="-120"/>
               </a:rPr>
-              <a:t>A village of 5,000 people has 200 births and 50 deaths. Calculate the three indices.</a:t>
+              <a:t>Write the formula of population density.</a:t>
             </a:r>
             <a:endParaRPr lang="en-US" sz="4000" dirty="0"/>
           </a:p>
@@ -18064,7 +18064,7 @@
                 <a:ea typeface="Times New Roman" pitchFamily="34" charset="-122"/>
                 <a:cs typeface="Times New Roman" pitchFamily="34" charset="-120"/>
               </a:rPr>
-              <a:t>Birth rate = (200 ÷ 5,000) × 1,000 = 40 ‰. Death rate = (50 ÷ 5,000) × 1,000 = 10 ‰. Natural growth rate = (40 − 10) ÷ 10 = 3 %.</a:t>
+              <a:t>Density = population ÷ area, in people per km².</a:t>
             </a:r>
             <a:endParaRPr lang="en-US" sz="4000" dirty="0"/>
           </a:p>
@@ -18283,7 +18283,7 @@
                 <a:ea typeface="Times New Roman" pitchFamily="34" charset="-122"/>
                 <a:cs typeface="Times New Roman" pitchFamily="34" charset="-120"/>
               </a:rPr>
-              <a:t>Find the population and the area of your region and calculate its density.</a:t>
+              <a:t>Calculate the density of the Littoral: 3,850,000 people on 20,248 km².</a:t>
             </a:r>
             <a:endParaRPr lang="en-US" sz="4000" dirty="0"/>
           </a:p>
@@ -20947,7 +20947,7 @@
                           <a:ea typeface="Calibri" pitchFamily="34" charset="-122"/>
                           <a:cs typeface="Calibri" pitchFamily="34" charset="-120"/>
                         </a:rPr>
-                        <a:t>Find the population and the area of your region and calculate its density.</a:t>
+                        <a:t>Calculate the density of the Littoral: 3,850,000 people on 20,248 km².</a:t>
                       </a:r>
                       <a:endParaRPr lang="en-US" sz="1600" dirty="0">
                         <a:latin typeface="Calibri" charset="0"/>
